--- a/slides/datasets-in-10-minutes-humaneval.pptx
+++ b/slides/datasets-in-10-minutes-humaneval.pptx
@@ -49,7 +49,6 @@
     <p:sldId id="297" r:id="rId47"/>
     <p:sldId id="298" r:id="rId48"/>
     <p:sldId id="299" r:id="rId49"/>
-    <p:sldId id="300" r:id="rId50"/>
     <p:sldId id="301" r:id="rId51"/>
     <p:sldId id="302" r:id="rId52"/>
     <p:sldId id="303" r:id="rId53"/>
@@ -7637,7 +7636,7 @@
                 <a:ea typeface="Noto Sans CJK JP"/>
                 <a:cs typeface="Noto Sans"/>
               </a:rPr>
-              <a:t>実例2：日本語訳と入出力例</a:t>
+              <a:t>実例2：入出力例と解説</a:t>
             </a:r>
           </a:p>
         </p:txBody>
@@ -7692,67 +7691,13 @@
       </p:sp>
       <p:sp>
         <p:nvSpPr>
-          <p:cNvPr id="4" name="TextBox 3"/>
-          <p:cNvSpPr txBox="1"/>
-          <p:nvPr/>
-        </p:nvSpPr>
-        <p:spPr>
-          <a:xfrm>
-            <a:off x="594360" y="1508760"/>
-            <a:ext cx="7955279" cy="961643"/>
-          </a:xfrm>
-          <a:prstGeom prst="rect">
-            <a:avLst/>
-          </a:prstGeom>
-          <a:noFill/>
-        </p:spPr>
-        <p:txBody>
-          <a:bodyPr wrap="square" lIns="0" rIns="0" tIns="0" bIns="0">
-            <a:noAutofit/>
-          </a:bodyPr>
-          <a:lstStyle/>
-          <a:p>
-            <a:pPr algn="l">
-              <a:lnSpc>
-                <a:spcPct val="119000"/>
-              </a:lnSpc>
-              <a:spcBef>
-                <a:spcPts val="0"/>
-              </a:spcBef>
-              <a:spcAft>
-                <a:spcPts val="0"/>
-              </a:spcAft>
-              <a:buNone/>
-              <a:defRPr sz="2000" b="0">
-                <a:solidFill>
-                  <a:srgbClr val="303437"/>
-                </a:solidFill>
-                <a:latin typeface="Noto Sans"/>
-              </a:defRPr>
-            </a:pPr>
-            <a:r>
-              <a:rPr sz="2000" b="0" lang="ja-JP" altLang="en-US">
-                <a:solidFill>
-                  <a:srgbClr val="303437"/>
-                </a:solidFill>
-                <a:latin typeface="Noto Sans"/>
-                <a:ea typeface="Noto Sans CJK JP"/>
-                <a:cs typeface="Noto Sans"/>
-              </a:rPr>
-              <a:t>空白を無視して括弧列を読み、各グループを文字列に分け、そのリストを返す。各グループの括弧は対応して閉じており、グループ同士は入れ子にならない。</a:t>
-            </a:r>
-          </a:p>
-        </p:txBody>
-      </p:sp>
-      <p:sp>
-        <p:nvSpPr>
           <p:cNvPr id="5" name="code-frame"/>
           <p:cNvSpPr/>
           <p:nvPr/>
         </p:nvSpPr>
         <p:spPr>
           <a:xfrm>
-            <a:off x="548640" y="2616708"/>
+            <a:off x="548640" y="1676401"/>
             <a:ext cx="8046720" cy="798068"/>
           </a:xfrm>
           <a:prstGeom prst="rect">
@@ -7857,7 +7802,7 @@
         </p:nvSpPr>
         <p:spPr>
           <a:xfrm>
-            <a:off x="594360" y="3579368"/>
+            <a:off x="594360" y="2639061"/>
             <a:ext cx="7955279" cy="629158"/>
           </a:xfrm>
           <a:prstGeom prst="rect">
@@ -8099,68 +8044,14 @@
       </p:sp>
       <p:sp>
         <p:nvSpPr>
-          <p:cNvPr id="4" name="TextBox 3"/>
-          <p:cNvSpPr txBox="1"/>
-          <p:nvPr/>
-        </p:nvSpPr>
-        <p:spPr>
-          <a:xfrm>
-            <a:off x="548640" y="1344168"/>
-            <a:ext cx="8046720" cy="228600"/>
-          </a:xfrm>
-          <a:prstGeom prst="rect">
-            <a:avLst/>
-          </a:prstGeom>
-          <a:noFill/>
-        </p:spPr>
-        <p:txBody>
-          <a:bodyPr wrap="square" lIns="0" rIns="0" tIns="0" bIns="0">
-            <a:noAutofit/>
-          </a:bodyPr>
-          <a:lstStyle/>
-          <a:p>
-            <a:pPr algn="l">
-              <a:lnSpc>
-                <a:spcPct val="117000"/>
-              </a:lnSpc>
-              <a:spcBef>
-                <a:spcPts val="0"/>
-              </a:spcBef>
-              <a:spcAft>
-                <a:spcPts val="0"/>
-              </a:spcAft>
-              <a:buNone/>
-              <a:defRPr sz="1300" b="0">
-                <a:solidFill>
-                  <a:srgbClr val="303437"/>
-                </a:solidFill>
-                <a:latin typeface="Noto Sans"/>
-              </a:defRPr>
-            </a:pPr>
-            <a:r>
-              <a:rPr sz="1300" b="0" lang="ja-JP" altLang="en-US">
-                <a:solidFill>
-                  <a:srgbClr val="626669"/>
-                </a:solidFill>
-                <a:latin typeface="Noto Sans"/>
-                <a:ea typeface="Noto Sans CJK JP"/>
-                <a:cs typeface="Noto Sans"/>
-              </a:rPr>
-              <a:t>仕様文の原文（docstringから抜粋）</a:t>
-            </a:r>
-          </a:p>
-        </p:txBody>
-      </p:sp>
-      <p:sp>
-        <p:nvSpPr>
           <p:cNvPr id="5" name="quote-frame"/>
           <p:cNvSpPr/>
           <p:nvPr/>
         </p:nvSpPr>
         <p:spPr>
           <a:xfrm>
-            <a:off x="548640" y="1691640"/>
-            <a:ext cx="8046720" cy="1765300"/>
+            <a:off x="548640" y="1549400"/>
+            <a:ext cx="8046720" cy="1663077"/>
           </a:xfrm>
           <a:prstGeom prst="rect">
             <a:avLst/>
@@ -8188,14 +8079,14 @@
           </a:fontRef>
         </p:style>
         <p:txBody>
-          <a:bodyPr rtlCol="0" anchor="ctr" wrap="square" lIns="177800" rIns="177800" tIns="101600" bIns="127000">
+          <a:bodyPr rtlCol="0" anchor="t" wrap="square" lIns="127000" rIns="127000" tIns="76200" bIns="76200">
             <a:noAutofit/>
           </a:bodyPr>
           <a:lstStyle/>
           <a:p>
             <a:pPr algn="l">
               <a:lnSpc>
-                <a:spcPts val="2379"/>
+                <a:spcPts val="2340"/>
               </a:lnSpc>
               <a:spcBef>
                 <a:spcPts val="0"/>
@@ -8274,7 +8165,7 @@
                 <a:ea typeface="Noto Sans CJK JP"/>
                 <a:cs typeface="Noto Sans"/>
               </a:rPr>
-              <a:t>[1] OpenAI. HumanEval.jsonl.gz. 改訂b9453e8。 HumanEval/3。入出力例は日本語訳とともに掲載。</a:t>
+              <a:t>[1] OpenAI. HumanEval.jsonl.gz. 改訂b9453e8。 HumanEval/3。仕様文を抜粋。</a:t>
             </a:r>
           </a:p>
           <a:p>
@@ -8301,6 +8192,168 @@
                 <a:hlinkClick r:id="rId2"/>
               </a:rPr>
               <a:t>https://github.com/openai/human-eval/blob/b9453e8/data/HumanEval.jsonl.gz</a:t>
+            </a:r>
+          </a:p>
+        </p:txBody>
+      </p:sp>
+      <p:sp>
+        <p:nvSpPr>
+          <p:cNvPr id="7" name="TextBox 6"/>
+          <p:cNvSpPr txBox="1"/>
+          <p:nvPr/>
+        </p:nvSpPr>
+        <p:spPr>
+          <a:xfrm>
+            <a:off x="548640" y="1295400"/>
+            <a:ext cx="8046720" cy="203200"/>
+          </a:xfrm>
+          <a:prstGeom prst="rect">
+            <a:avLst/>
+          </a:prstGeom>
+          <a:noFill/>
+        </p:spPr>
+        <p:txBody>
+          <a:bodyPr wrap="square" lIns="0" rIns="0" tIns="0" bIns="0">
+            <a:noAutofit/>
+          </a:bodyPr>
+          <a:lstStyle/>
+          <a:p>
+            <a:pPr algn="l">
+              <a:lnSpc>
+                <a:spcPct val="117000"/>
+              </a:lnSpc>
+              <a:spcBef>
+                <a:spcPts val="0"/>
+              </a:spcBef>
+              <a:spcAft>
+                <a:spcPts val="0"/>
+              </a:spcAft>
+              <a:buNone/>
+              <a:defRPr sz="1200" b="0">
+                <a:solidFill>
+                  <a:srgbClr val="303437"/>
+                </a:solidFill>
+                <a:latin typeface="Noto Sans"/>
+              </a:defRPr>
+            </a:pPr>
+            <a:r>
+              <a:rPr sz="1200" b="0" lang="ja-JP" altLang="en-US">
+                <a:solidFill>
+                  <a:srgbClr val="626669"/>
+                </a:solidFill>
+                <a:latin typeface="Noto Sans"/>
+                <a:ea typeface="Noto Sans CJK JP"/>
+                <a:cs typeface="Noto Sans"/>
+              </a:rPr>
+              <a:t>仕様文の原文（抜粋）</a:t>
+            </a:r>
+          </a:p>
+        </p:txBody>
+      </p:sp>
+      <p:sp>
+        <p:nvSpPr>
+          <p:cNvPr id="8" name="TextBox 7"/>
+          <p:cNvSpPr txBox="1"/>
+          <p:nvPr/>
+        </p:nvSpPr>
+        <p:spPr>
+          <a:xfrm>
+            <a:off x="548640" y="3288678"/>
+            <a:ext cx="8046720" cy="203200"/>
+          </a:xfrm>
+          <a:prstGeom prst="rect">
+            <a:avLst/>
+          </a:prstGeom>
+          <a:noFill/>
+        </p:spPr>
+        <p:txBody>
+          <a:bodyPr wrap="square" lIns="0" rIns="0" tIns="0" bIns="0">
+            <a:noAutofit/>
+          </a:bodyPr>
+          <a:lstStyle/>
+          <a:p>
+            <a:pPr algn="l">
+              <a:lnSpc>
+                <a:spcPct val="117000"/>
+              </a:lnSpc>
+              <a:spcBef>
+                <a:spcPts val="0"/>
+              </a:spcBef>
+              <a:spcAft>
+                <a:spcPts val="0"/>
+              </a:spcAft>
+              <a:buNone/>
+              <a:defRPr sz="1200" b="0">
+                <a:solidFill>
+                  <a:srgbClr val="303437"/>
+                </a:solidFill>
+                <a:latin typeface="Noto Sans"/>
+              </a:defRPr>
+            </a:pPr>
+            <a:r>
+              <a:rPr sz="1200" b="0" lang="ja-JP" altLang="en-US">
+                <a:solidFill>
+                  <a:srgbClr val="626669"/>
+                </a:solidFill>
+                <a:latin typeface="Noto Sans"/>
+                <a:ea typeface="Noto Sans CJK JP"/>
+                <a:cs typeface="Noto Sans"/>
+              </a:rPr>
+              <a:t>日本語訳</a:t>
+            </a:r>
+          </a:p>
+        </p:txBody>
+      </p:sp>
+      <p:sp>
+        <p:nvSpPr>
+          <p:cNvPr id="9" name="TextBox 3"/>
+          <p:cNvSpPr txBox="1"/>
+          <p:nvPr/>
+        </p:nvSpPr>
+        <p:spPr>
+          <a:xfrm>
+            <a:off x="594360" y="3542678"/>
+            <a:ext cx="7955280" cy="632460"/>
+          </a:xfrm>
+          <a:prstGeom prst="rect">
+            <a:avLst/>
+          </a:prstGeom>
+          <a:noFill/>
+        </p:spPr>
+        <p:txBody>
+          <a:bodyPr wrap="square" lIns="0" rIns="0" tIns="0" bIns="0">
+            <a:noAutofit/>
+          </a:bodyPr>
+          <a:lstStyle/>
+          <a:p>
+            <a:pPr algn="l">
+              <a:lnSpc>
+                <a:spcPts val="2340"/>
+              </a:lnSpc>
+              <a:spcBef>
+                <a:spcPts val="0"/>
+              </a:spcBef>
+              <a:spcAft>
+                <a:spcPts val="0"/>
+              </a:spcAft>
+              <a:buNone/>
+              <a:defRPr sz="2000" b="0">
+                <a:solidFill>
+                  <a:srgbClr val="303437"/>
+                </a:solidFill>
+                <a:latin typeface="Noto Sans"/>
+              </a:defRPr>
+            </a:pPr>
+            <a:r>
+              <a:rPr sz="2000" b="0" lang="ja-JP" altLang="en-US">
+                <a:solidFill>
+                  <a:srgbClr val="303437"/>
+                </a:solidFill>
+                <a:latin typeface="Noto Sans"/>
+                <a:ea typeface="Noto Sans CJK JP"/>
+                <a:cs typeface="Noto Sans"/>
+              </a:rPr>
+              <a:t>残高0から入出金のリストを順に適用する。途中で一度でも残高が負になればTrue、ならなければFalseを返す。</a:t>
             </a:r>
           </a:p>
         </p:txBody>
@@ -8366,7 +8419,7 @@
                 <a:ea typeface="Noto Sans CJK JP"/>
                 <a:cs typeface="Noto Sans"/>
               </a:rPr>
-              <a:t>実例3：日本語訳と入出力例</a:t>
+              <a:t>実例3：入出力例と解説</a:t>
             </a:r>
           </a:p>
         </p:txBody>
@@ -8421,67 +8474,13 @@
       </p:sp>
       <p:sp>
         <p:nvSpPr>
-          <p:cNvPr id="4" name="TextBox 3"/>
-          <p:cNvSpPr txBox="1"/>
-          <p:nvPr/>
-        </p:nvSpPr>
-        <p:spPr>
-          <a:xfrm>
-            <a:off x="594360" y="1508760"/>
-            <a:ext cx="7955279" cy="659383"/>
-          </a:xfrm>
-          <a:prstGeom prst="rect">
-            <a:avLst/>
-          </a:prstGeom>
-          <a:noFill/>
-        </p:spPr>
-        <p:txBody>
-          <a:bodyPr wrap="square" lIns="0" rIns="0" tIns="0" bIns="0">
-            <a:noAutofit/>
-          </a:bodyPr>
-          <a:lstStyle/>
-          <a:p>
-            <a:pPr algn="l">
-              <a:lnSpc>
-                <a:spcPct val="119000"/>
-              </a:lnSpc>
-              <a:spcBef>
-                <a:spcPts val="0"/>
-              </a:spcBef>
-              <a:spcAft>
-                <a:spcPts val="0"/>
-              </a:spcAft>
-              <a:buNone/>
-              <a:defRPr sz="2000" b="0">
-                <a:solidFill>
-                  <a:srgbClr val="303437"/>
-                </a:solidFill>
-                <a:latin typeface="Noto Sans"/>
-              </a:defRPr>
-            </a:pPr>
-            <a:r>
-              <a:rPr sz="2000" b="0" lang="ja-JP" altLang="en-US">
-                <a:solidFill>
-                  <a:srgbClr val="303437"/>
-                </a:solidFill>
-                <a:latin typeface="Noto Sans"/>
-                <a:ea typeface="Noto Sans CJK JP"/>
-                <a:cs typeface="Noto Sans"/>
-              </a:rPr>
-              <a:t>残高0から入出金のリストを順に適用する。途中で一度でも残高が負になればTrue、ならなければFalseを返す。</a:t>
-            </a:r>
-          </a:p>
-        </p:txBody>
-      </p:sp>
-      <p:sp>
-        <p:nvSpPr>
           <p:cNvPr id="5" name="code-frame"/>
           <p:cNvSpPr/>
           <p:nvPr/>
         </p:nvSpPr>
         <p:spPr>
           <a:xfrm>
-            <a:off x="548640" y="2314448"/>
+            <a:off x="548640" y="1676400"/>
             <a:ext cx="8046720" cy="1342135"/>
           </a:xfrm>
           <a:prstGeom prst="rect">
@@ -8648,7 +8647,7 @@
         </p:nvSpPr>
         <p:spPr>
           <a:xfrm>
-            <a:off x="594360" y="3821175"/>
+            <a:off x="594360" y="3183127"/>
             <a:ext cx="7955279" cy="342011"/>
           </a:xfrm>
           <a:prstGeom prst="rect">
@@ -12764,7 +12763,7 @@
                 <a:ea typeface="Noto Sans CJK JP"/>
                 <a:cs typeface="Noto Sans"/>
               </a:rPr>
-              <a:t>原著Table 1。各指標には論文が選んだ生成温度を使う。12Bは約120億パラメータ。</a:t>
+              <a:t>Chenら（2021）のTable 1。各指標には論文が選んだ生成温度を使う。12Bは約120億パラメータ。</a:t>
             </a:r>
           </a:p>
         </p:txBody>
@@ -14561,7 +14560,7 @@
                 <a:ea typeface="Noto Sans CJK JP"/>
                 <a:cs typeface="Noto Sans"/>
               </a:rPr>
-              <a:t>原著は、GitHub由来のコードで学習したCodexを評価するため、問題を手作業で新しく作成した。</a:t>
+              <a:t>GitHub由来のコードで学習したCodexを評価するため、問題を手作業で新しく作成した。</a:t>
             </a:r>
           </a:p>
           <a:p>
@@ -14621,7 +14620,7 @@
                 <a:ea typeface="Noto Sans CJK JP"/>
                 <a:cs typeface="Noto Sans"/>
               </a:rPr>
-              <a:t>原著は1問あたり平均7.7件のテストを報告する。モデルが仕様を満たすかを、実際の実行結果で調べる。</a:t>
+              <a:t>公開時には1問あたり平均7.7件のテストが用意された。モデルが仕様を満たすかを、実際の実行結果で調べる。</a:t>
             </a:r>
           </a:p>
         </p:txBody>
@@ -19413,68 +19412,14 @@
       </p:sp>
       <p:sp>
         <p:nvSpPr>
-          <p:cNvPr id="4" name="TextBox 3"/>
-          <p:cNvSpPr txBox="1"/>
-          <p:nvPr/>
-        </p:nvSpPr>
-        <p:spPr>
-          <a:xfrm>
-            <a:off x="548640" y="1344168"/>
-            <a:ext cx="8046720" cy="228600"/>
-          </a:xfrm>
-          <a:prstGeom prst="rect">
-            <a:avLst/>
-          </a:prstGeom>
-          <a:noFill/>
-        </p:spPr>
-        <p:txBody>
-          <a:bodyPr wrap="square" lIns="0" rIns="0" tIns="0" bIns="0">
-            <a:noAutofit/>
-          </a:bodyPr>
-          <a:lstStyle/>
-          <a:p>
-            <a:pPr algn="l">
-              <a:lnSpc>
-                <a:spcPct val="117000"/>
-              </a:lnSpc>
-              <a:spcBef>
-                <a:spcPts val="0"/>
-              </a:spcBef>
-              <a:spcAft>
-                <a:spcPts val="0"/>
-              </a:spcAft>
-              <a:buNone/>
-              <a:defRPr sz="1300" b="0">
-                <a:solidFill>
-                  <a:srgbClr val="303437"/>
-                </a:solidFill>
-                <a:latin typeface="Noto Sans"/>
-              </a:defRPr>
-            </a:pPr>
-            <a:r>
-              <a:rPr sz="1300" b="0" lang="ja-JP" altLang="en-US">
-                <a:solidFill>
-                  <a:srgbClr val="626669"/>
-                </a:solidFill>
-                <a:latin typeface="Noto Sans"/>
-                <a:ea typeface="Noto Sans CJK JP"/>
-                <a:cs typeface="Noto Sans"/>
-              </a:rPr>
-              <a:t>仕様文の原文（docstringから抜粋）</a:t>
-            </a:r>
-          </a:p>
-        </p:txBody>
-      </p:sp>
-      <p:sp>
-        <p:nvSpPr>
           <p:cNvPr id="5" name="quote-frame"/>
           <p:cNvSpPr/>
           <p:nvPr/>
         </p:nvSpPr>
         <p:spPr>
           <a:xfrm>
-            <a:off x="548640" y="1691640"/>
-            <a:ext cx="8046720" cy="1463039"/>
+            <a:off x="548640" y="1549400"/>
+            <a:ext cx="8046720" cy="1365706"/>
           </a:xfrm>
           <a:prstGeom prst="rect">
             <a:avLst/>
@@ -19502,14 +19447,14 @@
           </a:fontRef>
         </p:style>
         <p:txBody>
-          <a:bodyPr rtlCol="0" anchor="ctr" wrap="square" lIns="177800" rIns="177800" tIns="101600" bIns="127000">
+          <a:bodyPr rtlCol="0" anchor="t" wrap="square" lIns="127000" rIns="127000" tIns="76200" bIns="76200">
             <a:noAutofit/>
           </a:bodyPr>
           <a:lstStyle/>
           <a:p>
             <a:pPr algn="l">
               <a:lnSpc>
-                <a:spcPts val="2379"/>
+                <a:spcPts val="2340"/>
               </a:lnSpc>
               <a:spcBef>
                 <a:spcPts val="0"/>
@@ -19588,7 +19533,7 @@
                 <a:ea typeface="Noto Sans CJK JP"/>
                 <a:cs typeface="Noto Sans"/>
               </a:rPr>
-              <a:t>[1] OpenAI. HumanEval.jsonl.gz. 改訂b9453e8。 HumanEval/2。入出力例は日本語訳とともに掲載。</a:t>
+              <a:t>[1] OpenAI. HumanEval.jsonl.gz. 改訂b9453e8。 HumanEval/2。仕様文を抜粋。</a:t>
             </a:r>
           </a:p>
           <a:p>
@@ -19615,6 +19560,168 @@
                 <a:hlinkClick r:id="rId2"/>
               </a:rPr>
               <a:t>https://github.com/openai/human-eval/blob/b9453e8/data/HumanEval.jsonl.gz</a:t>
+            </a:r>
+          </a:p>
+        </p:txBody>
+      </p:sp>
+      <p:sp>
+        <p:nvSpPr>
+          <p:cNvPr id="7" name="TextBox 6"/>
+          <p:cNvSpPr txBox="1"/>
+          <p:nvPr/>
+        </p:nvSpPr>
+        <p:spPr>
+          <a:xfrm>
+            <a:off x="548640" y="1295400"/>
+            <a:ext cx="8046720" cy="203200"/>
+          </a:xfrm>
+          <a:prstGeom prst="rect">
+            <a:avLst/>
+          </a:prstGeom>
+          <a:noFill/>
+        </p:spPr>
+        <p:txBody>
+          <a:bodyPr wrap="square" lIns="0" rIns="0" tIns="0" bIns="0">
+            <a:noAutofit/>
+          </a:bodyPr>
+          <a:lstStyle/>
+          <a:p>
+            <a:pPr algn="l">
+              <a:lnSpc>
+                <a:spcPct val="117000"/>
+              </a:lnSpc>
+              <a:spcBef>
+                <a:spcPts val="0"/>
+              </a:spcBef>
+              <a:spcAft>
+                <a:spcPts val="0"/>
+              </a:spcAft>
+              <a:buNone/>
+              <a:defRPr sz="1200" b="0">
+                <a:solidFill>
+                  <a:srgbClr val="303437"/>
+                </a:solidFill>
+                <a:latin typeface="Noto Sans"/>
+              </a:defRPr>
+            </a:pPr>
+            <a:r>
+              <a:rPr sz="1200" b="0" lang="ja-JP" altLang="en-US">
+                <a:solidFill>
+                  <a:srgbClr val="626669"/>
+                </a:solidFill>
+                <a:latin typeface="Noto Sans"/>
+                <a:ea typeface="Noto Sans CJK JP"/>
+                <a:cs typeface="Noto Sans"/>
+              </a:rPr>
+              <a:t>仕様文の原文（抜粋）</a:t>
+            </a:r>
+          </a:p>
+        </p:txBody>
+      </p:sp>
+      <p:sp>
+        <p:nvSpPr>
+          <p:cNvPr id="8" name="TextBox 7"/>
+          <p:cNvSpPr txBox="1"/>
+          <p:nvPr/>
+        </p:nvSpPr>
+        <p:spPr>
+          <a:xfrm>
+            <a:off x="548640" y="2991307"/>
+            <a:ext cx="8046720" cy="203200"/>
+          </a:xfrm>
+          <a:prstGeom prst="rect">
+            <a:avLst/>
+          </a:prstGeom>
+          <a:noFill/>
+        </p:spPr>
+        <p:txBody>
+          <a:bodyPr wrap="square" lIns="0" rIns="0" tIns="0" bIns="0">
+            <a:noAutofit/>
+          </a:bodyPr>
+          <a:lstStyle/>
+          <a:p>
+            <a:pPr algn="l">
+              <a:lnSpc>
+                <a:spcPct val="117000"/>
+              </a:lnSpc>
+              <a:spcBef>
+                <a:spcPts val="0"/>
+              </a:spcBef>
+              <a:spcAft>
+                <a:spcPts val="0"/>
+              </a:spcAft>
+              <a:buNone/>
+              <a:defRPr sz="1200" b="0">
+                <a:solidFill>
+                  <a:srgbClr val="303437"/>
+                </a:solidFill>
+                <a:latin typeface="Noto Sans"/>
+              </a:defRPr>
+            </a:pPr>
+            <a:r>
+              <a:rPr sz="1200" b="0" lang="ja-JP" altLang="en-US">
+                <a:solidFill>
+                  <a:srgbClr val="626669"/>
+                </a:solidFill>
+                <a:latin typeface="Noto Sans"/>
+                <a:ea typeface="Noto Sans CJK JP"/>
+                <a:cs typeface="Noto Sans"/>
+              </a:rPr>
+              <a:t>日本語訳</a:t>
+            </a:r>
+          </a:p>
+        </p:txBody>
+      </p:sp>
+      <p:sp>
+        <p:nvSpPr>
+          <p:cNvPr id="9" name="TextBox 3"/>
+          <p:cNvSpPr txBox="1"/>
+          <p:nvPr/>
+        </p:nvSpPr>
+        <p:spPr>
+          <a:xfrm>
+            <a:off x="594360" y="3245307"/>
+            <a:ext cx="7955280" cy="632460"/>
+          </a:xfrm>
+          <a:prstGeom prst="rect">
+            <a:avLst/>
+          </a:prstGeom>
+          <a:noFill/>
+        </p:spPr>
+        <p:txBody>
+          <a:bodyPr wrap="square" lIns="0" rIns="0" tIns="0" bIns="0">
+            <a:noAutofit/>
+          </a:bodyPr>
+          <a:lstStyle/>
+          <a:p>
+            <a:pPr algn="l">
+              <a:lnSpc>
+                <a:spcPts val="2340"/>
+              </a:lnSpc>
+              <a:spcBef>
+                <a:spcPts val="0"/>
+              </a:spcBef>
+              <a:spcAft>
+                <a:spcPts val="0"/>
+              </a:spcAft>
+              <a:buNone/>
+              <a:defRPr sz="2000" b="0">
+                <a:solidFill>
+                  <a:srgbClr val="303437"/>
+                </a:solidFill>
+                <a:latin typeface="Noto Sans"/>
+              </a:defRPr>
+            </a:pPr>
+            <a:r>
+              <a:rPr sz="2000" b="0" lang="ja-JP" altLang="en-US">
+                <a:solidFill>
+                  <a:srgbClr val="303437"/>
+                </a:solidFill>
+                <a:latin typeface="Noto Sans"/>
+                <a:ea typeface="Noto Sans CJK JP"/>
+                <a:cs typeface="Noto Sans"/>
+              </a:rPr>
+              <a:t>正の浮動小数点数を受け取り、整数部分を除いた、1未満の小数部分を返す。</a:t>
             </a:r>
           </a:p>
         </p:txBody>
@@ -19680,7 +19787,7 @@
                 <a:ea typeface="Noto Sans CJK JP"/>
                 <a:cs typeface="Noto Sans"/>
               </a:rPr>
-              <a:t>追加例1：日本語訳と入出力例</a:t>
+              <a:t>追加例1：入出力例と解説</a:t>
             </a:r>
           </a:p>
         </p:txBody>
@@ -19735,67 +19842,13 @@
       </p:sp>
       <p:sp>
         <p:nvSpPr>
-          <p:cNvPr id="4" name="TextBox 3"/>
-          <p:cNvSpPr txBox="1"/>
-          <p:nvPr/>
-        </p:nvSpPr>
-        <p:spPr>
-          <a:xfrm>
-            <a:off x="594360" y="1508760"/>
-            <a:ext cx="7955279" cy="659383"/>
-          </a:xfrm>
-          <a:prstGeom prst="rect">
-            <a:avLst/>
-          </a:prstGeom>
-          <a:noFill/>
-        </p:spPr>
-        <p:txBody>
-          <a:bodyPr wrap="square" lIns="0" rIns="0" tIns="0" bIns="0">
-            <a:noAutofit/>
-          </a:bodyPr>
-          <a:lstStyle/>
-          <a:p>
-            <a:pPr algn="l">
-              <a:lnSpc>
-                <a:spcPct val="119000"/>
-              </a:lnSpc>
-              <a:spcBef>
-                <a:spcPts val="0"/>
-              </a:spcBef>
-              <a:spcAft>
-                <a:spcPts val="0"/>
-              </a:spcAft>
-              <a:buNone/>
-              <a:defRPr sz="2000" b="0">
-                <a:solidFill>
-                  <a:srgbClr val="303437"/>
-                </a:solidFill>
-                <a:latin typeface="Noto Sans"/>
-              </a:defRPr>
-            </a:pPr>
-            <a:r>
-              <a:rPr sz="2000" b="0" lang="ja-JP" altLang="en-US">
-                <a:solidFill>
-                  <a:srgbClr val="303437"/>
-                </a:solidFill>
-                <a:latin typeface="Noto Sans"/>
-                <a:ea typeface="Noto Sans CJK JP"/>
-                <a:cs typeface="Noto Sans"/>
-              </a:rPr>
-              <a:t>正の浮動小数点数を受け取り、整数部分を除いた、1未満の小数部分を返す。</a:t>
-            </a:r>
-          </a:p>
-        </p:txBody>
-      </p:sp>
-      <p:sp>
-        <p:nvSpPr>
           <p:cNvPr id="5" name="code-frame"/>
           <p:cNvSpPr/>
           <p:nvPr/>
         </p:nvSpPr>
         <p:spPr>
           <a:xfrm>
-            <a:off x="548640" y="2314448"/>
+            <a:off x="548640" y="1676400"/>
             <a:ext cx="8046720" cy="798068"/>
           </a:xfrm>
           <a:prstGeom prst="rect">
@@ -19900,7 +19953,7 @@
         </p:nvSpPr>
         <p:spPr>
           <a:xfrm>
-            <a:off x="594360" y="3277108"/>
+            <a:off x="594360" y="2639060"/>
             <a:ext cx="7955279" cy="342011"/>
           </a:xfrm>
           <a:prstGeom prst="rect">
@@ -20142,68 +20195,14 @@
       </p:sp>
       <p:sp>
         <p:nvSpPr>
-          <p:cNvPr id="4" name="TextBox 3"/>
-          <p:cNvSpPr txBox="1"/>
-          <p:nvPr/>
-        </p:nvSpPr>
-        <p:spPr>
-          <a:xfrm>
-            <a:off x="548640" y="1344168"/>
-            <a:ext cx="8046720" cy="228600"/>
-          </a:xfrm>
-          <a:prstGeom prst="rect">
-            <a:avLst/>
-          </a:prstGeom>
-          <a:noFill/>
-        </p:spPr>
-        <p:txBody>
-          <a:bodyPr wrap="square" lIns="0" rIns="0" tIns="0" bIns="0">
-            <a:noAutofit/>
-          </a:bodyPr>
-          <a:lstStyle/>
-          <a:p>
-            <a:pPr algn="l">
-              <a:lnSpc>
-                <a:spcPct val="117000"/>
-              </a:lnSpc>
-              <a:spcBef>
-                <a:spcPts val="0"/>
-              </a:spcBef>
-              <a:spcAft>
-                <a:spcPts val="0"/>
-              </a:spcAft>
-              <a:buNone/>
-              <a:defRPr sz="1300" b="0">
-                <a:solidFill>
-                  <a:srgbClr val="303437"/>
-                </a:solidFill>
-                <a:latin typeface="Noto Sans"/>
-              </a:defRPr>
-            </a:pPr>
-            <a:r>
-              <a:rPr sz="1300" b="0" lang="ja-JP" altLang="en-US">
-                <a:solidFill>
-                  <a:srgbClr val="626669"/>
-                </a:solidFill>
-                <a:latin typeface="Noto Sans"/>
-                <a:ea typeface="Noto Sans CJK JP"/>
-                <a:cs typeface="Noto Sans"/>
-              </a:rPr>
-              <a:t>仕様文の原文（docstringから抜粋）</a:t>
-            </a:r>
-          </a:p>
-        </p:txBody>
-      </p:sp>
-      <p:sp>
-        <p:nvSpPr>
           <p:cNvPr id="5" name="quote-frame"/>
           <p:cNvSpPr/>
           <p:nvPr/>
         </p:nvSpPr>
         <p:spPr>
           <a:xfrm>
-            <a:off x="548640" y="1691640"/>
-            <a:ext cx="8046720" cy="1765300"/>
+            <a:off x="548640" y="1549400"/>
+            <a:ext cx="8046720" cy="1663077"/>
           </a:xfrm>
           <a:prstGeom prst="rect">
             <a:avLst/>
@@ -20231,14 +20230,14 @@
           </a:fontRef>
         </p:style>
         <p:txBody>
-          <a:bodyPr rtlCol="0" anchor="ctr" wrap="square" lIns="177800" rIns="177800" tIns="101600" bIns="127000">
+          <a:bodyPr rtlCol="0" anchor="t" wrap="square" lIns="127000" rIns="127000" tIns="76200" bIns="76200">
             <a:noAutofit/>
           </a:bodyPr>
           <a:lstStyle/>
           <a:p>
             <a:pPr algn="l">
               <a:lnSpc>
-                <a:spcPts val="2379"/>
+                <a:spcPts val="2340"/>
               </a:lnSpc>
               <a:spcBef>
                 <a:spcPts val="0"/>
@@ -20317,7 +20316,7 @@
                 <a:ea typeface="Noto Sans CJK JP"/>
                 <a:cs typeface="Noto Sans"/>
               </a:rPr>
-              <a:t>[1] OpenAI. HumanEval.jsonl.gz. 改訂b9453e8。 HumanEval/4。入出力例は日本語訳とともに掲載。</a:t>
+              <a:t>[1] OpenAI. HumanEval.jsonl.gz. 改訂b9453e8。 HumanEval/4。仕様文を抜粋。</a:t>
             </a:r>
           </a:p>
           <a:p>
@@ -20344,6 +20343,168 @@
                 <a:hlinkClick r:id="rId2"/>
               </a:rPr>
               <a:t>https://github.com/openai/human-eval/blob/b9453e8/data/HumanEval.jsonl.gz</a:t>
+            </a:r>
+          </a:p>
+        </p:txBody>
+      </p:sp>
+      <p:sp>
+        <p:nvSpPr>
+          <p:cNvPr id="7" name="TextBox 6"/>
+          <p:cNvSpPr txBox="1"/>
+          <p:nvPr/>
+        </p:nvSpPr>
+        <p:spPr>
+          <a:xfrm>
+            <a:off x="548640" y="1295400"/>
+            <a:ext cx="8046720" cy="203200"/>
+          </a:xfrm>
+          <a:prstGeom prst="rect">
+            <a:avLst/>
+          </a:prstGeom>
+          <a:noFill/>
+        </p:spPr>
+        <p:txBody>
+          <a:bodyPr wrap="square" lIns="0" rIns="0" tIns="0" bIns="0">
+            <a:noAutofit/>
+          </a:bodyPr>
+          <a:lstStyle/>
+          <a:p>
+            <a:pPr algn="l">
+              <a:lnSpc>
+                <a:spcPct val="117000"/>
+              </a:lnSpc>
+              <a:spcBef>
+                <a:spcPts val="0"/>
+              </a:spcBef>
+              <a:spcAft>
+                <a:spcPts val="0"/>
+              </a:spcAft>
+              <a:buNone/>
+              <a:defRPr sz="1200" b="0">
+                <a:solidFill>
+                  <a:srgbClr val="303437"/>
+                </a:solidFill>
+                <a:latin typeface="Noto Sans"/>
+              </a:defRPr>
+            </a:pPr>
+            <a:r>
+              <a:rPr sz="1200" b="0" lang="ja-JP" altLang="en-US">
+                <a:solidFill>
+                  <a:srgbClr val="626669"/>
+                </a:solidFill>
+                <a:latin typeface="Noto Sans"/>
+                <a:ea typeface="Noto Sans CJK JP"/>
+                <a:cs typeface="Noto Sans"/>
+              </a:rPr>
+              <a:t>仕様文の原文（抜粋）</a:t>
+            </a:r>
+          </a:p>
+        </p:txBody>
+      </p:sp>
+      <p:sp>
+        <p:nvSpPr>
+          <p:cNvPr id="8" name="TextBox 7"/>
+          <p:cNvSpPr txBox="1"/>
+          <p:nvPr/>
+        </p:nvSpPr>
+        <p:spPr>
+          <a:xfrm>
+            <a:off x="548640" y="3288678"/>
+            <a:ext cx="8046720" cy="203200"/>
+          </a:xfrm>
+          <a:prstGeom prst="rect">
+            <a:avLst/>
+          </a:prstGeom>
+          <a:noFill/>
+        </p:spPr>
+        <p:txBody>
+          <a:bodyPr wrap="square" lIns="0" rIns="0" tIns="0" bIns="0">
+            <a:noAutofit/>
+          </a:bodyPr>
+          <a:lstStyle/>
+          <a:p>
+            <a:pPr algn="l">
+              <a:lnSpc>
+                <a:spcPct val="117000"/>
+              </a:lnSpc>
+              <a:spcBef>
+                <a:spcPts val="0"/>
+              </a:spcBef>
+              <a:spcAft>
+                <a:spcPts val="0"/>
+              </a:spcAft>
+              <a:buNone/>
+              <a:defRPr sz="1200" b="0">
+                <a:solidFill>
+                  <a:srgbClr val="303437"/>
+                </a:solidFill>
+                <a:latin typeface="Noto Sans"/>
+              </a:defRPr>
+            </a:pPr>
+            <a:r>
+              <a:rPr sz="1200" b="0" lang="ja-JP" altLang="en-US">
+                <a:solidFill>
+                  <a:srgbClr val="626669"/>
+                </a:solidFill>
+                <a:latin typeface="Noto Sans"/>
+                <a:ea typeface="Noto Sans CJK JP"/>
+                <a:cs typeface="Noto Sans"/>
+              </a:rPr>
+              <a:t>日本語訳</a:t>
+            </a:r>
+          </a:p>
+        </p:txBody>
+      </p:sp>
+      <p:sp>
+        <p:nvSpPr>
+          <p:cNvPr id="9" name="TextBox 3"/>
+          <p:cNvSpPr txBox="1"/>
+          <p:nvPr/>
+        </p:nvSpPr>
+        <p:spPr>
+          <a:xfrm>
+            <a:off x="594360" y="3542678"/>
+            <a:ext cx="7955280" cy="632460"/>
+          </a:xfrm>
+          <a:prstGeom prst="rect">
+            <a:avLst/>
+          </a:prstGeom>
+          <a:noFill/>
+        </p:spPr>
+        <p:txBody>
+          <a:bodyPr wrap="square" lIns="0" rIns="0" tIns="0" bIns="0">
+            <a:noAutofit/>
+          </a:bodyPr>
+          <a:lstStyle/>
+          <a:p>
+            <a:pPr algn="l">
+              <a:lnSpc>
+                <a:spcPts val="2340"/>
+              </a:lnSpc>
+              <a:spcBef>
+                <a:spcPts val="0"/>
+              </a:spcBef>
+              <a:spcAft>
+                <a:spcPts val="0"/>
+              </a:spcAft>
+              <a:buNone/>
+              <a:defRPr sz="2000" b="0">
+                <a:solidFill>
+                  <a:srgbClr val="303437"/>
+                </a:solidFill>
+                <a:latin typeface="Noto Sans"/>
+              </a:defRPr>
+            </a:pPr>
+            <a:r>
+              <a:rPr sz="2000" b="0" lang="ja-JP" altLang="en-US">
+                <a:solidFill>
+                  <a:srgbClr val="303437"/>
+                </a:solidFill>
+                <a:latin typeface="Noto Sans"/>
+                <a:ea typeface="Noto Sans CJK JP"/>
+                <a:cs typeface="Noto Sans"/>
+              </a:rPr>
+              <a:t>数値のリストについて、平均からの平均絶対偏差を求める。各要素と平均との差の絶対値を取り、その平均を返す。</a:t>
             </a:r>
           </a:p>
         </p:txBody>
@@ -20409,7 +20570,7 @@
                 <a:ea typeface="Noto Sans CJK JP"/>
                 <a:cs typeface="Noto Sans"/>
               </a:rPr>
-              <a:t>追加例2：日本語訳と入出力例</a:t>
+              <a:t>追加例2：入出力例と解説</a:t>
             </a:r>
           </a:p>
         </p:txBody>
@@ -20464,67 +20625,13 @@
       </p:sp>
       <p:sp>
         <p:nvSpPr>
-          <p:cNvPr id="4" name="TextBox 3"/>
-          <p:cNvSpPr txBox="1"/>
-          <p:nvPr/>
-        </p:nvSpPr>
-        <p:spPr>
-          <a:xfrm>
-            <a:off x="594360" y="1508760"/>
-            <a:ext cx="7955279" cy="659383"/>
-          </a:xfrm>
-          <a:prstGeom prst="rect">
-            <a:avLst/>
-          </a:prstGeom>
-          <a:noFill/>
-        </p:spPr>
-        <p:txBody>
-          <a:bodyPr wrap="square" lIns="0" rIns="0" tIns="0" bIns="0">
-            <a:noAutofit/>
-          </a:bodyPr>
-          <a:lstStyle/>
-          <a:p>
-            <a:pPr algn="l">
-              <a:lnSpc>
-                <a:spcPct val="119000"/>
-              </a:lnSpc>
-              <a:spcBef>
-                <a:spcPts val="0"/>
-              </a:spcBef>
-              <a:spcAft>
-                <a:spcPts val="0"/>
-              </a:spcAft>
-              <a:buNone/>
-              <a:defRPr sz="2000" b="0">
-                <a:solidFill>
-                  <a:srgbClr val="303437"/>
-                </a:solidFill>
-                <a:latin typeface="Noto Sans"/>
-              </a:defRPr>
-            </a:pPr>
-            <a:r>
-              <a:rPr sz="2000" b="0" lang="ja-JP" altLang="en-US">
-                <a:solidFill>
-                  <a:srgbClr val="303437"/>
-                </a:solidFill>
-                <a:latin typeface="Noto Sans"/>
-                <a:ea typeface="Noto Sans CJK JP"/>
-                <a:cs typeface="Noto Sans"/>
-              </a:rPr>
-              <a:t>数値のリストについて、平均からの平均絶対偏差を求める。各要素と平均との差の絶対値を取り、その平均を返す。</a:t>
-            </a:r>
-          </a:p>
-        </p:txBody>
-      </p:sp>
-      <p:sp>
-        <p:nvSpPr>
           <p:cNvPr id="5" name="code-frame"/>
           <p:cNvSpPr/>
           <p:nvPr/>
         </p:nvSpPr>
         <p:spPr>
           <a:xfrm>
-            <a:off x="548640" y="2314448"/>
+            <a:off x="548640" y="1676400"/>
             <a:ext cx="8046720" cy="798068"/>
           </a:xfrm>
           <a:prstGeom prst="rect">
@@ -20629,7 +20736,7 @@
         </p:nvSpPr>
         <p:spPr>
           <a:xfrm>
-            <a:off x="594360" y="3277108"/>
+            <a:off x="594360" y="2639060"/>
             <a:ext cx="7955279" cy="629158"/>
           </a:xfrm>
           <a:prstGeom prst="rect">
@@ -20985,68 +21092,14 @@
       </p:sp>
       <p:sp>
         <p:nvSpPr>
-          <p:cNvPr id="4" name="TextBox 3"/>
-          <p:cNvSpPr txBox="1"/>
-          <p:nvPr/>
-        </p:nvSpPr>
-        <p:spPr>
-          <a:xfrm>
-            <a:off x="548640" y="1344168"/>
-            <a:ext cx="8046720" cy="228600"/>
-          </a:xfrm>
-          <a:prstGeom prst="rect">
-            <a:avLst/>
-          </a:prstGeom>
-          <a:noFill/>
-        </p:spPr>
-        <p:txBody>
-          <a:bodyPr wrap="square" lIns="0" rIns="0" tIns="0" bIns="0">
-            <a:noAutofit/>
-          </a:bodyPr>
-          <a:lstStyle/>
-          <a:p>
-            <a:pPr algn="l">
-              <a:lnSpc>
-                <a:spcPct val="117000"/>
-              </a:lnSpc>
-              <a:spcBef>
-                <a:spcPts val="0"/>
-              </a:spcBef>
-              <a:spcAft>
-                <a:spcPts val="0"/>
-              </a:spcAft>
-              <a:buNone/>
-              <a:defRPr sz="1300" b="0">
-                <a:solidFill>
-                  <a:srgbClr val="303437"/>
-                </a:solidFill>
-                <a:latin typeface="Noto Sans"/>
-              </a:defRPr>
-            </a:pPr>
-            <a:r>
-              <a:rPr sz="1300" b="0" lang="ja-JP" altLang="en-US">
-                <a:solidFill>
-                  <a:srgbClr val="626669"/>
-                </a:solidFill>
-                <a:latin typeface="Noto Sans"/>
-                <a:ea typeface="Noto Sans CJK JP"/>
-                <a:cs typeface="Noto Sans"/>
-              </a:rPr>
-              <a:t>仕様文の原文（docstringから抜粋）</a:t>
-            </a:r>
-          </a:p>
-        </p:txBody>
-      </p:sp>
-      <p:sp>
-        <p:nvSpPr>
           <p:cNvPr id="5" name="quote-frame"/>
           <p:cNvSpPr/>
           <p:nvPr/>
         </p:nvSpPr>
         <p:spPr>
           <a:xfrm>
-            <a:off x="548640" y="1691640"/>
-            <a:ext cx="8046720" cy="858519"/>
+            <a:off x="548640" y="1549400"/>
+            <a:ext cx="8046720" cy="770635"/>
           </a:xfrm>
           <a:prstGeom prst="rect">
             <a:avLst/>
@@ -21074,14 +21127,14 @@
           </a:fontRef>
         </p:style>
         <p:txBody>
-          <a:bodyPr rtlCol="0" anchor="ctr" wrap="square" lIns="177800" rIns="177800" tIns="101600" bIns="127000">
+          <a:bodyPr rtlCol="0" anchor="t" wrap="square" lIns="127000" rIns="127000" tIns="76200" bIns="76200">
             <a:noAutofit/>
           </a:bodyPr>
           <a:lstStyle/>
           <a:p>
             <a:pPr algn="l">
               <a:lnSpc>
-                <a:spcPts val="2379"/>
+                <a:spcPts val="2340"/>
               </a:lnSpc>
               <a:spcBef>
                 <a:spcPts val="0"/>
@@ -21160,7 +21213,7 @@
                 <a:ea typeface="Noto Sans CJK JP"/>
                 <a:cs typeface="Noto Sans"/>
               </a:rPr>
-              <a:t>[1] OpenAI. HumanEval.jsonl.gz. 改訂b9453e8。 HumanEval/5。入出力例は日本語訳とともに掲載。</a:t>
+              <a:t>[1] OpenAI. HumanEval.jsonl.gz. 改訂b9453e8。 HumanEval/5。仕様文を抜粋。</a:t>
             </a:r>
           </a:p>
           <a:p>
@@ -21187,6 +21240,168 @@
                 <a:hlinkClick r:id="rId2"/>
               </a:rPr>
               <a:t>https://github.com/openai/human-eval/blob/b9453e8/data/HumanEval.jsonl.gz</a:t>
+            </a:r>
+          </a:p>
+        </p:txBody>
+      </p:sp>
+      <p:sp>
+        <p:nvSpPr>
+          <p:cNvPr id="7" name="TextBox 6"/>
+          <p:cNvSpPr txBox="1"/>
+          <p:nvPr/>
+        </p:nvSpPr>
+        <p:spPr>
+          <a:xfrm>
+            <a:off x="548640" y="1295400"/>
+            <a:ext cx="8046720" cy="203200"/>
+          </a:xfrm>
+          <a:prstGeom prst="rect">
+            <a:avLst/>
+          </a:prstGeom>
+          <a:noFill/>
+        </p:spPr>
+        <p:txBody>
+          <a:bodyPr wrap="square" lIns="0" rIns="0" tIns="0" bIns="0">
+            <a:noAutofit/>
+          </a:bodyPr>
+          <a:lstStyle/>
+          <a:p>
+            <a:pPr algn="l">
+              <a:lnSpc>
+                <a:spcPct val="117000"/>
+              </a:lnSpc>
+              <a:spcBef>
+                <a:spcPts val="0"/>
+              </a:spcBef>
+              <a:spcAft>
+                <a:spcPts val="0"/>
+              </a:spcAft>
+              <a:buNone/>
+              <a:defRPr sz="1200" b="0">
+                <a:solidFill>
+                  <a:srgbClr val="303437"/>
+                </a:solidFill>
+                <a:latin typeface="Noto Sans"/>
+              </a:defRPr>
+            </a:pPr>
+            <a:r>
+              <a:rPr sz="1200" b="0" lang="ja-JP" altLang="en-US">
+                <a:solidFill>
+                  <a:srgbClr val="626669"/>
+                </a:solidFill>
+                <a:latin typeface="Noto Sans"/>
+                <a:ea typeface="Noto Sans CJK JP"/>
+                <a:cs typeface="Noto Sans"/>
+              </a:rPr>
+              <a:t>仕様文の原文（抜粋）</a:t>
+            </a:r>
+          </a:p>
+        </p:txBody>
+      </p:sp>
+      <p:sp>
+        <p:nvSpPr>
+          <p:cNvPr id="8" name="TextBox 7"/>
+          <p:cNvSpPr txBox="1"/>
+          <p:nvPr/>
+        </p:nvSpPr>
+        <p:spPr>
+          <a:xfrm>
+            <a:off x="548640" y="2396236"/>
+            <a:ext cx="8046720" cy="203200"/>
+          </a:xfrm>
+          <a:prstGeom prst="rect">
+            <a:avLst/>
+          </a:prstGeom>
+          <a:noFill/>
+        </p:spPr>
+        <p:txBody>
+          <a:bodyPr wrap="square" lIns="0" rIns="0" tIns="0" bIns="0">
+            <a:noAutofit/>
+          </a:bodyPr>
+          <a:lstStyle/>
+          <a:p>
+            <a:pPr algn="l">
+              <a:lnSpc>
+                <a:spcPct val="117000"/>
+              </a:lnSpc>
+              <a:spcBef>
+                <a:spcPts val="0"/>
+              </a:spcBef>
+              <a:spcAft>
+                <a:spcPts val="0"/>
+              </a:spcAft>
+              <a:buNone/>
+              <a:defRPr sz="1200" b="0">
+                <a:solidFill>
+                  <a:srgbClr val="303437"/>
+                </a:solidFill>
+                <a:latin typeface="Noto Sans"/>
+              </a:defRPr>
+            </a:pPr>
+            <a:r>
+              <a:rPr sz="1200" b="0" lang="ja-JP" altLang="en-US">
+                <a:solidFill>
+                  <a:srgbClr val="626669"/>
+                </a:solidFill>
+                <a:latin typeface="Noto Sans"/>
+                <a:ea typeface="Noto Sans CJK JP"/>
+                <a:cs typeface="Noto Sans"/>
+              </a:rPr>
+              <a:t>日本語訳</a:t>
+            </a:r>
+          </a:p>
+        </p:txBody>
+      </p:sp>
+      <p:sp>
+        <p:nvSpPr>
+          <p:cNvPr id="9" name="TextBox 3"/>
+          <p:cNvSpPr txBox="1"/>
+          <p:nvPr/>
+        </p:nvSpPr>
+        <p:spPr>
+          <a:xfrm>
+            <a:off x="594360" y="2650236"/>
+            <a:ext cx="7955280" cy="335280"/>
+          </a:xfrm>
+          <a:prstGeom prst="rect">
+            <a:avLst/>
+          </a:prstGeom>
+          <a:noFill/>
+        </p:spPr>
+        <p:txBody>
+          <a:bodyPr wrap="square" lIns="0" rIns="0" tIns="0" bIns="0">
+            <a:noAutofit/>
+          </a:bodyPr>
+          <a:lstStyle/>
+          <a:p>
+            <a:pPr algn="l">
+              <a:lnSpc>
+                <a:spcPts val="2340"/>
+              </a:lnSpc>
+              <a:spcBef>
+                <a:spcPts val="0"/>
+              </a:spcBef>
+              <a:spcAft>
+                <a:spcPts val="0"/>
+              </a:spcAft>
+              <a:buNone/>
+              <a:defRPr sz="2000" b="0">
+                <a:solidFill>
+                  <a:srgbClr val="303437"/>
+                </a:solidFill>
+                <a:latin typeface="Noto Sans"/>
+              </a:defRPr>
+            </a:pPr>
+            <a:r>
+              <a:rPr sz="2000" b="0" lang="ja-JP" altLang="en-US">
+                <a:solidFill>
+                  <a:srgbClr val="303437"/>
+                </a:solidFill>
+                <a:latin typeface="Noto Sans"/>
+                <a:ea typeface="Noto Sans CJK JP"/>
+                <a:cs typeface="Noto Sans"/>
+              </a:rPr>
+              <a:t>整数リストの隣り合う要素の間に、指定された整数を挟んで返す。</a:t>
             </a:r>
           </a:p>
         </p:txBody>
@@ -21252,7 +21467,7 @@
                 <a:ea typeface="Noto Sans CJK JP"/>
                 <a:cs typeface="Noto Sans"/>
               </a:rPr>
-              <a:t>追加例3：日本語訳と入出力例</a:t>
+              <a:t>追加例3：入出力例と解説</a:t>
             </a:r>
           </a:p>
         </p:txBody>
@@ -21307,67 +21522,13 @@
       </p:sp>
       <p:sp>
         <p:nvSpPr>
-          <p:cNvPr id="4" name="TextBox 3"/>
-          <p:cNvSpPr txBox="1"/>
-          <p:nvPr/>
-        </p:nvSpPr>
-        <p:spPr>
-          <a:xfrm>
-            <a:off x="594360" y="1508760"/>
-            <a:ext cx="7955279" cy="357123"/>
-          </a:xfrm>
-          <a:prstGeom prst="rect">
-            <a:avLst/>
-          </a:prstGeom>
-          <a:noFill/>
-        </p:spPr>
-        <p:txBody>
-          <a:bodyPr wrap="square" lIns="0" rIns="0" tIns="0" bIns="0">
-            <a:noAutofit/>
-          </a:bodyPr>
-          <a:lstStyle/>
-          <a:p>
-            <a:pPr algn="l">
-              <a:lnSpc>
-                <a:spcPct val="119000"/>
-              </a:lnSpc>
-              <a:spcBef>
-                <a:spcPts val="0"/>
-              </a:spcBef>
-              <a:spcAft>
-                <a:spcPts val="0"/>
-              </a:spcAft>
-              <a:buNone/>
-              <a:defRPr sz="2000" b="0">
-                <a:solidFill>
-                  <a:srgbClr val="303437"/>
-                </a:solidFill>
-                <a:latin typeface="Noto Sans"/>
-              </a:defRPr>
-            </a:pPr>
-            <a:r>
-              <a:rPr sz="2000" b="0" lang="ja-JP" altLang="en-US">
-                <a:solidFill>
-                  <a:srgbClr val="303437"/>
-                </a:solidFill>
-                <a:latin typeface="Noto Sans"/>
-                <a:ea typeface="Noto Sans CJK JP"/>
-                <a:cs typeface="Noto Sans"/>
-              </a:rPr>
-              <a:t>整数リストの隣り合う要素の間に、指定された整数を挟んで返す。</a:t>
-            </a:r>
-          </a:p>
-        </p:txBody>
-      </p:sp>
-      <p:sp>
-        <p:nvSpPr>
           <p:cNvPr id="5" name="code-frame"/>
           <p:cNvSpPr/>
           <p:nvPr/>
         </p:nvSpPr>
         <p:spPr>
           <a:xfrm>
-            <a:off x="548640" y="2012187"/>
+            <a:off x="548640" y="1676400"/>
             <a:ext cx="8046720" cy="1342135"/>
           </a:xfrm>
           <a:prstGeom prst="rect">
@@ -21534,7 +21695,7 @@
         </p:nvSpPr>
         <p:spPr>
           <a:xfrm>
-            <a:off x="594360" y="3518916"/>
+            <a:off x="594360" y="3183129"/>
             <a:ext cx="7955279" cy="342011"/>
           </a:xfrm>
           <a:prstGeom prst="rect">
@@ -21776,68 +21937,14 @@
       </p:sp>
       <p:sp>
         <p:nvSpPr>
-          <p:cNvPr id="4" name="TextBox 3"/>
-          <p:cNvSpPr txBox="1"/>
-          <p:nvPr/>
-        </p:nvSpPr>
-        <p:spPr>
-          <a:xfrm>
-            <a:off x="548640" y="1344168"/>
-            <a:ext cx="8046720" cy="228600"/>
-          </a:xfrm>
-          <a:prstGeom prst="rect">
-            <a:avLst/>
-          </a:prstGeom>
-          <a:noFill/>
-        </p:spPr>
-        <p:txBody>
-          <a:bodyPr wrap="square" lIns="0" rIns="0" tIns="0" bIns="0">
-            <a:noAutofit/>
-          </a:bodyPr>
-          <a:lstStyle/>
-          <a:p>
-            <a:pPr algn="l">
-              <a:lnSpc>
-                <a:spcPct val="117000"/>
-              </a:lnSpc>
-              <a:spcBef>
-                <a:spcPts val="0"/>
-              </a:spcBef>
-              <a:spcAft>
-                <a:spcPts val="0"/>
-              </a:spcAft>
-              <a:buNone/>
-              <a:defRPr sz="1300" b="0">
-                <a:solidFill>
-                  <a:srgbClr val="303437"/>
-                </a:solidFill>
-                <a:latin typeface="Noto Sans"/>
-              </a:defRPr>
-            </a:pPr>
-            <a:r>
-              <a:rPr sz="1300" b="0" lang="ja-JP" altLang="en-US">
-                <a:solidFill>
-                  <a:srgbClr val="626669"/>
-                </a:solidFill>
-                <a:latin typeface="Noto Sans"/>
-                <a:ea typeface="Noto Sans CJK JP"/>
-                <a:cs typeface="Noto Sans"/>
-              </a:rPr>
-              <a:t>仕様文の原文（docstringから抜粋）</a:t>
-            </a:r>
-          </a:p>
-        </p:txBody>
-      </p:sp>
-      <p:sp>
-        <p:nvSpPr>
           <p:cNvPr id="5" name="quote-frame"/>
           <p:cNvSpPr/>
           <p:nvPr/>
         </p:nvSpPr>
         <p:spPr>
           <a:xfrm>
-            <a:off x="548640" y="1691640"/>
-            <a:ext cx="8046720" cy="1463039"/>
+            <a:off x="548640" y="1549400"/>
+            <a:ext cx="8046720" cy="1365706"/>
           </a:xfrm>
           <a:prstGeom prst="rect">
             <a:avLst/>
@@ -21865,14 +21972,14 @@
           </a:fontRef>
         </p:style>
         <p:txBody>
-          <a:bodyPr rtlCol="0" anchor="ctr" wrap="square" lIns="177800" rIns="177800" tIns="101600" bIns="127000">
+          <a:bodyPr rtlCol="0" anchor="t" wrap="square" lIns="127000" rIns="127000" tIns="76200" bIns="76200">
             <a:noAutofit/>
           </a:bodyPr>
           <a:lstStyle/>
           <a:p>
             <a:pPr algn="l">
               <a:lnSpc>
-                <a:spcPts val="2379"/>
+                <a:spcPts val="2340"/>
               </a:lnSpc>
               <a:spcBef>
                 <a:spcPts val="0"/>
@@ -21951,7 +22058,7 @@
                 <a:ea typeface="Noto Sans CJK JP"/>
                 <a:cs typeface="Noto Sans"/>
               </a:rPr>
-              <a:t>[1] OpenAI. HumanEval.jsonl.gz. 改訂b9453e8。 HumanEval/6。入出力例は日本語訳とともに掲載。</a:t>
+              <a:t>[1] OpenAI. HumanEval.jsonl.gz. 改訂b9453e8。 HumanEval/6。仕様文を抜粋。</a:t>
             </a:r>
           </a:p>
           <a:p>
@@ -21978,6 +22085,168 @@
                 <a:hlinkClick r:id="rId2"/>
               </a:rPr>
               <a:t>https://github.com/openai/human-eval/blob/b9453e8/data/HumanEval.jsonl.gz</a:t>
+            </a:r>
+          </a:p>
+        </p:txBody>
+      </p:sp>
+      <p:sp>
+        <p:nvSpPr>
+          <p:cNvPr id="7" name="TextBox 6"/>
+          <p:cNvSpPr txBox="1"/>
+          <p:nvPr/>
+        </p:nvSpPr>
+        <p:spPr>
+          <a:xfrm>
+            <a:off x="548640" y="1295400"/>
+            <a:ext cx="8046720" cy="203200"/>
+          </a:xfrm>
+          <a:prstGeom prst="rect">
+            <a:avLst/>
+          </a:prstGeom>
+          <a:noFill/>
+        </p:spPr>
+        <p:txBody>
+          <a:bodyPr wrap="square" lIns="0" rIns="0" tIns="0" bIns="0">
+            <a:noAutofit/>
+          </a:bodyPr>
+          <a:lstStyle/>
+          <a:p>
+            <a:pPr algn="l">
+              <a:lnSpc>
+                <a:spcPct val="117000"/>
+              </a:lnSpc>
+              <a:spcBef>
+                <a:spcPts val="0"/>
+              </a:spcBef>
+              <a:spcAft>
+                <a:spcPts val="0"/>
+              </a:spcAft>
+              <a:buNone/>
+              <a:defRPr sz="1200" b="0">
+                <a:solidFill>
+                  <a:srgbClr val="303437"/>
+                </a:solidFill>
+                <a:latin typeface="Noto Sans"/>
+              </a:defRPr>
+            </a:pPr>
+            <a:r>
+              <a:rPr sz="1200" b="0" lang="ja-JP" altLang="en-US">
+                <a:solidFill>
+                  <a:srgbClr val="626669"/>
+                </a:solidFill>
+                <a:latin typeface="Noto Sans"/>
+                <a:ea typeface="Noto Sans CJK JP"/>
+                <a:cs typeface="Noto Sans"/>
+              </a:rPr>
+              <a:t>仕様文の原文（抜粋）</a:t>
+            </a:r>
+          </a:p>
+        </p:txBody>
+      </p:sp>
+      <p:sp>
+        <p:nvSpPr>
+          <p:cNvPr id="8" name="TextBox 7"/>
+          <p:cNvSpPr txBox="1"/>
+          <p:nvPr/>
+        </p:nvSpPr>
+        <p:spPr>
+          <a:xfrm>
+            <a:off x="548640" y="2991307"/>
+            <a:ext cx="8046720" cy="203200"/>
+          </a:xfrm>
+          <a:prstGeom prst="rect">
+            <a:avLst/>
+          </a:prstGeom>
+          <a:noFill/>
+        </p:spPr>
+        <p:txBody>
+          <a:bodyPr wrap="square" lIns="0" rIns="0" tIns="0" bIns="0">
+            <a:noAutofit/>
+          </a:bodyPr>
+          <a:lstStyle/>
+          <a:p>
+            <a:pPr algn="l">
+              <a:lnSpc>
+                <a:spcPct val="117000"/>
+              </a:lnSpc>
+              <a:spcBef>
+                <a:spcPts val="0"/>
+              </a:spcBef>
+              <a:spcAft>
+                <a:spcPts val="0"/>
+              </a:spcAft>
+              <a:buNone/>
+              <a:defRPr sz="1200" b="0">
+                <a:solidFill>
+                  <a:srgbClr val="303437"/>
+                </a:solidFill>
+                <a:latin typeface="Noto Sans"/>
+              </a:defRPr>
+            </a:pPr>
+            <a:r>
+              <a:rPr sz="1200" b="0" lang="ja-JP" altLang="en-US">
+                <a:solidFill>
+                  <a:srgbClr val="626669"/>
+                </a:solidFill>
+                <a:latin typeface="Noto Sans"/>
+                <a:ea typeface="Noto Sans CJK JP"/>
+                <a:cs typeface="Noto Sans"/>
+              </a:rPr>
+              <a:t>日本語訳</a:t>
+            </a:r>
+          </a:p>
+        </p:txBody>
+      </p:sp>
+      <p:sp>
+        <p:nvSpPr>
+          <p:cNvPr id="9" name="TextBox 3"/>
+          <p:cNvSpPr txBox="1"/>
+          <p:nvPr/>
+        </p:nvSpPr>
+        <p:spPr>
+          <a:xfrm>
+            <a:off x="594360" y="3245307"/>
+            <a:ext cx="7955280" cy="632460"/>
+          </a:xfrm>
+          <a:prstGeom prst="rect">
+            <a:avLst/>
+          </a:prstGeom>
+          <a:noFill/>
+        </p:spPr>
+        <p:txBody>
+          <a:bodyPr wrap="square" lIns="0" rIns="0" tIns="0" bIns="0">
+            <a:noAutofit/>
+          </a:bodyPr>
+          <a:lstStyle/>
+          <a:p>
+            <a:pPr algn="l">
+              <a:lnSpc>
+                <a:spcPts val="2340"/>
+              </a:lnSpc>
+              <a:spcBef>
+                <a:spcPts val="0"/>
+              </a:spcBef>
+              <a:spcAft>
+                <a:spcPts val="0"/>
+              </a:spcAft>
+              <a:buNone/>
+              <a:defRPr sz="2000" b="0">
+                <a:solidFill>
+                  <a:srgbClr val="303437"/>
+                </a:solidFill>
+                <a:latin typeface="Noto Sans"/>
+              </a:defRPr>
+            </a:pPr>
+            <a:r>
+              <a:rPr sz="2000" b="0" lang="ja-JP" altLang="en-US">
+                <a:solidFill>
+                  <a:srgbClr val="303437"/>
+                </a:solidFill>
+                <a:latin typeface="Noto Sans"/>
+                <a:ea typeface="Noto Sans CJK JP"/>
+                <a:cs typeface="Noto Sans"/>
+              </a:rPr>
+              <a:t>空白で区切られた括弧の各グループについて、入れ子の最大深さを返す。たとえば(()())は深さ2、((()))は深さ3となる。</a:t>
             </a:r>
           </a:p>
         </p:txBody>
@@ -22043,7 +22312,7 @@
                 <a:ea typeface="Noto Sans CJK JP"/>
                 <a:cs typeface="Noto Sans"/>
               </a:rPr>
-              <a:t>追加例4：日本語訳と入出力例</a:t>
+              <a:t>追加例4：入出力例と解説</a:t>
             </a:r>
           </a:p>
         </p:txBody>
@@ -22098,67 +22367,13 @@
       </p:sp>
       <p:sp>
         <p:nvSpPr>
-          <p:cNvPr id="4" name="TextBox 3"/>
-          <p:cNvSpPr txBox="1"/>
-          <p:nvPr/>
-        </p:nvSpPr>
-        <p:spPr>
-          <a:xfrm>
-            <a:off x="594360" y="1508760"/>
-            <a:ext cx="7955279" cy="659383"/>
-          </a:xfrm>
-          <a:prstGeom prst="rect">
-            <a:avLst/>
-          </a:prstGeom>
-          <a:noFill/>
-        </p:spPr>
-        <p:txBody>
-          <a:bodyPr wrap="square" lIns="0" rIns="0" tIns="0" bIns="0">
-            <a:noAutofit/>
-          </a:bodyPr>
-          <a:lstStyle/>
-          <a:p>
-            <a:pPr algn="l">
-              <a:lnSpc>
-                <a:spcPct val="119000"/>
-              </a:lnSpc>
-              <a:spcBef>
-                <a:spcPts val="0"/>
-              </a:spcBef>
-              <a:spcAft>
-                <a:spcPts val="0"/>
-              </a:spcAft>
-              <a:buNone/>
-              <a:defRPr sz="2000" b="0">
-                <a:solidFill>
-                  <a:srgbClr val="303437"/>
-                </a:solidFill>
-                <a:latin typeface="Noto Sans"/>
-              </a:defRPr>
-            </a:pPr>
-            <a:r>
-              <a:rPr sz="2000" b="0" lang="ja-JP" altLang="en-US">
-                <a:solidFill>
-                  <a:srgbClr val="303437"/>
-                </a:solidFill>
-                <a:latin typeface="Noto Sans"/>
-                <a:ea typeface="Noto Sans CJK JP"/>
-                <a:cs typeface="Noto Sans"/>
-              </a:rPr>
-              <a:t>空白で区切られた括弧の各グループについて、入れ子の最大深さを返す。たとえば(()())は深さ2、((()))は深さ3となる。</a:t>
-            </a:r>
-          </a:p>
-        </p:txBody>
-      </p:sp>
-      <p:sp>
-        <p:nvSpPr>
           <p:cNvPr id="5" name="code-frame"/>
           <p:cNvSpPr/>
           <p:nvPr/>
         </p:nvSpPr>
         <p:spPr>
           <a:xfrm>
-            <a:off x="548640" y="2314448"/>
+            <a:off x="548640" y="1676400"/>
             <a:ext cx="8046720" cy="1070102"/>
           </a:xfrm>
           <a:prstGeom prst="rect">
@@ -22294,7 +22509,7 @@
         </p:nvSpPr>
         <p:spPr>
           <a:xfrm>
-            <a:off x="594360" y="3549142"/>
+            <a:off x="594360" y="2911094"/>
             <a:ext cx="7955279" cy="342011"/>
           </a:xfrm>
           <a:prstGeom prst="rect">
@@ -22536,68 +22751,14 @@
       </p:sp>
       <p:sp>
         <p:nvSpPr>
-          <p:cNvPr id="4" name="TextBox 3"/>
-          <p:cNvSpPr txBox="1"/>
-          <p:nvPr/>
-        </p:nvSpPr>
-        <p:spPr>
-          <a:xfrm>
-            <a:off x="548640" y="1344168"/>
-            <a:ext cx="8046720" cy="228600"/>
-          </a:xfrm>
-          <a:prstGeom prst="rect">
-            <a:avLst/>
-          </a:prstGeom>
-          <a:noFill/>
-        </p:spPr>
-        <p:txBody>
-          <a:bodyPr wrap="square" lIns="0" rIns="0" tIns="0" bIns="0">
-            <a:noAutofit/>
-          </a:bodyPr>
-          <a:lstStyle/>
-          <a:p>
-            <a:pPr algn="l">
-              <a:lnSpc>
-                <a:spcPct val="117000"/>
-              </a:lnSpc>
-              <a:spcBef>
-                <a:spcPts val="0"/>
-              </a:spcBef>
-              <a:spcAft>
-                <a:spcPts val="0"/>
-              </a:spcAft>
-              <a:buNone/>
-              <a:defRPr sz="1300" b="0">
-                <a:solidFill>
-                  <a:srgbClr val="303437"/>
-                </a:solidFill>
-                <a:latin typeface="Noto Sans"/>
-              </a:defRPr>
-            </a:pPr>
-            <a:r>
-              <a:rPr sz="1300" b="0" lang="ja-JP" altLang="en-US">
-                <a:solidFill>
-                  <a:srgbClr val="626669"/>
-                </a:solidFill>
-                <a:latin typeface="Noto Sans"/>
-                <a:ea typeface="Noto Sans CJK JP"/>
-                <a:cs typeface="Noto Sans"/>
-              </a:rPr>
-              <a:t>仕様文の原文（docstringから抜粋）</a:t>
-            </a:r>
-          </a:p>
-        </p:txBody>
-      </p:sp>
-      <p:sp>
-        <p:nvSpPr>
           <p:cNvPr id="5" name="quote-frame"/>
           <p:cNvSpPr/>
           <p:nvPr/>
         </p:nvSpPr>
         <p:spPr>
           <a:xfrm>
-            <a:off x="548640" y="1691640"/>
-            <a:ext cx="8046720" cy="858519"/>
+            <a:off x="548640" y="1549400"/>
+            <a:ext cx="8046720" cy="739467"/>
           </a:xfrm>
           <a:prstGeom prst="rect">
             <a:avLst/>
@@ -22625,31 +22786,31 @@
           </a:fontRef>
         </p:style>
         <p:txBody>
-          <a:bodyPr rtlCol="0" anchor="ctr" wrap="square" lIns="177800" rIns="177800" tIns="101600" bIns="127000">
+          <a:bodyPr rtlCol="0" anchor="t" wrap="square" lIns="127000" rIns="127000" tIns="76200" bIns="76200">
             <a:noAutofit/>
           </a:bodyPr>
           <a:lstStyle/>
           <a:p>
             <a:pPr algn="l">
               <a:lnSpc>
-                <a:spcPts val="2379"/>
-              </a:lnSpc>
-              <a:spcBef>
-                <a:spcPts val="0"/>
-              </a:spcBef>
-              <a:spcAft>
-                <a:spcPts val="0"/>
-              </a:spcAft>
-              <a:buNone/>
-              <a:defRPr sz="2000" b="0">
-                <a:solidFill>
-                  <a:srgbClr val="303437"/>
-                </a:solidFill>
-                <a:latin typeface="Noto Sans"/>
-              </a:defRPr>
-            </a:pPr>
-            <a:r>
-              <a:rPr sz="2000" b="0" lang="ja-JP" altLang="en-US">
+                <a:spcPts val="2222"/>
+              </a:lnSpc>
+              <a:spcBef>
+                <a:spcPts val="0"/>
+              </a:spcBef>
+              <a:spcAft>
+                <a:spcPts val="0"/>
+              </a:spcAft>
+              <a:buNone/>
+              <a:defRPr sz="1900" b="0">
+                <a:solidFill>
+                  <a:srgbClr val="303437"/>
+                </a:solidFill>
+                <a:latin typeface="Noto Sans"/>
+              </a:defRPr>
+            </a:pPr>
+            <a:r>
+              <a:rPr sz="1900" b="0" lang="ja-JP" altLang="en-US">
                 <a:solidFill>
                   <a:srgbClr val="303437"/>
                 </a:solidFill>
@@ -22711,7 +22872,7 @@
                 <a:ea typeface="Noto Sans CJK JP"/>
                 <a:cs typeface="Noto Sans"/>
               </a:rPr>
-              <a:t>[1] OpenAI. HumanEval.jsonl.gz. 改訂b9453e8。 HumanEval/7。入出力例は日本語訳とともに掲載。</a:t>
+              <a:t>[1] OpenAI. HumanEval.jsonl.gz. 改訂b9453e8。 HumanEval/7。仕様文を抜粋。#以降は期待する返り値。</a:t>
             </a:r>
           </a:p>
           <a:p>
@@ -22738,6 +22899,327 @@
                 <a:hlinkClick r:id="rId2"/>
               </a:rPr>
               <a:t>https://github.com/openai/human-eval/blob/b9453e8/data/HumanEval.jsonl.gz</a:t>
+            </a:r>
+          </a:p>
+        </p:txBody>
+      </p:sp>
+      <p:sp>
+        <p:nvSpPr>
+          <p:cNvPr id="7" name="TextBox 6"/>
+          <p:cNvSpPr txBox="1"/>
+          <p:nvPr/>
+        </p:nvSpPr>
+        <p:spPr>
+          <a:xfrm>
+            <a:off x="548640" y="1295400"/>
+            <a:ext cx="8046720" cy="203200"/>
+          </a:xfrm>
+          <a:prstGeom prst="rect">
+            <a:avLst/>
+          </a:prstGeom>
+          <a:noFill/>
+        </p:spPr>
+        <p:txBody>
+          <a:bodyPr wrap="square" lIns="0" rIns="0" tIns="0" bIns="0">
+            <a:noAutofit/>
+          </a:bodyPr>
+          <a:lstStyle/>
+          <a:p>
+            <a:pPr algn="l">
+              <a:lnSpc>
+                <a:spcPct val="117000"/>
+              </a:lnSpc>
+              <a:spcBef>
+                <a:spcPts val="0"/>
+              </a:spcBef>
+              <a:spcAft>
+                <a:spcPts val="0"/>
+              </a:spcAft>
+              <a:buNone/>
+              <a:defRPr sz="1200" b="0">
+                <a:solidFill>
+                  <a:srgbClr val="303437"/>
+                </a:solidFill>
+                <a:latin typeface="Noto Sans"/>
+              </a:defRPr>
+            </a:pPr>
+            <a:r>
+              <a:rPr sz="1200" b="0" lang="ja-JP" altLang="en-US">
+                <a:solidFill>
+                  <a:srgbClr val="626669"/>
+                </a:solidFill>
+                <a:latin typeface="Noto Sans"/>
+                <a:ea typeface="Noto Sans CJK JP"/>
+                <a:cs typeface="Noto Sans"/>
+              </a:rPr>
+              <a:t>仕様文の原文（抜粋）</a:t>
+            </a:r>
+          </a:p>
+        </p:txBody>
+      </p:sp>
+      <p:sp>
+        <p:nvSpPr>
+          <p:cNvPr id="8" name="TextBox 7"/>
+          <p:cNvSpPr txBox="1"/>
+          <p:nvPr/>
+        </p:nvSpPr>
+        <p:spPr>
+          <a:xfrm>
+            <a:off x="548640" y="2365067"/>
+            <a:ext cx="8046720" cy="203200"/>
+          </a:xfrm>
+          <a:prstGeom prst="rect">
+            <a:avLst/>
+          </a:prstGeom>
+          <a:noFill/>
+        </p:spPr>
+        <p:txBody>
+          <a:bodyPr wrap="square" lIns="0" rIns="0" tIns="0" bIns="0">
+            <a:noAutofit/>
+          </a:bodyPr>
+          <a:lstStyle/>
+          <a:p>
+            <a:pPr algn="l">
+              <a:lnSpc>
+                <a:spcPct val="117000"/>
+              </a:lnSpc>
+              <a:spcBef>
+                <a:spcPts val="0"/>
+              </a:spcBef>
+              <a:spcAft>
+                <a:spcPts val="0"/>
+              </a:spcAft>
+              <a:buNone/>
+              <a:defRPr sz="1200" b="0">
+                <a:solidFill>
+                  <a:srgbClr val="303437"/>
+                </a:solidFill>
+                <a:latin typeface="Noto Sans"/>
+              </a:defRPr>
+            </a:pPr>
+            <a:r>
+              <a:rPr sz="1200" b="0" lang="ja-JP" altLang="en-US">
+                <a:solidFill>
+                  <a:srgbClr val="626669"/>
+                </a:solidFill>
+                <a:latin typeface="Noto Sans"/>
+                <a:ea typeface="Noto Sans CJK JP"/>
+                <a:cs typeface="Noto Sans"/>
+              </a:rPr>
+              <a:t>日本語訳</a:t>
+            </a:r>
+          </a:p>
+        </p:txBody>
+      </p:sp>
+      <p:sp>
+        <p:nvSpPr>
+          <p:cNvPr id="9" name="TextBox 3"/>
+          <p:cNvSpPr txBox="1"/>
+          <p:nvPr/>
+        </p:nvSpPr>
+        <p:spPr>
+          <a:xfrm>
+            <a:off x="594360" y="2619067"/>
+            <a:ext cx="7955280" cy="602741"/>
+          </a:xfrm>
+          <a:prstGeom prst="rect">
+            <a:avLst/>
+          </a:prstGeom>
+          <a:noFill/>
+        </p:spPr>
+        <p:txBody>
+          <a:bodyPr wrap="square" lIns="0" rIns="0" tIns="0" bIns="0">
+            <a:noAutofit/>
+          </a:bodyPr>
+          <a:lstStyle/>
+          <a:p>
+            <a:pPr algn="l">
+              <a:lnSpc>
+                <a:spcPts val="2222"/>
+              </a:lnSpc>
+              <a:spcBef>
+                <a:spcPts val="0"/>
+              </a:spcBef>
+              <a:spcAft>
+                <a:spcPts val="0"/>
+              </a:spcAft>
+              <a:buNone/>
+              <a:defRPr sz="1900" b="0">
+                <a:solidFill>
+                  <a:srgbClr val="303437"/>
+                </a:solidFill>
+                <a:latin typeface="Noto Sans"/>
+              </a:defRPr>
+            </a:pPr>
+            <a:r>
+              <a:rPr sz="1900" b="0" lang="ja-JP" altLang="en-US">
+                <a:solidFill>
+                  <a:srgbClr val="303437"/>
+                </a:solidFill>
+                <a:latin typeface="Noto Sans"/>
+                <a:ea typeface="Noto Sans CJK JP"/>
+                <a:cs typeface="Noto Sans"/>
+              </a:rPr>
+              <a:t>文字列リストから、指定された部分文字列を含む要素だけを元の順に返す。</a:t>
+            </a:r>
+          </a:p>
+        </p:txBody>
+      </p:sp>
+      <p:sp>
+        <p:nvSpPr>
+          <p:cNvPr id="10" name="code-frame"/>
+          <p:cNvSpPr/>
+          <p:nvPr/>
+        </p:nvSpPr>
+        <p:spPr>
+          <a:xfrm>
+            <a:off x="548640" y="3323408"/>
+            <a:ext cx="8046720" cy="798068"/>
+          </a:xfrm>
+          <a:prstGeom prst="rect">
+            <a:avLst/>
+          </a:prstGeom>
+          <a:solidFill>
+            <a:srgbClr val="EBEDEB"/>
+          </a:solidFill>
+          <a:ln>
+            <a:noFill/>
+          </a:ln>
+          <a:effectLst/>
+        </p:spPr>
+        <p:style>
+          <a:lnRef idx="1">
+            <a:schemeClr val="accent1"/>
+          </a:lnRef>
+          <a:fillRef idx="3">
+            <a:schemeClr val="accent1"/>
+          </a:fillRef>
+          <a:effectRef idx="0">
+            <a:schemeClr val="accent1"/>
+          </a:effectRef>
+          <a:fontRef idx="minor">
+            <a:schemeClr val="lt1"/>
+          </a:fontRef>
+        </p:style>
+        <p:txBody>
+          <a:bodyPr rtlCol="0" anchor="ctr" wrap="none" lIns="152400" rIns="152400" tIns="101600" bIns="127000">
+            <a:noAutofit/>
+          </a:bodyPr>
+          <a:lstStyle/>
+          <a:p>
+            <a:pPr algn="l">
+              <a:lnSpc>
+                <a:spcPts val="2142"/>
+              </a:lnSpc>
+              <a:spcBef>
+                <a:spcPts val="0"/>
+              </a:spcBef>
+              <a:spcAft>
+                <a:spcPts val="0"/>
+              </a:spcAft>
+              <a:buNone/>
+              <a:defRPr sz="1800" b="0">
+                <a:solidFill>
+                  <a:srgbClr val="303437"/>
+                </a:solidFill>
+                <a:latin typeface="Noto Sans"/>
+              </a:defRPr>
+            </a:pPr>
+            <a:r>
+              <a:rPr sz="1800" b="0" lang="ja-JP" altLang="en-US">
+                <a:solidFill>
+                  <a:srgbClr val="303437"/>
+                </a:solidFill>
+                <a:latin typeface="Liberation Mono"/>
+                <a:ea typeface="Noto Sans CJK JP"/>
+                <a:cs typeface="Liberation Mono"/>
+              </a:rPr>
+              <a:t>filter_by_substring(['abc', 'bacd', 'cde', 'array'], 'a')</a:t>
+            </a:r>
+          </a:p>
+          <a:p>
+            <a:pPr algn="l">
+              <a:lnSpc>
+                <a:spcPts val="2142"/>
+              </a:lnSpc>
+              <a:spcBef>
+                <a:spcPts val="0"/>
+              </a:spcBef>
+              <a:spcAft>
+                <a:spcPts val="0"/>
+              </a:spcAft>
+              <a:buNone/>
+              <a:defRPr sz="1800" b="0">
+                <a:solidFill>
+                  <a:srgbClr val="303437"/>
+                </a:solidFill>
+                <a:latin typeface="Noto Sans"/>
+              </a:defRPr>
+            </a:pPr>
+            <a:r>
+              <a:rPr sz="1800" b="0" lang="ja-JP" altLang="en-US">
+                <a:solidFill>
+                  <a:srgbClr val="303437"/>
+                </a:solidFill>
+                <a:latin typeface="Liberation Mono"/>
+                <a:ea typeface="Noto Sans CJK JP"/>
+                <a:cs typeface="Liberation Mono"/>
+              </a:rPr>
+              <a:t># ['abc', 'bacd', 'array']</a:t>
+            </a:r>
+          </a:p>
+        </p:txBody>
+      </p:sp>
+      <p:sp>
+        <p:nvSpPr>
+          <p:cNvPr id="11" name="TextBox 5"/>
+          <p:cNvSpPr txBox="1"/>
+          <p:nvPr/>
+        </p:nvSpPr>
+        <p:spPr>
+          <a:xfrm>
+            <a:off x="594360" y="4197676"/>
+            <a:ext cx="7955279" cy="342011"/>
+          </a:xfrm>
+          <a:prstGeom prst="rect">
+            <a:avLst/>
+          </a:prstGeom>
+          <a:noFill/>
+        </p:spPr>
+        <p:txBody>
+          <a:bodyPr wrap="square" lIns="0" rIns="0" tIns="0" bIns="0">
+            <a:noAutofit/>
+          </a:bodyPr>
+          <a:lstStyle/>
+          <a:p>
+            <a:pPr algn="l">
+              <a:lnSpc>
+                <a:spcPct val="119000"/>
+              </a:lnSpc>
+              <a:spcBef>
+                <a:spcPts val="0"/>
+              </a:spcBef>
+              <a:spcAft>
+                <a:spcPts val="0"/>
+              </a:spcAft>
+              <a:buNone/>
+              <a:defRPr sz="1900" b="0">
+                <a:solidFill>
+                  <a:srgbClr val="303437"/>
+                </a:solidFill>
+                <a:latin typeface="Noto Sans"/>
+              </a:defRPr>
+            </a:pPr>
+            <a:r>
+              <a:rPr sz="1900" b="0" lang="ja-JP" altLang="en-US">
+                <a:solidFill>
+                  <a:srgbClr val="303437"/>
+                </a:solidFill>
+                <a:latin typeface="Noto Sans"/>
+                <a:ea typeface="Noto Sans CJK JP"/>
+                <a:cs typeface="Noto Sans"/>
+              </a:rPr>
+              <a:t>部分文字列が含まれるかを要素ごとに判定する。</a:t>
             </a:r>
           </a:p>
         </p:txBody>
@@ -22803,7 +23285,7 @@
                 <a:ea typeface="Noto Sans CJK JP"/>
                 <a:cs typeface="Noto Sans"/>
               </a:rPr>
-              <a:t>追加例5：日本語訳と入出力例</a:t>
+              <a:t>追加例6：和と積を同時に返す</a:t>
             </a:r>
           </a:p>
         </p:txBody>
@@ -22858,68 +23340,14 @@
       </p:sp>
       <p:sp>
         <p:nvSpPr>
-          <p:cNvPr id="4" name="TextBox 3"/>
-          <p:cNvSpPr txBox="1"/>
-          <p:nvPr/>
-        </p:nvSpPr>
-        <p:spPr>
-          <a:xfrm>
-            <a:off x="594360" y="1508760"/>
-            <a:ext cx="7955279" cy="659383"/>
-          </a:xfrm>
-          <a:prstGeom prst="rect">
-            <a:avLst/>
-          </a:prstGeom>
-          <a:noFill/>
-        </p:spPr>
-        <p:txBody>
-          <a:bodyPr wrap="square" lIns="0" rIns="0" tIns="0" bIns="0">
-            <a:noAutofit/>
-          </a:bodyPr>
-          <a:lstStyle/>
-          <a:p>
-            <a:pPr algn="l">
-              <a:lnSpc>
-                <a:spcPct val="119000"/>
-              </a:lnSpc>
-              <a:spcBef>
-                <a:spcPts val="0"/>
-              </a:spcBef>
-              <a:spcAft>
-                <a:spcPts val="0"/>
-              </a:spcAft>
-              <a:buNone/>
-              <a:defRPr sz="2000" b="0">
-                <a:solidFill>
-                  <a:srgbClr val="303437"/>
-                </a:solidFill>
-                <a:latin typeface="Noto Sans"/>
-              </a:defRPr>
-            </a:pPr>
-            <a:r>
-              <a:rPr sz="2000" b="0" lang="ja-JP" altLang="en-US">
-                <a:solidFill>
-                  <a:srgbClr val="303437"/>
-                </a:solidFill>
-                <a:latin typeface="Noto Sans"/>
-                <a:ea typeface="Noto Sans CJK JP"/>
-                <a:cs typeface="Noto Sans"/>
-              </a:rPr>
-              <a:t>文字列リストから、指定された部分文字列を含む要素だけを元の順に返す。</a:t>
-            </a:r>
-          </a:p>
-        </p:txBody>
-      </p:sp>
-      <p:sp>
-        <p:nvSpPr>
-          <p:cNvPr id="5" name="code-frame"/>
+          <p:cNvPr id="5" name="quote-frame"/>
           <p:cNvSpPr/>
           <p:nvPr/>
         </p:nvSpPr>
         <p:spPr>
           <a:xfrm>
-            <a:off x="548640" y="2314448"/>
-            <a:ext cx="8046720" cy="798068"/>
+            <a:off x="548640" y="1549400"/>
+            <a:ext cx="8046720" cy="1067993"/>
           </a:xfrm>
           <a:prstGeom prst="rect">
             <a:avLst/>
@@ -22947,131 +23375,46 @@
           </a:fontRef>
         </p:style>
         <p:txBody>
-          <a:bodyPr rtlCol="0" anchor="ctr" wrap="none" lIns="152400" rIns="152400" tIns="101600" bIns="127000">
+          <a:bodyPr rtlCol="0" anchor="t" wrap="square" lIns="127000" rIns="127000" tIns="76200" bIns="76200">
             <a:noAutofit/>
           </a:bodyPr>
           <a:lstStyle/>
           <a:p>
             <a:pPr algn="l">
               <a:lnSpc>
-                <a:spcPts val="2142"/>
-              </a:lnSpc>
-              <a:spcBef>
-                <a:spcPts val="0"/>
-              </a:spcBef>
-              <a:spcAft>
-                <a:spcPts val="0"/>
-              </a:spcAft>
-              <a:buNone/>
-              <a:defRPr sz="1800" b="0">
-                <a:solidFill>
-                  <a:srgbClr val="303437"/>
-                </a:solidFill>
-                <a:latin typeface="Noto Sans"/>
-              </a:defRPr>
-            </a:pPr>
-            <a:r>
-              <a:rPr sz="1800" b="0" lang="ja-JP" altLang="en-US">
-                <a:solidFill>
-                  <a:srgbClr val="303437"/>
-                </a:solidFill>
-                <a:latin typeface="Liberation Mono"/>
-                <a:ea typeface="Noto Sans CJK JP"/>
-                <a:cs typeface="Liberation Mono"/>
-              </a:rPr>
-              <a:t>filter_by_substring(['abc', 'bacd', 'cde', 'array'], 'a')</a:t>
-            </a:r>
-          </a:p>
-          <a:p>
-            <a:pPr algn="l">
-              <a:lnSpc>
-                <a:spcPts val="2142"/>
-              </a:lnSpc>
-              <a:spcBef>
-                <a:spcPts val="0"/>
-              </a:spcBef>
-              <a:spcAft>
-                <a:spcPts val="0"/>
-              </a:spcAft>
-              <a:buNone/>
-              <a:defRPr sz="1800" b="0">
-                <a:solidFill>
-                  <a:srgbClr val="303437"/>
-                </a:solidFill>
-                <a:latin typeface="Noto Sans"/>
-              </a:defRPr>
-            </a:pPr>
-            <a:r>
-              <a:rPr sz="1800" b="0" lang="ja-JP" altLang="en-US">
-                <a:solidFill>
-                  <a:srgbClr val="303437"/>
-                </a:solidFill>
-                <a:latin typeface="Liberation Mono"/>
-                <a:ea typeface="Noto Sans CJK JP"/>
-                <a:cs typeface="Liberation Mono"/>
-              </a:rPr>
-              <a:t># ['abc', 'bacd', 'array']</a:t>
+                <a:spcPts val="2340"/>
+              </a:lnSpc>
+              <a:spcBef>
+                <a:spcPts val="0"/>
+              </a:spcBef>
+              <a:spcAft>
+                <a:spcPts val="0"/>
+              </a:spcAft>
+              <a:buNone/>
+              <a:defRPr sz="2000" b="0">
+                <a:solidFill>
+                  <a:srgbClr val="303437"/>
+                </a:solidFill>
+                <a:latin typeface="Noto Sans"/>
+              </a:defRPr>
+            </a:pPr>
+            <a:r>
+              <a:rPr sz="2000" b="0" lang="ja-JP" altLang="en-US">
+                <a:solidFill>
+                  <a:srgbClr val="303437"/>
+                </a:solidFill>
+                <a:latin typeface="Noto Sans"/>
+                <a:ea typeface="Noto Sans CJK JP"/>
+                <a:cs typeface="Noto Sans"/>
+              </a:rPr>
+              <a:t>For a given list of integers, return a tuple consisting of a sum and a product of all the integers in a list. Empty sum should be equal to 0 and empty product should be equal to 1.</a:t>
             </a:r>
           </a:p>
         </p:txBody>
       </p:sp>
       <p:sp>
         <p:nvSpPr>
-          <p:cNvPr id="6" name="TextBox 5"/>
-          <p:cNvSpPr txBox="1"/>
-          <p:nvPr/>
-        </p:nvSpPr>
-        <p:spPr>
-          <a:xfrm>
-            <a:off x="594360" y="3277108"/>
-            <a:ext cx="7955279" cy="342011"/>
-          </a:xfrm>
-          <a:prstGeom prst="rect">
-            <a:avLst/>
-          </a:prstGeom>
-          <a:noFill/>
-        </p:spPr>
-        <p:txBody>
-          <a:bodyPr wrap="square" lIns="0" rIns="0" tIns="0" bIns="0">
-            <a:noAutofit/>
-          </a:bodyPr>
-          <a:lstStyle/>
-          <a:p>
-            <a:pPr algn="l">
-              <a:lnSpc>
-                <a:spcPct val="119000"/>
-              </a:lnSpc>
-              <a:spcBef>
-                <a:spcPts val="0"/>
-              </a:spcBef>
-              <a:spcAft>
-                <a:spcPts val="0"/>
-              </a:spcAft>
-              <a:buNone/>
-              <a:defRPr sz="1900" b="0">
-                <a:solidFill>
-                  <a:srgbClr val="303437"/>
-                </a:solidFill>
-                <a:latin typeface="Noto Sans"/>
-              </a:defRPr>
-            </a:pPr>
-            <a:r>
-              <a:rPr sz="1900" b="0" lang="ja-JP" altLang="en-US">
-                <a:solidFill>
-                  <a:srgbClr val="303437"/>
-                </a:solidFill>
-                <a:latin typeface="Noto Sans"/>
-                <a:ea typeface="Noto Sans CJK JP"/>
-                <a:cs typeface="Noto Sans"/>
-              </a:rPr>
-              <a:t>部分文字列が含まれるかを要素ごとに判定する。</a:t>
-            </a:r>
-          </a:p>
-        </p:txBody>
-      </p:sp>
-      <p:sp>
-        <p:nvSpPr>
-          <p:cNvPr id="7" name="sources"/>
+          <p:cNvPr id="6" name="sources"/>
           <p:cNvSpPr txBox="1"/>
           <p:nvPr/>
         </p:nvSpPr>
@@ -23118,7 +23461,7 @@
                 <a:ea typeface="Noto Sans CJK JP"/>
                 <a:cs typeface="Noto Sans"/>
               </a:rPr>
-              <a:t>[1] OpenAI. HumanEval.jsonl.gz. 改訂b9453e8。 HumanEval/7。#以降は期待する返り値。</a:t>
+              <a:t>[1] OpenAI. HumanEval.jsonl.gz. 改訂b9453e8。 HumanEval/8。仕様文を抜粋。</a:t>
             </a:r>
           </a:p>
           <a:p>
@@ -23145,6 +23488,168 @@
                 <a:hlinkClick r:id="rId2"/>
               </a:rPr>
               <a:t>https://github.com/openai/human-eval/blob/b9453e8/data/HumanEval.jsonl.gz</a:t>
+            </a:r>
+          </a:p>
+        </p:txBody>
+      </p:sp>
+      <p:sp>
+        <p:nvSpPr>
+          <p:cNvPr id="7" name="TextBox 6"/>
+          <p:cNvSpPr txBox="1"/>
+          <p:nvPr/>
+        </p:nvSpPr>
+        <p:spPr>
+          <a:xfrm>
+            <a:off x="548640" y="1295400"/>
+            <a:ext cx="8046720" cy="203200"/>
+          </a:xfrm>
+          <a:prstGeom prst="rect">
+            <a:avLst/>
+          </a:prstGeom>
+          <a:noFill/>
+        </p:spPr>
+        <p:txBody>
+          <a:bodyPr wrap="square" lIns="0" rIns="0" tIns="0" bIns="0">
+            <a:noAutofit/>
+          </a:bodyPr>
+          <a:lstStyle/>
+          <a:p>
+            <a:pPr algn="l">
+              <a:lnSpc>
+                <a:spcPct val="117000"/>
+              </a:lnSpc>
+              <a:spcBef>
+                <a:spcPts val="0"/>
+              </a:spcBef>
+              <a:spcAft>
+                <a:spcPts val="0"/>
+              </a:spcAft>
+              <a:buNone/>
+              <a:defRPr sz="1200" b="0">
+                <a:solidFill>
+                  <a:srgbClr val="303437"/>
+                </a:solidFill>
+                <a:latin typeface="Noto Sans"/>
+              </a:defRPr>
+            </a:pPr>
+            <a:r>
+              <a:rPr sz="1200" b="0" lang="ja-JP" altLang="en-US">
+                <a:solidFill>
+                  <a:srgbClr val="626669"/>
+                </a:solidFill>
+                <a:latin typeface="Noto Sans"/>
+                <a:ea typeface="Noto Sans CJK JP"/>
+                <a:cs typeface="Noto Sans"/>
+              </a:rPr>
+              <a:t>仕様文の原文（抜粋）</a:t>
+            </a:r>
+          </a:p>
+        </p:txBody>
+      </p:sp>
+      <p:sp>
+        <p:nvSpPr>
+          <p:cNvPr id="8" name="TextBox 7"/>
+          <p:cNvSpPr txBox="1"/>
+          <p:nvPr/>
+        </p:nvSpPr>
+        <p:spPr>
+          <a:xfrm>
+            <a:off x="548640" y="2693594"/>
+            <a:ext cx="8046720" cy="203200"/>
+          </a:xfrm>
+          <a:prstGeom prst="rect">
+            <a:avLst/>
+          </a:prstGeom>
+          <a:noFill/>
+        </p:spPr>
+        <p:txBody>
+          <a:bodyPr wrap="square" lIns="0" rIns="0" tIns="0" bIns="0">
+            <a:noAutofit/>
+          </a:bodyPr>
+          <a:lstStyle/>
+          <a:p>
+            <a:pPr algn="l">
+              <a:lnSpc>
+                <a:spcPct val="117000"/>
+              </a:lnSpc>
+              <a:spcBef>
+                <a:spcPts val="0"/>
+              </a:spcBef>
+              <a:spcAft>
+                <a:spcPts val="0"/>
+              </a:spcAft>
+              <a:buNone/>
+              <a:defRPr sz="1200" b="0">
+                <a:solidFill>
+                  <a:srgbClr val="303437"/>
+                </a:solidFill>
+                <a:latin typeface="Noto Sans"/>
+              </a:defRPr>
+            </a:pPr>
+            <a:r>
+              <a:rPr sz="1200" b="0" lang="ja-JP" altLang="en-US">
+                <a:solidFill>
+                  <a:srgbClr val="626669"/>
+                </a:solidFill>
+                <a:latin typeface="Noto Sans"/>
+                <a:ea typeface="Noto Sans CJK JP"/>
+                <a:cs typeface="Noto Sans"/>
+              </a:rPr>
+              <a:t>日本語訳</a:t>
+            </a:r>
+          </a:p>
+        </p:txBody>
+      </p:sp>
+      <p:sp>
+        <p:nvSpPr>
+          <p:cNvPr id="9" name="TextBox 3"/>
+          <p:cNvSpPr txBox="1"/>
+          <p:nvPr/>
+        </p:nvSpPr>
+        <p:spPr>
+          <a:xfrm>
+            <a:off x="594360" y="2947594"/>
+            <a:ext cx="7955280" cy="632460"/>
+          </a:xfrm>
+          <a:prstGeom prst="rect">
+            <a:avLst/>
+          </a:prstGeom>
+          <a:noFill/>
+        </p:spPr>
+        <p:txBody>
+          <a:bodyPr wrap="square" lIns="0" rIns="0" tIns="0" bIns="0">
+            <a:noAutofit/>
+          </a:bodyPr>
+          <a:lstStyle/>
+          <a:p>
+            <a:pPr algn="l">
+              <a:lnSpc>
+                <a:spcPts val="2340"/>
+              </a:lnSpc>
+              <a:spcBef>
+                <a:spcPts val="0"/>
+              </a:spcBef>
+              <a:spcAft>
+                <a:spcPts val="0"/>
+              </a:spcAft>
+              <a:buNone/>
+              <a:defRPr sz="2000" b="0">
+                <a:solidFill>
+                  <a:srgbClr val="303437"/>
+                </a:solidFill>
+                <a:latin typeface="Noto Sans"/>
+              </a:defRPr>
+            </a:pPr>
+            <a:r>
+              <a:rPr sz="2000" b="0" lang="ja-JP" altLang="en-US">
+                <a:solidFill>
+                  <a:srgbClr val="303437"/>
+                </a:solidFill>
+                <a:latin typeface="Noto Sans"/>
+                <a:ea typeface="Noto Sans CJK JP"/>
+                <a:cs typeface="Noto Sans"/>
+              </a:rPr>
+              <a:t>整数リストの全要素の和と積をタプルで返す。空リストの和は0、積は1とする。</a:t>
             </a:r>
           </a:p>
         </p:txBody>
@@ -23210,7 +23715,7 @@
                 <a:ea typeface="Noto Sans CJK JP"/>
                 <a:cs typeface="Noto Sans"/>
               </a:rPr>
-              <a:t>追加例6：和と積を同時に返す</a:t>
+              <a:t>追加例6：入出力例と解説</a:t>
             </a:r>
           </a:p>
         </p:txBody>
@@ -23265,68 +23770,14 @@
       </p:sp>
       <p:sp>
         <p:nvSpPr>
-          <p:cNvPr id="4" name="TextBox 3"/>
-          <p:cNvSpPr txBox="1"/>
-          <p:nvPr/>
-        </p:nvSpPr>
-        <p:spPr>
-          <a:xfrm>
-            <a:off x="548640" y="1344168"/>
-            <a:ext cx="8046720" cy="228600"/>
-          </a:xfrm>
-          <a:prstGeom prst="rect">
-            <a:avLst/>
-          </a:prstGeom>
-          <a:noFill/>
-        </p:spPr>
-        <p:txBody>
-          <a:bodyPr wrap="square" lIns="0" rIns="0" tIns="0" bIns="0">
-            <a:noAutofit/>
-          </a:bodyPr>
-          <a:lstStyle/>
-          <a:p>
-            <a:pPr algn="l">
-              <a:lnSpc>
-                <a:spcPct val="117000"/>
-              </a:lnSpc>
-              <a:spcBef>
-                <a:spcPts val="0"/>
-              </a:spcBef>
-              <a:spcAft>
-                <a:spcPts val="0"/>
-              </a:spcAft>
-              <a:buNone/>
-              <a:defRPr sz="1300" b="0">
-                <a:solidFill>
-                  <a:srgbClr val="303437"/>
-                </a:solidFill>
-                <a:latin typeface="Noto Sans"/>
-              </a:defRPr>
-            </a:pPr>
-            <a:r>
-              <a:rPr sz="1300" b="0" lang="ja-JP" altLang="en-US">
-                <a:solidFill>
-                  <a:srgbClr val="626669"/>
-                </a:solidFill>
-                <a:latin typeface="Noto Sans"/>
-                <a:ea typeface="Noto Sans CJK JP"/>
-                <a:cs typeface="Noto Sans"/>
-              </a:rPr>
-              <a:t>仕様文の原文（docstringから抜粋）</a:t>
-            </a:r>
-          </a:p>
-        </p:txBody>
-      </p:sp>
-      <p:sp>
-        <p:nvSpPr>
-          <p:cNvPr id="5" name="quote-frame"/>
+          <p:cNvPr id="5" name="code-frame"/>
           <p:cNvSpPr/>
           <p:nvPr/>
         </p:nvSpPr>
         <p:spPr>
           <a:xfrm>
-            <a:off x="548640" y="1691640"/>
-            <a:ext cx="8046720" cy="1160780"/>
+            <a:off x="548640" y="1676400"/>
+            <a:ext cx="8046720" cy="1342135"/>
           </a:xfrm>
           <a:prstGeom prst="rect">
             <a:avLst/>
@@ -23354,46 +23805,193 @@
           </a:fontRef>
         </p:style>
         <p:txBody>
-          <a:bodyPr rtlCol="0" anchor="ctr" wrap="square" lIns="177800" rIns="177800" tIns="101600" bIns="127000">
+          <a:bodyPr rtlCol="0" anchor="ctr" wrap="none" lIns="152400" rIns="152400" tIns="101600" bIns="127000">
             <a:noAutofit/>
           </a:bodyPr>
           <a:lstStyle/>
           <a:p>
             <a:pPr algn="l">
               <a:lnSpc>
-                <a:spcPts val="2379"/>
-              </a:lnSpc>
-              <a:spcBef>
-                <a:spcPts val="0"/>
-              </a:spcBef>
-              <a:spcAft>
-                <a:spcPts val="0"/>
-              </a:spcAft>
-              <a:buNone/>
-              <a:defRPr sz="2000" b="0">
-                <a:solidFill>
-                  <a:srgbClr val="303437"/>
-                </a:solidFill>
-                <a:latin typeface="Noto Sans"/>
-              </a:defRPr>
-            </a:pPr>
-            <a:r>
-              <a:rPr sz="2000" b="0" lang="ja-JP" altLang="en-US">
-                <a:solidFill>
-                  <a:srgbClr val="303437"/>
-                </a:solidFill>
-                <a:latin typeface="Noto Sans"/>
-                <a:ea typeface="Noto Sans CJK JP"/>
-                <a:cs typeface="Noto Sans"/>
-              </a:rPr>
-              <a:t>For a given list of integers, return a tuple consisting of a sum and a product of all the integers in a list. Empty sum should be equal to 0 and empty product should be equal to 1.</a:t>
+                <a:spcPts val="2142"/>
+              </a:lnSpc>
+              <a:spcBef>
+                <a:spcPts val="0"/>
+              </a:spcBef>
+              <a:spcAft>
+                <a:spcPts val="0"/>
+              </a:spcAft>
+              <a:buNone/>
+              <a:defRPr sz="1800" b="0">
+                <a:solidFill>
+                  <a:srgbClr val="303437"/>
+                </a:solidFill>
+                <a:latin typeface="Noto Sans"/>
+              </a:defRPr>
+            </a:pPr>
+            <a:r>
+              <a:rPr sz="1800" b="0" lang="ja-JP" altLang="en-US">
+                <a:solidFill>
+                  <a:srgbClr val="303437"/>
+                </a:solidFill>
+                <a:latin typeface="Liberation Mono"/>
+                <a:ea typeface="Noto Sans CJK JP"/>
+                <a:cs typeface="Liberation Mono"/>
+              </a:rPr>
+              <a:t>sum_product([1, 2, 3, 4])</a:t>
+            </a:r>
+          </a:p>
+          <a:p>
+            <a:pPr algn="l">
+              <a:lnSpc>
+                <a:spcPts val="2142"/>
+              </a:lnSpc>
+              <a:spcBef>
+                <a:spcPts val="0"/>
+              </a:spcBef>
+              <a:spcAft>
+                <a:spcPts val="0"/>
+              </a:spcAft>
+              <a:buNone/>
+              <a:defRPr sz="1800" b="0">
+                <a:solidFill>
+                  <a:srgbClr val="303437"/>
+                </a:solidFill>
+                <a:latin typeface="Noto Sans"/>
+              </a:defRPr>
+            </a:pPr>
+            <a:r>
+              <a:rPr sz="1800" b="0" lang="ja-JP" altLang="en-US">
+                <a:solidFill>
+                  <a:srgbClr val="303437"/>
+                </a:solidFill>
+                <a:latin typeface="Liberation Mono"/>
+                <a:ea typeface="Noto Sans CJK JP"/>
+                <a:cs typeface="Liberation Mono"/>
+              </a:rPr>
+              <a:t># (10, 24)</a:t>
+            </a:r>
+          </a:p>
+          <a:p>
+            <a:pPr algn="l">
+              <a:lnSpc>
+                <a:spcPts val="2142"/>
+              </a:lnSpc>
+              <a:spcBef>
+                <a:spcPts val="0"/>
+              </a:spcBef>
+              <a:spcAft>
+                <a:spcPts val="0"/>
+              </a:spcAft>
+              <a:buNone/>
+              <a:defRPr sz="1800" b="0">
+                <a:solidFill>
+                  <a:srgbClr val="303437"/>
+                </a:solidFill>
+                <a:latin typeface="Noto Sans"/>
+              </a:defRPr>
+            </a:pPr>
+            <a:r>
+              <a:rPr sz="1800" b="0" lang="ja-JP" altLang="en-US">
+                <a:solidFill>
+                  <a:srgbClr val="303437"/>
+                </a:solidFill>
+                <a:latin typeface="Liberation Mono"/>
+                <a:ea typeface="Noto Sans CJK JP"/>
+                <a:cs typeface="Liberation Mono"/>
+              </a:rPr>
+              <a:t>sum_product([])</a:t>
+            </a:r>
+          </a:p>
+          <a:p>
+            <a:pPr algn="l">
+              <a:lnSpc>
+                <a:spcPts val="2142"/>
+              </a:lnSpc>
+              <a:spcBef>
+                <a:spcPts val="0"/>
+              </a:spcBef>
+              <a:spcAft>
+                <a:spcPts val="0"/>
+              </a:spcAft>
+              <a:buNone/>
+              <a:defRPr sz="1800" b="0">
+                <a:solidFill>
+                  <a:srgbClr val="303437"/>
+                </a:solidFill>
+                <a:latin typeface="Noto Sans"/>
+              </a:defRPr>
+            </a:pPr>
+            <a:r>
+              <a:rPr sz="1800" b="0" lang="ja-JP" altLang="en-US">
+                <a:solidFill>
+                  <a:srgbClr val="303437"/>
+                </a:solidFill>
+                <a:latin typeface="Liberation Mono"/>
+                <a:ea typeface="Noto Sans CJK JP"/>
+                <a:cs typeface="Liberation Mono"/>
+              </a:rPr>
+              <a:t># (0, 1)</a:t>
             </a:r>
           </a:p>
         </p:txBody>
       </p:sp>
       <p:sp>
         <p:nvSpPr>
-          <p:cNvPr id="6" name="sources"/>
+          <p:cNvPr id="6" name="TextBox 5"/>
+          <p:cNvSpPr txBox="1"/>
+          <p:nvPr/>
+        </p:nvSpPr>
+        <p:spPr>
+          <a:xfrm>
+            <a:off x="594360" y="3183127"/>
+            <a:ext cx="7955279" cy="342011"/>
+          </a:xfrm>
+          <a:prstGeom prst="rect">
+            <a:avLst/>
+          </a:prstGeom>
+          <a:noFill/>
+        </p:spPr>
+        <p:txBody>
+          <a:bodyPr wrap="square" lIns="0" rIns="0" tIns="0" bIns="0">
+            <a:noAutofit/>
+          </a:bodyPr>
+          <a:lstStyle/>
+          <a:p>
+            <a:pPr algn="l">
+              <a:lnSpc>
+                <a:spcPct val="119000"/>
+              </a:lnSpc>
+              <a:spcBef>
+                <a:spcPts val="0"/>
+              </a:spcBef>
+              <a:spcAft>
+                <a:spcPts val="0"/>
+              </a:spcAft>
+              <a:buNone/>
+              <a:defRPr sz="1900" b="0">
+                <a:solidFill>
+                  <a:srgbClr val="303437"/>
+                </a:solidFill>
+                <a:latin typeface="Noto Sans"/>
+              </a:defRPr>
+            </a:pPr>
+            <a:r>
+              <a:rPr sz="1900" b="0" lang="ja-JP" altLang="en-US">
+                <a:solidFill>
+                  <a:srgbClr val="303437"/>
+                </a:solidFill>
+                <a:latin typeface="Noto Sans"/>
+                <a:ea typeface="Noto Sans CJK JP"/>
+                <a:cs typeface="Noto Sans"/>
+              </a:rPr>
+              <a:t>和を0、積を1で初期化すると、空リストも同じ処理で扱える。</a:t>
+            </a:r>
+          </a:p>
+        </p:txBody>
+      </p:sp>
+      <p:sp>
+        <p:nvSpPr>
+          <p:cNvPr id="7" name="sources"/>
           <p:cNvSpPr txBox="1"/>
           <p:nvPr/>
         </p:nvSpPr>
@@ -23440,7 +24038,7 @@
                 <a:ea typeface="Noto Sans CJK JP"/>
                 <a:cs typeface="Noto Sans"/>
               </a:rPr>
-              <a:t>[1] OpenAI. HumanEval.jsonl.gz. 改訂b9453e8。 HumanEval/8。入出力例は日本語訳とともに掲載。</a:t>
+              <a:t>[1] OpenAI. HumanEval.jsonl.gz. 改訂b9453e8。 HumanEval/8。#以降は期待する返り値。</a:t>
             </a:r>
           </a:p>
           <a:p>
@@ -23532,7 +24130,7 @@
                 <a:ea typeface="Noto Sans CJK JP"/>
                 <a:cs typeface="Noto Sans"/>
               </a:rPr>
-              <a:t>追加例6：日本語訳と入出力例</a:t>
+              <a:t>追加例7：それまでの最大値を返す</a:t>
             </a:r>
           </a:p>
         </p:txBody>
@@ -23587,68 +24185,14 @@
       </p:sp>
       <p:sp>
         <p:nvSpPr>
-          <p:cNvPr id="4" name="TextBox 3"/>
-          <p:cNvSpPr txBox="1"/>
-          <p:nvPr/>
-        </p:nvSpPr>
-        <p:spPr>
-          <a:xfrm>
-            <a:off x="594360" y="1508760"/>
-            <a:ext cx="7955279" cy="659383"/>
-          </a:xfrm>
-          <a:prstGeom prst="rect">
-            <a:avLst/>
-          </a:prstGeom>
-          <a:noFill/>
-        </p:spPr>
-        <p:txBody>
-          <a:bodyPr wrap="square" lIns="0" rIns="0" tIns="0" bIns="0">
-            <a:noAutofit/>
-          </a:bodyPr>
-          <a:lstStyle/>
-          <a:p>
-            <a:pPr algn="l">
-              <a:lnSpc>
-                <a:spcPct val="119000"/>
-              </a:lnSpc>
-              <a:spcBef>
-                <a:spcPts val="0"/>
-              </a:spcBef>
-              <a:spcAft>
-                <a:spcPts val="0"/>
-              </a:spcAft>
-              <a:buNone/>
-              <a:defRPr sz="2000" b="0">
-                <a:solidFill>
-                  <a:srgbClr val="303437"/>
-                </a:solidFill>
-                <a:latin typeface="Noto Sans"/>
-              </a:defRPr>
-            </a:pPr>
-            <a:r>
-              <a:rPr sz="2000" b="0" lang="ja-JP" altLang="en-US">
-                <a:solidFill>
-                  <a:srgbClr val="303437"/>
-                </a:solidFill>
-                <a:latin typeface="Noto Sans"/>
-                <a:ea typeface="Noto Sans CJK JP"/>
-                <a:cs typeface="Noto Sans"/>
-              </a:rPr>
-              <a:t>整数リストの全要素の和と積をタプルで返す。空リストの和は0、積は1とする。</a:t>
-            </a:r>
-          </a:p>
-        </p:txBody>
-      </p:sp>
-      <p:sp>
-        <p:nvSpPr>
-          <p:cNvPr id="5" name="code-frame"/>
+          <p:cNvPr id="5" name="quote-frame"/>
           <p:cNvSpPr/>
           <p:nvPr/>
         </p:nvSpPr>
         <p:spPr>
           <a:xfrm>
-            <a:off x="548640" y="2314448"/>
-            <a:ext cx="8046720" cy="1342135"/>
+            <a:off x="548640" y="1549400"/>
+            <a:ext cx="8046720" cy="770635"/>
           </a:xfrm>
           <a:prstGeom prst="rect">
             <a:avLst/>
@@ -23676,193 +24220,46 @@
           </a:fontRef>
         </p:style>
         <p:txBody>
-          <a:bodyPr rtlCol="0" anchor="ctr" wrap="none" lIns="152400" rIns="152400" tIns="101600" bIns="127000">
+          <a:bodyPr rtlCol="0" anchor="t" wrap="square" lIns="127000" rIns="127000" tIns="76200" bIns="76200">
             <a:noAutofit/>
           </a:bodyPr>
           <a:lstStyle/>
           <a:p>
             <a:pPr algn="l">
               <a:lnSpc>
-                <a:spcPts val="2142"/>
-              </a:lnSpc>
-              <a:spcBef>
-                <a:spcPts val="0"/>
-              </a:spcBef>
-              <a:spcAft>
-                <a:spcPts val="0"/>
-              </a:spcAft>
-              <a:buNone/>
-              <a:defRPr sz="1800" b="0">
-                <a:solidFill>
-                  <a:srgbClr val="303437"/>
-                </a:solidFill>
-                <a:latin typeface="Noto Sans"/>
-              </a:defRPr>
-            </a:pPr>
-            <a:r>
-              <a:rPr sz="1800" b="0" lang="ja-JP" altLang="en-US">
-                <a:solidFill>
-                  <a:srgbClr val="303437"/>
-                </a:solidFill>
-                <a:latin typeface="Liberation Mono"/>
-                <a:ea typeface="Noto Sans CJK JP"/>
-                <a:cs typeface="Liberation Mono"/>
-              </a:rPr>
-              <a:t>sum_product([1, 2, 3, 4])</a:t>
-            </a:r>
-          </a:p>
-          <a:p>
-            <a:pPr algn="l">
-              <a:lnSpc>
-                <a:spcPts val="2142"/>
-              </a:lnSpc>
-              <a:spcBef>
-                <a:spcPts val="0"/>
-              </a:spcBef>
-              <a:spcAft>
-                <a:spcPts val="0"/>
-              </a:spcAft>
-              <a:buNone/>
-              <a:defRPr sz="1800" b="0">
-                <a:solidFill>
-                  <a:srgbClr val="303437"/>
-                </a:solidFill>
-                <a:latin typeface="Noto Sans"/>
-              </a:defRPr>
-            </a:pPr>
-            <a:r>
-              <a:rPr sz="1800" b="0" lang="ja-JP" altLang="en-US">
-                <a:solidFill>
-                  <a:srgbClr val="303437"/>
-                </a:solidFill>
-                <a:latin typeface="Liberation Mono"/>
-                <a:ea typeface="Noto Sans CJK JP"/>
-                <a:cs typeface="Liberation Mono"/>
-              </a:rPr>
-              <a:t># (10, 24)</a:t>
-            </a:r>
-          </a:p>
-          <a:p>
-            <a:pPr algn="l">
-              <a:lnSpc>
-                <a:spcPts val="2142"/>
-              </a:lnSpc>
-              <a:spcBef>
-                <a:spcPts val="0"/>
-              </a:spcBef>
-              <a:spcAft>
-                <a:spcPts val="0"/>
-              </a:spcAft>
-              <a:buNone/>
-              <a:defRPr sz="1800" b="0">
-                <a:solidFill>
-                  <a:srgbClr val="303437"/>
-                </a:solidFill>
-                <a:latin typeface="Noto Sans"/>
-              </a:defRPr>
-            </a:pPr>
-            <a:r>
-              <a:rPr sz="1800" b="0" lang="ja-JP" altLang="en-US">
-                <a:solidFill>
-                  <a:srgbClr val="303437"/>
-                </a:solidFill>
-                <a:latin typeface="Liberation Mono"/>
-                <a:ea typeface="Noto Sans CJK JP"/>
-                <a:cs typeface="Liberation Mono"/>
-              </a:rPr>
-              <a:t>sum_product([])</a:t>
-            </a:r>
-          </a:p>
-          <a:p>
-            <a:pPr algn="l">
-              <a:lnSpc>
-                <a:spcPts val="2142"/>
-              </a:lnSpc>
-              <a:spcBef>
-                <a:spcPts val="0"/>
-              </a:spcBef>
-              <a:spcAft>
-                <a:spcPts val="0"/>
-              </a:spcAft>
-              <a:buNone/>
-              <a:defRPr sz="1800" b="0">
-                <a:solidFill>
-                  <a:srgbClr val="303437"/>
-                </a:solidFill>
-                <a:latin typeface="Noto Sans"/>
-              </a:defRPr>
-            </a:pPr>
-            <a:r>
-              <a:rPr sz="1800" b="0" lang="ja-JP" altLang="en-US">
-                <a:solidFill>
-                  <a:srgbClr val="303437"/>
-                </a:solidFill>
-                <a:latin typeface="Liberation Mono"/>
-                <a:ea typeface="Noto Sans CJK JP"/>
-                <a:cs typeface="Liberation Mono"/>
-              </a:rPr>
-              <a:t># (0, 1)</a:t>
+                <a:spcPts val="2340"/>
+              </a:lnSpc>
+              <a:spcBef>
+                <a:spcPts val="0"/>
+              </a:spcBef>
+              <a:spcAft>
+                <a:spcPts val="0"/>
+              </a:spcAft>
+              <a:buNone/>
+              <a:defRPr sz="2000" b="0">
+                <a:solidFill>
+                  <a:srgbClr val="303437"/>
+                </a:solidFill>
+                <a:latin typeface="Noto Sans"/>
+              </a:defRPr>
+            </a:pPr>
+            <a:r>
+              <a:rPr sz="2000" b="0" lang="ja-JP" altLang="en-US">
+                <a:solidFill>
+                  <a:srgbClr val="303437"/>
+                </a:solidFill>
+                <a:latin typeface="Noto Sans"/>
+                <a:ea typeface="Noto Sans CJK JP"/>
+                <a:cs typeface="Noto Sans"/>
+              </a:rPr>
+              <a:t>From a given list of integers, generate a list of rolling maximum element found until given moment in the sequence.</a:t>
             </a:r>
           </a:p>
         </p:txBody>
       </p:sp>
       <p:sp>
         <p:nvSpPr>
-          <p:cNvPr id="6" name="TextBox 5"/>
-          <p:cNvSpPr txBox="1"/>
-          <p:nvPr/>
-        </p:nvSpPr>
-        <p:spPr>
-          <a:xfrm>
-            <a:off x="594360" y="3821175"/>
-            <a:ext cx="7955279" cy="342011"/>
-          </a:xfrm>
-          <a:prstGeom prst="rect">
-            <a:avLst/>
-          </a:prstGeom>
-          <a:noFill/>
-        </p:spPr>
-        <p:txBody>
-          <a:bodyPr wrap="square" lIns="0" rIns="0" tIns="0" bIns="0">
-            <a:noAutofit/>
-          </a:bodyPr>
-          <a:lstStyle/>
-          <a:p>
-            <a:pPr algn="l">
-              <a:lnSpc>
-                <a:spcPct val="119000"/>
-              </a:lnSpc>
-              <a:spcBef>
-                <a:spcPts val="0"/>
-              </a:spcBef>
-              <a:spcAft>
-                <a:spcPts val="0"/>
-              </a:spcAft>
-              <a:buNone/>
-              <a:defRPr sz="1900" b="0">
-                <a:solidFill>
-                  <a:srgbClr val="303437"/>
-                </a:solidFill>
-                <a:latin typeface="Noto Sans"/>
-              </a:defRPr>
-            </a:pPr>
-            <a:r>
-              <a:rPr sz="1900" b="0" lang="ja-JP" altLang="en-US">
-                <a:solidFill>
-                  <a:srgbClr val="303437"/>
-                </a:solidFill>
-                <a:latin typeface="Noto Sans"/>
-                <a:ea typeface="Noto Sans CJK JP"/>
-                <a:cs typeface="Noto Sans"/>
-              </a:rPr>
-              <a:t>和を0、積を1で初期化すると、空リストも同じ処理で扱える。</a:t>
-            </a:r>
-          </a:p>
-        </p:txBody>
-      </p:sp>
-      <p:sp>
-        <p:nvSpPr>
-          <p:cNvPr id="7" name="sources"/>
+          <p:cNvPr id="6" name="sources"/>
           <p:cNvSpPr txBox="1"/>
           <p:nvPr/>
         </p:nvSpPr>
@@ -23909,7 +24306,7 @@
                 <a:ea typeface="Noto Sans CJK JP"/>
                 <a:cs typeface="Noto Sans"/>
               </a:rPr>
-              <a:t>[1] OpenAI. HumanEval.jsonl.gz. 改訂b9453e8。 HumanEval/8。#以降は期待する返り値。</a:t>
+              <a:t>[1] OpenAI. HumanEval.jsonl.gz. 改訂b9453e8。 HumanEval/9。仕様文を抜粋。</a:t>
             </a:r>
           </a:p>
           <a:p>
@@ -23936,6 +24333,168 @@
                 <a:hlinkClick r:id="rId2"/>
               </a:rPr>
               <a:t>https://github.com/openai/human-eval/blob/b9453e8/data/HumanEval.jsonl.gz</a:t>
+            </a:r>
+          </a:p>
+        </p:txBody>
+      </p:sp>
+      <p:sp>
+        <p:nvSpPr>
+          <p:cNvPr id="7" name="TextBox 6"/>
+          <p:cNvSpPr txBox="1"/>
+          <p:nvPr/>
+        </p:nvSpPr>
+        <p:spPr>
+          <a:xfrm>
+            <a:off x="548640" y="1295400"/>
+            <a:ext cx="8046720" cy="203200"/>
+          </a:xfrm>
+          <a:prstGeom prst="rect">
+            <a:avLst/>
+          </a:prstGeom>
+          <a:noFill/>
+        </p:spPr>
+        <p:txBody>
+          <a:bodyPr wrap="square" lIns="0" rIns="0" tIns="0" bIns="0">
+            <a:noAutofit/>
+          </a:bodyPr>
+          <a:lstStyle/>
+          <a:p>
+            <a:pPr algn="l">
+              <a:lnSpc>
+                <a:spcPct val="117000"/>
+              </a:lnSpc>
+              <a:spcBef>
+                <a:spcPts val="0"/>
+              </a:spcBef>
+              <a:spcAft>
+                <a:spcPts val="0"/>
+              </a:spcAft>
+              <a:buNone/>
+              <a:defRPr sz="1200" b="0">
+                <a:solidFill>
+                  <a:srgbClr val="303437"/>
+                </a:solidFill>
+                <a:latin typeface="Noto Sans"/>
+              </a:defRPr>
+            </a:pPr>
+            <a:r>
+              <a:rPr sz="1200" b="0" lang="ja-JP" altLang="en-US">
+                <a:solidFill>
+                  <a:srgbClr val="626669"/>
+                </a:solidFill>
+                <a:latin typeface="Noto Sans"/>
+                <a:ea typeface="Noto Sans CJK JP"/>
+                <a:cs typeface="Noto Sans"/>
+              </a:rPr>
+              <a:t>仕様文の原文（抜粋）</a:t>
+            </a:r>
+          </a:p>
+        </p:txBody>
+      </p:sp>
+      <p:sp>
+        <p:nvSpPr>
+          <p:cNvPr id="8" name="TextBox 7"/>
+          <p:cNvSpPr txBox="1"/>
+          <p:nvPr/>
+        </p:nvSpPr>
+        <p:spPr>
+          <a:xfrm>
+            <a:off x="548640" y="2396236"/>
+            <a:ext cx="8046720" cy="203200"/>
+          </a:xfrm>
+          <a:prstGeom prst="rect">
+            <a:avLst/>
+          </a:prstGeom>
+          <a:noFill/>
+        </p:spPr>
+        <p:txBody>
+          <a:bodyPr wrap="square" lIns="0" rIns="0" tIns="0" bIns="0">
+            <a:noAutofit/>
+          </a:bodyPr>
+          <a:lstStyle/>
+          <a:p>
+            <a:pPr algn="l">
+              <a:lnSpc>
+                <a:spcPct val="117000"/>
+              </a:lnSpc>
+              <a:spcBef>
+                <a:spcPts val="0"/>
+              </a:spcBef>
+              <a:spcAft>
+                <a:spcPts val="0"/>
+              </a:spcAft>
+              <a:buNone/>
+              <a:defRPr sz="1200" b="0">
+                <a:solidFill>
+                  <a:srgbClr val="303437"/>
+                </a:solidFill>
+                <a:latin typeface="Noto Sans"/>
+              </a:defRPr>
+            </a:pPr>
+            <a:r>
+              <a:rPr sz="1200" b="0" lang="ja-JP" altLang="en-US">
+                <a:solidFill>
+                  <a:srgbClr val="626669"/>
+                </a:solidFill>
+                <a:latin typeface="Noto Sans"/>
+                <a:ea typeface="Noto Sans CJK JP"/>
+                <a:cs typeface="Noto Sans"/>
+              </a:rPr>
+              <a:t>日本語訳</a:t>
+            </a:r>
+          </a:p>
+        </p:txBody>
+      </p:sp>
+      <p:sp>
+        <p:nvSpPr>
+          <p:cNvPr id="9" name="TextBox 3"/>
+          <p:cNvSpPr txBox="1"/>
+          <p:nvPr/>
+        </p:nvSpPr>
+        <p:spPr>
+          <a:xfrm>
+            <a:off x="594360" y="2650236"/>
+            <a:ext cx="7955280" cy="632460"/>
+          </a:xfrm>
+          <a:prstGeom prst="rect">
+            <a:avLst/>
+          </a:prstGeom>
+          <a:noFill/>
+        </p:spPr>
+        <p:txBody>
+          <a:bodyPr wrap="square" lIns="0" rIns="0" tIns="0" bIns="0">
+            <a:noAutofit/>
+          </a:bodyPr>
+          <a:lstStyle/>
+          <a:p>
+            <a:pPr algn="l">
+              <a:lnSpc>
+                <a:spcPts val="2340"/>
+              </a:lnSpc>
+              <a:spcBef>
+                <a:spcPts val="0"/>
+              </a:spcBef>
+              <a:spcAft>
+                <a:spcPts val="0"/>
+              </a:spcAft>
+              <a:buNone/>
+              <a:defRPr sz="2000" b="0">
+                <a:solidFill>
+                  <a:srgbClr val="303437"/>
+                </a:solidFill>
+                <a:latin typeface="Noto Sans"/>
+              </a:defRPr>
+            </a:pPr>
+            <a:r>
+              <a:rPr sz="2000" b="0" lang="ja-JP" altLang="en-US">
+                <a:solidFill>
+                  <a:srgbClr val="303437"/>
+                </a:solidFill>
+                <a:latin typeface="Noto Sans"/>
+                <a:ea typeface="Noto Sans CJK JP"/>
+                <a:cs typeface="Noto Sans"/>
+              </a:rPr>
+              <a:t>整数列を先頭から読み、各位置までに現れた値の最大値をリストにして返す。</a:t>
             </a:r>
           </a:p>
         </p:txBody>
@@ -24001,7 +24560,7 @@
                 <a:ea typeface="Noto Sans CJK JP"/>
                 <a:cs typeface="Noto Sans"/>
               </a:rPr>
-              <a:t>追加例7：それまでの最大値を返す</a:t>
+              <a:t>追加例7：入出力例と解説</a:t>
             </a:r>
           </a:p>
         </p:txBody>
@@ -24056,68 +24615,14 @@
       </p:sp>
       <p:sp>
         <p:nvSpPr>
-          <p:cNvPr id="4" name="TextBox 3"/>
-          <p:cNvSpPr txBox="1"/>
-          <p:nvPr/>
-        </p:nvSpPr>
-        <p:spPr>
-          <a:xfrm>
-            <a:off x="548640" y="1344168"/>
-            <a:ext cx="8046720" cy="228600"/>
-          </a:xfrm>
-          <a:prstGeom prst="rect">
-            <a:avLst/>
-          </a:prstGeom>
-          <a:noFill/>
-        </p:spPr>
-        <p:txBody>
-          <a:bodyPr wrap="square" lIns="0" rIns="0" tIns="0" bIns="0">
-            <a:noAutofit/>
-          </a:bodyPr>
-          <a:lstStyle/>
-          <a:p>
-            <a:pPr algn="l">
-              <a:lnSpc>
-                <a:spcPct val="117000"/>
-              </a:lnSpc>
-              <a:spcBef>
-                <a:spcPts val="0"/>
-              </a:spcBef>
-              <a:spcAft>
-                <a:spcPts val="0"/>
-              </a:spcAft>
-              <a:buNone/>
-              <a:defRPr sz="1300" b="0">
-                <a:solidFill>
-                  <a:srgbClr val="303437"/>
-                </a:solidFill>
-                <a:latin typeface="Noto Sans"/>
-              </a:defRPr>
-            </a:pPr>
-            <a:r>
-              <a:rPr sz="1300" b="0" lang="ja-JP" altLang="en-US">
-                <a:solidFill>
-                  <a:srgbClr val="626669"/>
-                </a:solidFill>
-                <a:latin typeface="Noto Sans"/>
-                <a:ea typeface="Noto Sans CJK JP"/>
-                <a:cs typeface="Noto Sans"/>
-              </a:rPr>
-              <a:t>仕様文の原文（docstringから抜粋）</a:t>
-            </a:r>
-          </a:p>
-        </p:txBody>
-      </p:sp>
-      <p:sp>
-        <p:nvSpPr>
-          <p:cNvPr id="5" name="quote-frame"/>
+          <p:cNvPr id="5" name="code-frame"/>
           <p:cNvSpPr/>
           <p:nvPr/>
         </p:nvSpPr>
         <p:spPr>
           <a:xfrm>
-            <a:off x="548640" y="1691640"/>
-            <a:ext cx="8046720" cy="858519"/>
+            <a:off x="548640" y="1676400"/>
+            <a:ext cx="8046720" cy="798068"/>
           </a:xfrm>
           <a:prstGeom prst="rect">
             <a:avLst/>
@@ -24145,46 +24650,131 @@
           </a:fontRef>
         </p:style>
         <p:txBody>
-          <a:bodyPr rtlCol="0" anchor="ctr" wrap="square" lIns="177800" rIns="177800" tIns="101600" bIns="127000">
+          <a:bodyPr rtlCol="0" anchor="ctr" wrap="none" lIns="152400" rIns="152400" tIns="101600" bIns="127000">
             <a:noAutofit/>
           </a:bodyPr>
           <a:lstStyle/>
           <a:p>
             <a:pPr algn="l">
               <a:lnSpc>
-                <a:spcPts val="2379"/>
-              </a:lnSpc>
-              <a:spcBef>
-                <a:spcPts val="0"/>
-              </a:spcBef>
-              <a:spcAft>
-                <a:spcPts val="0"/>
-              </a:spcAft>
-              <a:buNone/>
-              <a:defRPr sz="2000" b="0">
-                <a:solidFill>
-                  <a:srgbClr val="303437"/>
-                </a:solidFill>
-                <a:latin typeface="Noto Sans"/>
-              </a:defRPr>
-            </a:pPr>
-            <a:r>
-              <a:rPr sz="2000" b="0" lang="ja-JP" altLang="en-US">
-                <a:solidFill>
-                  <a:srgbClr val="303437"/>
-                </a:solidFill>
-                <a:latin typeface="Noto Sans"/>
-                <a:ea typeface="Noto Sans CJK JP"/>
-                <a:cs typeface="Noto Sans"/>
-              </a:rPr>
-              <a:t>From a given list of integers, generate a list of rolling maximum element found until given moment in the sequence.</a:t>
+                <a:spcPts val="2142"/>
+              </a:lnSpc>
+              <a:spcBef>
+                <a:spcPts val="0"/>
+              </a:spcBef>
+              <a:spcAft>
+                <a:spcPts val="0"/>
+              </a:spcAft>
+              <a:buNone/>
+              <a:defRPr sz="1800" b="0">
+                <a:solidFill>
+                  <a:srgbClr val="303437"/>
+                </a:solidFill>
+                <a:latin typeface="Noto Sans"/>
+              </a:defRPr>
+            </a:pPr>
+            <a:r>
+              <a:rPr sz="1800" b="0" lang="ja-JP" altLang="en-US">
+                <a:solidFill>
+                  <a:srgbClr val="303437"/>
+                </a:solidFill>
+                <a:latin typeface="Liberation Mono"/>
+                <a:ea typeface="Noto Sans CJK JP"/>
+                <a:cs typeface="Liberation Mono"/>
+              </a:rPr>
+              <a:t>rolling_max([1, 2, 3, 2, 3, 4, 2])</a:t>
+            </a:r>
+          </a:p>
+          <a:p>
+            <a:pPr algn="l">
+              <a:lnSpc>
+                <a:spcPts val="2142"/>
+              </a:lnSpc>
+              <a:spcBef>
+                <a:spcPts val="0"/>
+              </a:spcBef>
+              <a:spcAft>
+                <a:spcPts val="0"/>
+              </a:spcAft>
+              <a:buNone/>
+              <a:defRPr sz="1800" b="0">
+                <a:solidFill>
+                  <a:srgbClr val="303437"/>
+                </a:solidFill>
+                <a:latin typeface="Noto Sans"/>
+              </a:defRPr>
+            </a:pPr>
+            <a:r>
+              <a:rPr sz="1800" b="0" lang="ja-JP" altLang="en-US">
+                <a:solidFill>
+                  <a:srgbClr val="303437"/>
+                </a:solidFill>
+                <a:latin typeface="Liberation Mono"/>
+                <a:ea typeface="Noto Sans CJK JP"/>
+                <a:cs typeface="Liberation Mono"/>
+              </a:rPr>
+              <a:t># [1, 2, 3, 3, 3, 4, 4]</a:t>
             </a:r>
           </a:p>
         </p:txBody>
       </p:sp>
       <p:sp>
         <p:nvSpPr>
-          <p:cNvPr id="6" name="sources"/>
+          <p:cNvPr id="6" name="TextBox 5"/>
+          <p:cNvSpPr txBox="1"/>
+          <p:nvPr/>
+        </p:nvSpPr>
+        <p:spPr>
+          <a:xfrm>
+            <a:off x="594360" y="2639060"/>
+            <a:ext cx="7955279" cy="342011"/>
+          </a:xfrm>
+          <a:prstGeom prst="rect">
+            <a:avLst/>
+          </a:prstGeom>
+          <a:noFill/>
+        </p:spPr>
+        <p:txBody>
+          <a:bodyPr wrap="square" lIns="0" rIns="0" tIns="0" bIns="0">
+            <a:noAutofit/>
+          </a:bodyPr>
+          <a:lstStyle/>
+          <a:p>
+            <a:pPr algn="l">
+              <a:lnSpc>
+                <a:spcPct val="119000"/>
+              </a:lnSpc>
+              <a:spcBef>
+                <a:spcPts val="0"/>
+              </a:spcBef>
+              <a:spcAft>
+                <a:spcPts val="0"/>
+              </a:spcAft>
+              <a:buNone/>
+              <a:defRPr sz="1900" b="0">
+                <a:solidFill>
+                  <a:srgbClr val="303437"/>
+                </a:solidFill>
+                <a:latin typeface="Noto Sans"/>
+              </a:defRPr>
+            </a:pPr>
+            <a:r>
+              <a:rPr sz="1900" b="0" lang="ja-JP" altLang="en-US">
+                <a:solidFill>
+                  <a:srgbClr val="303437"/>
+                </a:solidFill>
+                <a:latin typeface="Noto Sans"/>
+                <a:ea typeface="Noto Sans CJK JP"/>
+                <a:cs typeface="Noto Sans"/>
+              </a:rPr>
+              <a:t>直前までの最大値と今回の値を比較して更新する。</a:t>
+            </a:r>
+          </a:p>
+        </p:txBody>
+      </p:sp>
+      <p:sp>
+        <p:nvSpPr>
+          <p:cNvPr id="7" name="sources"/>
           <p:cNvSpPr txBox="1"/>
           <p:nvPr/>
         </p:nvSpPr>
@@ -24231,7 +24821,7 @@
                 <a:ea typeface="Noto Sans CJK JP"/>
                 <a:cs typeface="Noto Sans"/>
               </a:rPr>
-              <a:t>[1] OpenAI. HumanEval.jsonl.gz. 改訂b9453e8。 HumanEval/9。入出力例は日本語訳とともに掲載。</a:t>
+              <a:t>[1] OpenAI. HumanEval.jsonl.gz. 改訂b9453e8。 HumanEval/9。#以降は期待する返り値。</a:t>
             </a:r>
           </a:p>
           <a:p>
@@ -24323,7 +24913,7 @@
                 <a:ea typeface="Noto Sans CJK JP"/>
                 <a:cs typeface="Noto Sans"/>
               </a:rPr>
-              <a:t>追加例7：日本語訳と入出力例</a:t>
+              <a:t>追加例8：最短の回文を作る</a:t>
             </a:r>
           </a:p>
         </p:txBody>
@@ -24378,68 +24968,14 @@
       </p:sp>
       <p:sp>
         <p:nvSpPr>
-          <p:cNvPr id="4" name="TextBox 3"/>
-          <p:cNvSpPr txBox="1"/>
-          <p:nvPr/>
-        </p:nvSpPr>
-        <p:spPr>
-          <a:xfrm>
-            <a:off x="594360" y="1508760"/>
-            <a:ext cx="7955279" cy="659383"/>
-          </a:xfrm>
-          <a:prstGeom prst="rect">
-            <a:avLst/>
-          </a:prstGeom>
-          <a:noFill/>
-        </p:spPr>
-        <p:txBody>
-          <a:bodyPr wrap="square" lIns="0" rIns="0" tIns="0" bIns="0">
-            <a:noAutofit/>
-          </a:bodyPr>
-          <a:lstStyle/>
-          <a:p>
-            <a:pPr algn="l">
-              <a:lnSpc>
-                <a:spcPct val="119000"/>
-              </a:lnSpc>
-              <a:spcBef>
-                <a:spcPts val="0"/>
-              </a:spcBef>
-              <a:spcAft>
-                <a:spcPts val="0"/>
-              </a:spcAft>
-              <a:buNone/>
-              <a:defRPr sz="2000" b="0">
-                <a:solidFill>
-                  <a:srgbClr val="303437"/>
-                </a:solidFill>
-                <a:latin typeface="Noto Sans"/>
-              </a:defRPr>
-            </a:pPr>
-            <a:r>
-              <a:rPr sz="2000" b="0" lang="ja-JP" altLang="en-US">
-                <a:solidFill>
-                  <a:srgbClr val="303437"/>
-                </a:solidFill>
-                <a:latin typeface="Noto Sans"/>
-                <a:ea typeface="Noto Sans CJK JP"/>
-                <a:cs typeface="Noto Sans"/>
-              </a:rPr>
-              <a:t>整数列を先頭から読み、各位置までに現れた値の最大値をリストにして返す。</a:t>
-            </a:r>
-          </a:p>
-        </p:txBody>
-      </p:sp>
-      <p:sp>
-        <p:nvSpPr>
-          <p:cNvPr id="5" name="code-frame"/>
+          <p:cNvPr id="5" name="quote-frame"/>
           <p:cNvSpPr/>
           <p:nvPr/>
         </p:nvSpPr>
         <p:spPr>
           <a:xfrm>
-            <a:off x="548640" y="2314448"/>
-            <a:ext cx="8046720" cy="798068"/>
+            <a:off x="548640" y="1549400"/>
+            <a:ext cx="8046720" cy="1663077"/>
           </a:xfrm>
           <a:prstGeom prst="rect">
             <a:avLst/>
@@ -24467,131 +25003,46 @@
           </a:fontRef>
         </p:style>
         <p:txBody>
-          <a:bodyPr rtlCol="0" anchor="ctr" wrap="none" lIns="152400" rIns="152400" tIns="101600" bIns="127000">
+          <a:bodyPr rtlCol="0" anchor="t" wrap="square" lIns="127000" rIns="127000" tIns="76200" bIns="76200">
             <a:noAutofit/>
           </a:bodyPr>
           <a:lstStyle/>
           <a:p>
             <a:pPr algn="l">
               <a:lnSpc>
-                <a:spcPts val="2142"/>
-              </a:lnSpc>
-              <a:spcBef>
-                <a:spcPts val="0"/>
-              </a:spcBef>
-              <a:spcAft>
-                <a:spcPts val="0"/>
-              </a:spcAft>
-              <a:buNone/>
-              <a:defRPr sz="1800" b="0">
-                <a:solidFill>
-                  <a:srgbClr val="303437"/>
-                </a:solidFill>
-                <a:latin typeface="Noto Sans"/>
-              </a:defRPr>
-            </a:pPr>
-            <a:r>
-              <a:rPr sz="1800" b="0" lang="ja-JP" altLang="en-US">
-                <a:solidFill>
-                  <a:srgbClr val="303437"/>
-                </a:solidFill>
-                <a:latin typeface="Liberation Mono"/>
-                <a:ea typeface="Noto Sans CJK JP"/>
-                <a:cs typeface="Liberation Mono"/>
-              </a:rPr>
-              <a:t>rolling_max([1, 2, 3, 2, 3, 4, 2])</a:t>
-            </a:r>
-          </a:p>
-          <a:p>
-            <a:pPr algn="l">
-              <a:lnSpc>
-                <a:spcPts val="2142"/>
-              </a:lnSpc>
-              <a:spcBef>
-                <a:spcPts val="0"/>
-              </a:spcBef>
-              <a:spcAft>
-                <a:spcPts val="0"/>
-              </a:spcAft>
-              <a:buNone/>
-              <a:defRPr sz="1800" b="0">
-                <a:solidFill>
-                  <a:srgbClr val="303437"/>
-                </a:solidFill>
-                <a:latin typeface="Noto Sans"/>
-              </a:defRPr>
-            </a:pPr>
-            <a:r>
-              <a:rPr sz="1800" b="0" lang="ja-JP" altLang="en-US">
-                <a:solidFill>
-                  <a:srgbClr val="303437"/>
-                </a:solidFill>
-                <a:latin typeface="Liberation Mono"/>
-                <a:ea typeface="Noto Sans CJK JP"/>
-                <a:cs typeface="Liberation Mono"/>
-              </a:rPr>
-              <a:t># [1, 2, 3, 3, 3, 4, 4]</a:t>
+                <a:spcPts val="2340"/>
+              </a:lnSpc>
+              <a:spcBef>
+                <a:spcPts val="0"/>
+              </a:spcBef>
+              <a:spcAft>
+                <a:spcPts val="0"/>
+              </a:spcAft>
+              <a:buNone/>
+              <a:defRPr sz="2000" b="0">
+                <a:solidFill>
+                  <a:srgbClr val="303437"/>
+                </a:solidFill>
+                <a:latin typeface="Noto Sans"/>
+              </a:defRPr>
+            </a:pPr>
+            <a:r>
+              <a:rPr sz="2000" b="0" lang="ja-JP" altLang="en-US">
+                <a:solidFill>
+                  <a:srgbClr val="303437"/>
+                </a:solidFill>
+                <a:latin typeface="Noto Sans"/>
+                <a:ea typeface="Noto Sans CJK JP"/>
+                <a:cs typeface="Noto Sans"/>
+              </a:rPr>
+              <a:t>Find the shortest palindrome that begins with a supplied string. Algorithm idea is simple: - Find the longest postfix of supplied string that is a palindrome. - Append to the end of the string reverse of a string prefix that comes before the palindromic suffix.</a:t>
             </a:r>
           </a:p>
         </p:txBody>
       </p:sp>
       <p:sp>
         <p:nvSpPr>
-          <p:cNvPr id="6" name="TextBox 5"/>
-          <p:cNvSpPr txBox="1"/>
-          <p:nvPr/>
-        </p:nvSpPr>
-        <p:spPr>
-          <a:xfrm>
-            <a:off x="594360" y="3277108"/>
-            <a:ext cx="7955279" cy="342011"/>
-          </a:xfrm>
-          <a:prstGeom prst="rect">
-            <a:avLst/>
-          </a:prstGeom>
-          <a:noFill/>
-        </p:spPr>
-        <p:txBody>
-          <a:bodyPr wrap="square" lIns="0" rIns="0" tIns="0" bIns="0">
-            <a:noAutofit/>
-          </a:bodyPr>
-          <a:lstStyle/>
-          <a:p>
-            <a:pPr algn="l">
-              <a:lnSpc>
-                <a:spcPct val="119000"/>
-              </a:lnSpc>
-              <a:spcBef>
-                <a:spcPts val="0"/>
-              </a:spcBef>
-              <a:spcAft>
-                <a:spcPts val="0"/>
-              </a:spcAft>
-              <a:buNone/>
-              <a:defRPr sz="1900" b="0">
-                <a:solidFill>
-                  <a:srgbClr val="303437"/>
-                </a:solidFill>
-                <a:latin typeface="Noto Sans"/>
-              </a:defRPr>
-            </a:pPr>
-            <a:r>
-              <a:rPr sz="1900" b="0" lang="ja-JP" altLang="en-US">
-                <a:solidFill>
-                  <a:srgbClr val="303437"/>
-                </a:solidFill>
-                <a:latin typeface="Noto Sans"/>
-                <a:ea typeface="Noto Sans CJK JP"/>
-                <a:cs typeface="Noto Sans"/>
-              </a:rPr>
-              <a:t>直前までの最大値と今回の値を比較して更新する。</a:t>
-            </a:r>
-          </a:p>
-        </p:txBody>
-      </p:sp>
-      <p:sp>
-        <p:nvSpPr>
-          <p:cNvPr id="7" name="sources"/>
+          <p:cNvPr id="6" name="sources"/>
           <p:cNvSpPr txBox="1"/>
           <p:nvPr/>
         </p:nvSpPr>
@@ -24638,7 +25089,7 @@
                 <a:ea typeface="Noto Sans CJK JP"/>
                 <a:cs typeface="Noto Sans"/>
               </a:rPr>
-              <a:t>[1] OpenAI. HumanEval.jsonl.gz. 改訂b9453e8。 HumanEval/9。#以降は期待する返り値。</a:t>
+              <a:t>[1] OpenAI. HumanEval.jsonl.gz. 改訂b9453e8。 HumanEval/10。仕様文を抜粋。</a:t>
             </a:r>
           </a:p>
           <a:p>
@@ -24665,6 +25116,168 @@
                 <a:hlinkClick r:id="rId2"/>
               </a:rPr>
               <a:t>https://github.com/openai/human-eval/blob/b9453e8/data/HumanEval.jsonl.gz</a:t>
+            </a:r>
+          </a:p>
+        </p:txBody>
+      </p:sp>
+      <p:sp>
+        <p:nvSpPr>
+          <p:cNvPr id="7" name="TextBox 6"/>
+          <p:cNvSpPr txBox="1"/>
+          <p:nvPr/>
+        </p:nvSpPr>
+        <p:spPr>
+          <a:xfrm>
+            <a:off x="548640" y="1295400"/>
+            <a:ext cx="8046720" cy="203200"/>
+          </a:xfrm>
+          <a:prstGeom prst="rect">
+            <a:avLst/>
+          </a:prstGeom>
+          <a:noFill/>
+        </p:spPr>
+        <p:txBody>
+          <a:bodyPr wrap="square" lIns="0" rIns="0" tIns="0" bIns="0">
+            <a:noAutofit/>
+          </a:bodyPr>
+          <a:lstStyle/>
+          <a:p>
+            <a:pPr algn="l">
+              <a:lnSpc>
+                <a:spcPct val="117000"/>
+              </a:lnSpc>
+              <a:spcBef>
+                <a:spcPts val="0"/>
+              </a:spcBef>
+              <a:spcAft>
+                <a:spcPts val="0"/>
+              </a:spcAft>
+              <a:buNone/>
+              <a:defRPr sz="1200" b="0">
+                <a:solidFill>
+                  <a:srgbClr val="303437"/>
+                </a:solidFill>
+                <a:latin typeface="Noto Sans"/>
+              </a:defRPr>
+            </a:pPr>
+            <a:r>
+              <a:rPr sz="1200" b="0" lang="ja-JP" altLang="en-US">
+                <a:solidFill>
+                  <a:srgbClr val="626669"/>
+                </a:solidFill>
+                <a:latin typeface="Noto Sans"/>
+                <a:ea typeface="Noto Sans CJK JP"/>
+                <a:cs typeface="Noto Sans"/>
+              </a:rPr>
+              <a:t>仕様文の原文（抜粋）</a:t>
+            </a:r>
+          </a:p>
+        </p:txBody>
+      </p:sp>
+      <p:sp>
+        <p:nvSpPr>
+          <p:cNvPr id="8" name="TextBox 7"/>
+          <p:cNvSpPr txBox="1"/>
+          <p:nvPr/>
+        </p:nvSpPr>
+        <p:spPr>
+          <a:xfrm>
+            <a:off x="548640" y="3288677"/>
+            <a:ext cx="8046720" cy="203200"/>
+          </a:xfrm>
+          <a:prstGeom prst="rect">
+            <a:avLst/>
+          </a:prstGeom>
+          <a:noFill/>
+        </p:spPr>
+        <p:txBody>
+          <a:bodyPr wrap="square" lIns="0" rIns="0" tIns="0" bIns="0">
+            <a:noAutofit/>
+          </a:bodyPr>
+          <a:lstStyle/>
+          <a:p>
+            <a:pPr algn="l">
+              <a:lnSpc>
+                <a:spcPct val="117000"/>
+              </a:lnSpc>
+              <a:spcBef>
+                <a:spcPts val="0"/>
+              </a:spcBef>
+              <a:spcAft>
+                <a:spcPts val="0"/>
+              </a:spcAft>
+              <a:buNone/>
+              <a:defRPr sz="1200" b="0">
+                <a:solidFill>
+                  <a:srgbClr val="303437"/>
+                </a:solidFill>
+                <a:latin typeface="Noto Sans"/>
+              </a:defRPr>
+            </a:pPr>
+            <a:r>
+              <a:rPr sz="1200" b="0" lang="ja-JP" altLang="en-US">
+                <a:solidFill>
+                  <a:srgbClr val="626669"/>
+                </a:solidFill>
+                <a:latin typeface="Noto Sans"/>
+                <a:ea typeface="Noto Sans CJK JP"/>
+                <a:cs typeface="Noto Sans"/>
+              </a:rPr>
+              <a:t>日本語訳</a:t>
+            </a:r>
+          </a:p>
+        </p:txBody>
+      </p:sp>
+      <p:sp>
+        <p:nvSpPr>
+          <p:cNvPr id="9" name="TextBox 3"/>
+          <p:cNvSpPr txBox="1"/>
+          <p:nvPr/>
+        </p:nvSpPr>
+        <p:spPr>
+          <a:xfrm>
+            <a:off x="594360" y="3542677"/>
+            <a:ext cx="7955280" cy="632460"/>
+          </a:xfrm>
+          <a:prstGeom prst="rect">
+            <a:avLst/>
+          </a:prstGeom>
+          <a:noFill/>
+        </p:spPr>
+        <p:txBody>
+          <a:bodyPr wrap="square" lIns="0" rIns="0" tIns="0" bIns="0">
+            <a:noAutofit/>
+          </a:bodyPr>
+          <a:lstStyle/>
+          <a:p>
+            <a:pPr algn="l">
+              <a:lnSpc>
+                <a:spcPts val="2340"/>
+              </a:lnSpc>
+              <a:spcBef>
+                <a:spcPts val="0"/>
+              </a:spcBef>
+              <a:spcAft>
+                <a:spcPts val="0"/>
+              </a:spcAft>
+              <a:buNone/>
+              <a:defRPr sz="2000" b="0">
+                <a:solidFill>
+                  <a:srgbClr val="303437"/>
+                </a:solidFill>
+                <a:latin typeface="Noto Sans"/>
+              </a:defRPr>
+            </a:pPr>
+            <a:r>
+              <a:rPr sz="2000" b="0" lang="ja-JP" altLang="en-US">
+                <a:solidFill>
+                  <a:srgbClr val="303437"/>
+                </a:solidFill>
+                <a:latin typeface="Noto Sans"/>
+                <a:ea typeface="Noto Sans CJK JP"/>
+                <a:cs typeface="Noto Sans"/>
+              </a:rPr>
+              <a:t>与えられた文字列で始まる最短の回文を返す。末尾側の最長の回文を探し、その前に残った部分を逆順にして末尾へ付ける。</a:t>
             </a:r>
           </a:p>
         </p:txBody>
@@ -25034,7 +25647,7 @@
                 <a:ea typeface="Noto Sans CJK JP"/>
                 <a:cs typeface="Noto Sans"/>
               </a:rPr>
-              <a:t>追加例8：最短の回文を作る</a:t>
+              <a:t>追加例8：入出力例と解説</a:t>
             </a:r>
           </a:p>
         </p:txBody>
@@ -25089,68 +25702,14 @@
       </p:sp>
       <p:sp>
         <p:nvSpPr>
-          <p:cNvPr id="4" name="TextBox 3"/>
-          <p:cNvSpPr txBox="1"/>
-          <p:nvPr/>
-        </p:nvSpPr>
-        <p:spPr>
-          <a:xfrm>
-            <a:off x="548640" y="1344168"/>
-            <a:ext cx="8046720" cy="228600"/>
-          </a:xfrm>
-          <a:prstGeom prst="rect">
-            <a:avLst/>
-          </a:prstGeom>
-          <a:noFill/>
-        </p:spPr>
-        <p:txBody>
-          <a:bodyPr wrap="square" lIns="0" rIns="0" tIns="0" bIns="0">
-            <a:noAutofit/>
-          </a:bodyPr>
-          <a:lstStyle/>
-          <a:p>
-            <a:pPr algn="l">
-              <a:lnSpc>
-                <a:spcPct val="117000"/>
-              </a:lnSpc>
-              <a:spcBef>
-                <a:spcPts val="0"/>
-              </a:spcBef>
-              <a:spcAft>
-                <a:spcPts val="0"/>
-              </a:spcAft>
-              <a:buNone/>
-              <a:defRPr sz="1300" b="0">
-                <a:solidFill>
-                  <a:srgbClr val="303437"/>
-                </a:solidFill>
-                <a:latin typeface="Noto Sans"/>
-              </a:defRPr>
-            </a:pPr>
-            <a:r>
-              <a:rPr sz="1300" b="0" lang="ja-JP" altLang="en-US">
-                <a:solidFill>
-                  <a:srgbClr val="626669"/>
-                </a:solidFill>
-                <a:latin typeface="Noto Sans"/>
-                <a:ea typeface="Noto Sans CJK JP"/>
-                <a:cs typeface="Noto Sans"/>
-              </a:rPr>
-              <a:t>仕様文の原文（docstringから抜粋）</a:t>
-            </a:r>
-          </a:p>
-        </p:txBody>
-      </p:sp>
-      <p:sp>
-        <p:nvSpPr>
-          <p:cNvPr id="5" name="quote-frame"/>
+          <p:cNvPr id="5" name="code-frame"/>
           <p:cNvSpPr/>
           <p:nvPr/>
         </p:nvSpPr>
         <p:spPr>
           <a:xfrm>
-            <a:off x="548640" y="1691640"/>
-            <a:ext cx="8046720" cy="1765300"/>
+            <a:off x="548640" y="1676400"/>
+            <a:ext cx="8046720" cy="1342135"/>
           </a:xfrm>
           <a:prstGeom prst="rect">
             <a:avLst/>
@@ -25178,39 +25737,132 @@
           </a:fontRef>
         </p:style>
         <p:txBody>
-          <a:bodyPr rtlCol="0" anchor="ctr" wrap="square" lIns="177800" rIns="177800" tIns="101600" bIns="127000">
+          <a:bodyPr rtlCol="0" anchor="ctr" wrap="none" lIns="152400" rIns="152400" tIns="101600" bIns="127000">
             <a:noAutofit/>
           </a:bodyPr>
           <a:lstStyle/>
           <a:p>
             <a:pPr algn="l">
               <a:lnSpc>
-                <a:spcPts val="2379"/>
-              </a:lnSpc>
-              <a:spcBef>
-                <a:spcPts val="0"/>
-              </a:spcBef>
-              <a:spcAft>
-                <a:spcPts val="0"/>
-              </a:spcAft>
-              <a:buNone/>
-              <a:defRPr sz="2000" b="0">
-                <a:solidFill>
-                  <a:srgbClr val="303437"/>
-                </a:solidFill>
-                <a:latin typeface="Noto Sans"/>
-              </a:defRPr>
-            </a:pPr>
-            <a:r>
-              <a:rPr sz="2000" b="0" lang="ja-JP" altLang="en-US">
-                <a:solidFill>
-                  <a:srgbClr val="303437"/>
-                </a:solidFill>
-                <a:latin typeface="Noto Sans"/>
-                <a:ea typeface="Noto Sans CJK JP"/>
-                <a:cs typeface="Noto Sans"/>
-              </a:rPr>
-              <a:t>Find the shortest palindrome that begins with a supplied string. Algorithm idea is simple: - Find the longest postfix of supplied string that is a palindrome. - Append to the end of the string reverse of a string prefix that comes before the palindromic suffix.</a:t>
+                <a:spcPts val="2142"/>
+              </a:lnSpc>
+              <a:spcBef>
+                <a:spcPts val="0"/>
+              </a:spcBef>
+              <a:spcAft>
+                <a:spcPts val="0"/>
+              </a:spcAft>
+              <a:buNone/>
+              <a:defRPr sz="1800" b="0">
+                <a:solidFill>
+                  <a:srgbClr val="303437"/>
+                </a:solidFill>
+                <a:latin typeface="Noto Sans"/>
+              </a:defRPr>
+            </a:pPr>
+            <a:r>
+              <a:rPr sz="1800" b="0" lang="ja-JP" altLang="en-US">
+                <a:solidFill>
+                  <a:srgbClr val="303437"/>
+                </a:solidFill>
+                <a:latin typeface="Liberation Mono"/>
+                <a:ea typeface="Noto Sans CJK JP"/>
+                <a:cs typeface="Liberation Mono"/>
+              </a:rPr>
+              <a:t>make_palindrome('cat')</a:t>
+            </a:r>
+          </a:p>
+          <a:p>
+            <a:pPr algn="l">
+              <a:lnSpc>
+                <a:spcPts val="2142"/>
+              </a:lnSpc>
+              <a:spcBef>
+                <a:spcPts val="0"/>
+              </a:spcBef>
+              <a:spcAft>
+                <a:spcPts val="0"/>
+              </a:spcAft>
+              <a:buNone/>
+              <a:defRPr sz="1800" b="0">
+                <a:solidFill>
+                  <a:srgbClr val="303437"/>
+                </a:solidFill>
+                <a:latin typeface="Noto Sans"/>
+              </a:defRPr>
+            </a:pPr>
+            <a:r>
+              <a:rPr sz="1800" b="0" lang="ja-JP" altLang="en-US">
+                <a:solidFill>
+                  <a:srgbClr val="303437"/>
+                </a:solidFill>
+                <a:latin typeface="Liberation Mono"/>
+                <a:ea typeface="Noto Sans CJK JP"/>
+                <a:cs typeface="Liberation Mono"/>
+              </a:rPr>
+              <a:t># 'catac'</a:t>
+            </a:r>
+          </a:p>
+          <a:p>
+            <a:pPr algn="l">
+              <a:lnSpc>
+                <a:spcPts val="2142"/>
+              </a:lnSpc>
+              <a:spcBef>
+                <a:spcPts val="0"/>
+              </a:spcBef>
+              <a:spcAft>
+                <a:spcPts val="0"/>
+              </a:spcAft>
+              <a:buNone/>
+              <a:defRPr sz="1800" b="0">
+                <a:solidFill>
+                  <a:srgbClr val="303437"/>
+                </a:solidFill>
+                <a:latin typeface="Noto Sans"/>
+              </a:defRPr>
+            </a:pPr>
+            <a:r>
+              <a:rPr sz="1800" b="0" lang="ja-JP" altLang="en-US">
+                <a:solidFill>
+                  <a:srgbClr val="303437"/>
+                </a:solidFill>
+                <a:latin typeface="Liberation Mono"/>
+                <a:ea typeface="Noto Sans CJK JP"/>
+                <a:cs typeface="Liberation Mono"/>
+              </a:rPr>
+              <a:t>make_palindrome('cata')</a:t>
+            </a:r>
+          </a:p>
+          <a:p>
+            <a:pPr algn="l">
+              <a:lnSpc>
+                <a:spcPts val="2142"/>
+              </a:lnSpc>
+              <a:spcBef>
+                <a:spcPts val="0"/>
+              </a:spcBef>
+              <a:spcAft>
+                <a:spcPts val="0"/>
+              </a:spcAft>
+              <a:buNone/>
+              <a:defRPr sz="1800" b="0">
+                <a:solidFill>
+                  <a:srgbClr val="303437"/>
+                </a:solidFill>
+                <a:latin typeface="Noto Sans"/>
+              </a:defRPr>
+            </a:pPr>
+            <a:r>
+              <a:rPr sz="1800" b="0" lang="ja-JP" altLang="en-US">
+                <a:solidFill>
+                  <a:srgbClr val="303437"/>
+                </a:solidFill>
+                <a:latin typeface="Liberation Mono"/>
+                <a:ea typeface="Noto Sans CJK JP"/>
+                <a:cs typeface="Liberation Mono"/>
+              </a:rPr>
+              <a:t># 'catac'</a:t>
             </a:r>
           </a:p>
         </p:txBody>
@@ -25264,7 +25916,7 @@
                 <a:ea typeface="Noto Sans CJK JP"/>
                 <a:cs typeface="Noto Sans"/>
               </a:rPr>
-              <a:t>[1] OpenAI. HumanEval.jsonl.gz. 改訂b9453e8。 HumanEval/10。入出力例は日本語訳とともに掲載。</a:t>
+              <a:t>[1] OpenAI. HumanEval.jsonl.gz. 改訂b9453e8。 HumanEval/10。#以降は期待する返り値。</a:t>
             </a:r>
           </a:p>
           <a:p>
@@ -25356,7 +26008,7 @@
                 <a:ea typeface="Noto Sans CJK JP"/>
                 <a:cs typeface="Noto Sans"/>
               </a:rPr>
-              <a:t>追加例8：日本語訳と入出力例</a:t>
+              <a:t>追加例9：ビット列の排他的論理和</a:t>
             </a:r>
           </a:p>
         </p:txBody>
@@ -25411,68 +26063,14 @@
       </p:sp>
       <p:sp>
         <p:nvSpPr>
-          <p:cNvPr id="4" name="TextBox 3"/>
-          <p:cNvSpPr txBox="1"/>
-          <p:nvPr/>
-        </p:nvSpPr>
-        <p:spPr>
-          <a:xfrm>
-            <a:off x="594360" y="1508760"/>
-            <a:ext cx="7955279" cy="659383"/>
-          </a:xfrm>
-          <a:prstGeom prst="rect">
-            <a:avLst/>
-          </a:prstGeom>
-          <a:noFill/>
-        </p:spPr>
-        <p:txBody>
-          <a:bodyPr wrap="square" lIns="0" rIns="0" tIns="0" bIns="0">
-            <a:noAutofit/>
-          </a:bodyPr>
-          <a:lstStyle/>
-          <a:p>
-            <a:pPr algn="l">
-              <a:lnSpc>
-                <a:spcPct val="119000"/>
-              </a:lnSpc>
-              <a:spcBef>
-                <a:spcPts val="0"/>
-              </a:spcBef>
-              <a:spcAft>
-                <a:spcPts val="0"/>
-              </a:spcAft>
-              <a:buNone/>
-              <a:defRPr sz="2000" b="0">
-                <a:solidFill>
-                  <a:srgbClr val="303437"/>
-                </a:solidFill>
-                <a:latin typeface="Noto Sans"/>
-              </a:defRPr>
-            </a:pPr>
-            <a:r>
-              <a:rPr sz="2000" b="0" lang="ja-JP" altLang="en-US">
-                <a:solidFill>
-                  <a:srgbClr val="303437"/>
-                </a:solidFill>
-                <a:latin typeface="Noto Sans"/>
-                <a:ea typeface="Noto Sans CJK JP"/>
-                <a:cs typeface="Noto Sans"/>
-              </a:rPr>
-              <a:t>与えられた文字列で始まる最短の回文を返す。末尾側の最長の回文を探し、その前に残った部分を逆順にして末尾へ付ける。</a:t>
-            </a:r>
-          </a:p>
-        </p:txBody>
-      </p:sp>
-      <p:sp>
-        <p:nvSpPr>
-          <p:cNvPr id="5" name="code-frame"/>
+          <p:cNvPr id="5" name="quote-frame"/>
           <p:cNvSpPr/>
           <p:nvPr/>
         </p:nvSpPr>
         <p:spPr>
           <a:xfrm>
-            <a:off x="548640" y="2314448"/>
-            <a:ext cx="8046720" cy="1342135"/>
+            <a:off x="548640" y="1549400"/>
+            <a:ext cx="8046720" cy="1067993"/>
           </a:xfrm>
           <a:prstGeom prst="rect">
             <a:avLst/>
@@ -25500,132 +26098,39 @@
           </a:fontRef>
         </p:style>
         <p:txBody>
-          <a:bodyPr rtlCol="0" anchor="ctr" wrap="none" lIns="152400" rIns="152400" tIns="101600" bIns="127000">
+          <a:bodyPr rtlCol="0" anchor="t" wrap="square" lIns="127000" rIns="127000" tIns="76200" bIns="76200">
             <a:noAutofit/>
           </a:bodyPr>
           <a:lstStyle/>
           <a:p>
             <a:pPr algn="l">
               <a:lnSpc>
-                <a:spcPts val="2142"/>
-              </a:lnSpc>
-              <a:spcBef>
-                <a:spcPts val="0"/>
-              </a:spcBef>
-              <a:spcAft>
-                <a:spcPts val="0"/>
-              </a:spcAft>
-              <a:buNone/>
-              <a:defRPr sz="1800" b="0">
-                <a:solidFill>
-                  <a:srgbClr val="303437"/>
-                </a:solidFill>
-                <a:latin typeface="Noto Sans"/>
-              </a:defRPr>
-            </a:pPr>
-            <a:r>
-              <a:rPr sz="1800" b="0" lang="ja-JP" altLang="en-US">
-                <a:solidFill>
-                  <a:srgbClr val="303437"/>
-                </a:solidFill>
-                <a:latin typeface="Liberation Mono"/>
-                <a:ea typeface="Noto Sans CJK JP"/>
-                <a:cs typeface="Liberation Mono"/>
-              </a:rPr>
-              <a:t>make_palindrome('cat')</a:t>
-            </a:r>
-          </a:p>
-          <a:p>
-            <a:pPr algn="l">
-              <a:lnSpc>
-                <a:spcPts val="2142"/>
-              </a:lnSpc>
-              <a:spcBef>
-                <a:spcPts val="0"/>
-              </a:spcBef>
-              <a:spcAft>
-                <a:spcPts val="0"/>
-              </a:spcAft>
-              <a:buNone/>
-              <a:defRPr sz="1800" b="0">
-                <a:solidFill>
-                  <a:srgbClr val="303437"/>
-                </a:solidFill>
-                <a:latin typeface="Noto Sans"/>
-              </a:defRPr>
-            </a:pPr>
-            <a:r>
-              <a:rPr sz="1800" b="0" lang="ja-JP" altLang="en-US">
-                <a:solidFill>
-                  <a:srgbClr val="303437"/>
-                </a:solidFill>
-                <a:latin typeface="Liberation Mono"/>
-                <a:ea typeface="Noto Sans CJK JP"/>
-                <a:cs typeface="Liberation Mono"/>
-              </a:rPr>
-              <a:t># 'catac'</a:t>
-            </a:r>
-          </a:p>
-          <a:p>
-            <a:pPr algn="l">
-              <a:lnSpc>
-                <a:spcPts val="2142"/>
-              </a:lnSpc>
-              <a:spcBef>
-                <a:spcPts val="0"/>
-              </a:spcBef>
-              <a:spcAft>
-                <a:spcPts val="0"/>
-              </a:spcAft>
-              <a:buNone/>
-              <a:defRPr sz="1800" b="0">
-                <a:solidFill>
-                  <a:srgbClr val="303437"/>
-                </a:solidFill>
-                <a:latin typeface="Noto Sans"/>
-              </a:defRPr>
-            </a:pPr>
-            <a:r>
-              <a:rPr sz="1800" b="0" lang="ja-JP" altLang="en-US">
-                <a:solidFill>
-                  <a:srgbClr val="303437"/>
-                </a:solidFill>
-                <a:latin typeface="Liberation Mono"/>
-                <a:ea typeface="Noto Sans CJK JP"/>
-                <a:cs typeface="Liberation Mono"/>
-              </a:rPr>
-              <a:t>make_palindrome('cata')</a:t>
-            </a:r>
-          </a:p>
-          <a:p>
-            <a:pPr algn="l">
-              <a:lnSpc>
-                <a:spcPts val="2142"/>
-              </a:lnSpc>
-              <a:spcBef>
-                <a:spcPts val="0"/>
-              </a:spcBef>
-              <a:spcAft>
-                <a:spcPts val="0"/>
-              </a:spcAft>
-              <a:buNone/>
-              <a:defRPr sz="1800" b="0">
-                <a:solidFill>
-                  <a:srgbClr val="303437"/>
-                </a:solidFill>
-                <a:latin typeface="Noto Sans"/>
-              </a:defRPr>
-            </a:pPr>
-            <a:r>
-              <a:rPr sz="1800" b="0" lang="ja-JP" altLang="en-US">
-                <a:solidFill>
-                  <a:srgbClr val="303437"/>
-                </a:solidFill>
-                <a:latin typeface="Liberation Mono"/>
-                <a:ea typeface="Noto Sans CJK JP"/>
-                <a:cs typeface="Liberation Mono"/>
-              </a:rPr>
-              <a:t># 'catac'</a:t>
+                <a:spcPts val="2340"/>
+              </a:lnSpc>
+              <a:spcBef>
+                <a:spcPts val="0"/>
+              </a:spcBef>
+              <a:spcAft>
+                <a:spcPts val="0"/>
+              </a:spcAft>
+              <a:buNone/>
+              <a:defRPr sz="2000" b="0">
+                <a:solidFill>
+                  <a:srgbClr val="303437"/>
+                </a:solidFill>
+                <a:latin typeface="Noto Sans"/>
+              </a:defRPr>
+            </a:pPr>
+            <a:r>
+              <a:rPr sz="2000" b="0" lang="ja-JP" altLang="en-US">
+                <a:solidFill>
+                  <a:srgbClr val="303437"/>
+                </a:solidFill>
+                <a:latin typeface="Noto Sans"/>
+                <a:ea typeface="Noto Sans CJK JP"/>
+                <a:cs typeface="Noto Sans"/>
+              </a:rPr>
+              <a:t>Input are two strings a and b consisting only of 1s and 0s. Perform binary XOR on these inputs and return result also as a string.</a:t>
             </a:r>
           </a:p>
         </p:txBody>
@@ -25679,7 +26184,7 @@
                 <a:ea typeface="Noto Sans CJK JP"/>
                 <a:cs typeface="Noto Sans"/>
               </a:rPr>
-              <a:t>[1] OpenAI. HumanEval.jsonl.gz. 改訂b9453e8。 HumanEval/10。#以降は期待する返り値。</a:t>
+              <a:t>[1] OpenAI. HumanEval.jsonl.gz. 改訂b9453e8。 HumanEval/11。仕様文を抜粋。</a:t>
             </a:r>
           </a:p>
           <a:p>
@@ -25706,6 +26211,168 @@
                 <a:hlinkClick r:id="rId2"/>
               </a:rPr>
               <a:t>https://github.com/openai/human-eval/blob/b9453e8/data/HumanEval.jsonl.gz</a:t>
+            </a:r>
+          </a:p>
+        </p:txBody>
+      </p:sp>
+      <p:sp>
+        <p:nvSpPr>
+          <p:cNvPr id="7" name="TextBox 6"/>
+          <p:cNvSpPr txBox="1"/>
+          <p:nvPr/>
+        </p:nvSpPr>
+        <p:spPr>
+          <a:xfrm>
+            <a:off x="548640" y="1295400"/>
+            <a:ext cx="8046720" cy="203200"/>
+          </a:xfrm>
+          <a:prstGeom prst="rect">
+            <a:avLst/>
+          </a:prstGeom>
+          <a:noFill/>
+        </p:spPr>
+        <p:txBody>
+          <a:bodyPr wrap="square" lIns="0" rIns="0" tIns="0" bIns="0">
+            <a:noAutofit/>
+          </a:bodyPr>
+          <a:lstStyle/>
+          <a:p>
+            <a:pPr algn="l">
+              <a:lnSpc>
+                <a:spcPct val="117000"/>
+              </a:lnSpc>
+              <a:spcBef>
+                <a:spcPts val="0"/>
+              </a:spcBef>
+              <a:spcAft>
+                <a:spcPts val="0"/>
+              </a:spcAft>
+              <a:buNone/>
+              <a:defRPr sz="1200" b="0">
+                <a:solidFill>
+                  <a:srgbClr val="303437"/>
+                </a:solidFill>
+                <a:latin typeface="Noto Sans"/>
+              </a:defRPr>
+            </a:pPr>
+            <a:r>
+              <a:rPr sz="1200" b="0" lang="ja-JP" altLang="en-US">
+                <a:solidFill>
+                  <a:srgbClr val="626669"/>
+                </a:solidFill>
+                <a:latin typeface="Noto Sans"/>
+                <a:ea typeface="Noto Sans CJK JP"/>
+                <a:cs typeface="Noto Sans"/>
+              </a:rPr>
+              <a:t>仕様文の原文（抜粋）</a:t>
+            </a:r>
+          </a:p>
+        </p:txBody>
+      </p:sp>
+      <p:sp>
+        <p:nvSpPr>
+          <p:cNvPr id="8" name="TextBox 7"/>
+          <p:cNvSpPr txBox="1"/>
+          <p:nvPr/>
+        </p:nvSpPr>
+        <p:spPr>
+          <a:xfrm>
+            <a:off x="548640" y="2693593"/>
+            <a:ext cx="8046720" cy="203200"/>
+          </a:xfrm>
+          <a:prstGeom prst="rect">
+            <a:avLst/>
+          </a:prstGeom>
+          <a:noFill/>
+        </p:spPr>
+        <p:txBody>
+          <a:bodyPr wrap="square" lIns="0" rIns="0" tIns="0" bIns="0">
+            <a:noAutofit/>
+          </a:bodyPr>
+          <a:lstStyle/>
+          <a:p>
+            <a:pPr algn="l">
+              <a:lnSpc>
+                <a:spcPct val="117000"/>
+              </a:lnSpc>
+              <a:spcBef>
+                <a:spcPts val="0"/>
+              </a:spcBef>
+              <a:spcAft>
+                <a:spcPts val="0"/>
+              </a:spcAft>
+              <a:buNone/>
+              <a:defRPr sz="1200" b="0">
+                <a:solidFill>
+                  <a:srgbClr val="303437"/>
+                </a:solidFill>
+                <a:latin typeface="Noto Sans"/>
+              </a:defRPr>
+            </a:pPr>
+            <a:r>
+              <a:rPr sz="1200" b="0" lang="ja-JP" altLang="en-US">
+                <a:solidFill>
+                  <a:srgbClr val="626669"/>
+                </a:solidFill>
+                <a:latin typeface="Noto Sans"/>
+                <a:ea typeface="Noto Sans CJK JP"/>
+                <a:cs typeface="Noto Sans"/>
+              </a:rPr>
+              <a:t>日本語訳</a:t>
+            </a:r>
+          </a:p>
+        </p:txBody>
+      </p:sp>
+      <p:sp>
+        <p:nvSpPr>
+          <p:cNvPr id="9" name="TextBox 3"/>
+          <p:cNvSpPr txBox="1"/>
+          <p:nvPr/>
+        </p:nvSpPr>
+        <p:spPr>
+          <a:xfrm>
+            <a:off x="594360" y="2947593"/>
+            <a:ext cx="7955280" cy="632460"/>
+          </a:xfrm>
+          <a:prstGeom prst="rect">
+            <a:avLst/>
+          </a:prstGeom>
+          <a:noFill/>
+        </p:spPr>
+        <p:txBody>
+          <a:bodyPr wrap="square" lIns="0" rIns="0" tIns="0" bIns="0">
+            <a:noAutofit/>
+          </a:bodyPr>
+          <a:lstStyle/>
+          <a:p>
+            <a:pPr algn="l">
+              <a:lnSpc>
+                <a:spcPts val="2340"/>
+              </a:lnSpc>
+              <a:spcBef>
+                <a:spcPts val="0"/>
+              </a:spcBef>
+              <a:spcAft>
+                <a:spcPts val="0"/>
+              </a:spcAft>
+              <a:buNone/>
+              <a:defRPr sz="2000" b="0">
+                <a:solidFill>
+                  <a:srgbClr val="303437"/>
+                </a:solidFill>
+                <a:latin typeface="Noto Sans"/>
+              </a:defRPr>
+            </a:pPr>
+            <a:r>
+              <a:rPr sz="2000" b="0" lang="ja-JP" altLang="en-US">
+                <a:solidFill>
+                  <a:srgbClr val="303437"/>
+                </a:solidFill>
+                <a:latin typeface="Noto Sans"/>
+                <a:ea typeface="Noto Sans CJK JP"/>
+                <a:cs typeface="Noto Sans"/>
+              </a:rPr>
+              <a:t>0と1からなる二つの文字列について、各位置の排他的論理和を文字列で返す。</a:t>
             </a:r>
           </a:p>
         </p:txBody>
@@ -25771,7 +26438,7 @@
                 <a:ea typeface="Noto Sans CJK JP"/>
                 <a:cs typeface="Noto Sans"/>
               </a:rPr>
-              <a:t>追加例9：ビット列の排他的論理和</a:t>
+              <a:t>追加例9：入出力例と解説</a:t>
             </a:r>
           </a:p>
         </p:txBody>
@@ -25826,68 +26493,14 @@
       </p:sp>
       <p:sp>
         <p:nvSpPr>
-          <p:cNvPr id="4" name="TextBox 3"/>
-          <p:cNvSpPr txBox="1"/>
-          <p:nvPr/>
-        </p:nvSpPr>
-        <p:spPr>
-          <a:xfrm>
-            <a:off x="548640" y="1344168"/>
-            <a:ext cx="8046720" cy="228600"/>
-          </a:xfrm>
-          <a:prstGeom prst="rect">
-            <a:avLst/>
-          </a:prstGeom>
-          <a:noFill/>
-        </p:spPr>
-        <p:txBody>
-          <a:bodyPr wrap="square" lIns="0" rIns="0" tIns="0" bIns="0">
-            <a:noAutofit/>
-          </a:bodyPr>
-          <a:lstStyle/>
-          <a:p>
-            <a:pPr algn="l">
-              <a:lnSpc>
-                <a:spcPct val="117000"/>
-              </a:lnSpc>
-              <a:spcBef>
-                <a:spcPts val="0"/>
-              </a:spcBef>
-              <a:spcAft>
-                <a:spcPts val="0"/>
-              </a:spcAft>
-              <a:buNone/>
-              <a:defRPr sz="1300" b="0">
-                <a:solidFill>
-                  <a:srgbClr val="303437"/>
-                </a:solidFill>
-                <a:latin typeface="Noto Sans"/>
-              </a:defRPr>
-            </a:pPr>
-            <a:r>
-              <a:rPr sz="1300" b="0" lang="ja-JP" altLang="en-US">
-                <a:solidFill>
-                  <a:srgbClr val="626669"/>
-                </a:solidFill>
-                <a:latin typeface="Noto Sans"/>
-                <a:ea typeface="Noto Sans CJK JP"/>
-                <a:cs typeface="Noto Sans"/>
-              </a:rPr>
-              <a:t>仕様文の原文（docstringから抜粋）</a:t>
-            </a:r>
-          </a:p>
-        </p:txBody>
-      </p:sp>
-      <p:sp>
-        <p:nvSpPr>
-          <p:cNvPr id="5" name="quote-frame"/>
+          <p:cNvPr id="5" name="code-frame"/>
           <p:cNvSpPr/>
           <p:nvPr/>
         </p:nvSpPr>
         <p:spPr>
           <a:xfrm>
-            <a:off x="548640" y="1691640"/>
-            <a:ext cx="8046720" cy="1160780"/>
+            <a:off x="548640" y="1676400"/>
+            <a:ext cx="8046720" cy="798068"/>
           </a:xfrm>
           <a:prstGeom prst="rect">
             <a:avLst/>
@@ -25915,46 +26528,131 @@
           </a:fontRef>
         </p:style>
         <p:txBody>
-          <a:bodyPr rtlCol="0" anchor="ctr" wrap="square" lIns="177800" rIns="177800" tIns="101600" bIns="127000">
+          <a:bodyPr rtlCol="0" anchor="ctr" wrap="none" lIns="152400" rIns="152400" tIns="101600" bIns="127000">
             <a:noAutofit/>
           </a:bodyPr>
           <a:lstStyle/>
           <a:p>
             <a:pPr algn="l">
               <a:lnSpc>
-                <a:spcPts val="2379"/>
-              </a:lnSpc>
-              <a:spcBef>
-                <a:spcPts val="0"/>
-              </a:spcBef>
-              <a:spcAft>
-                <a:spcPts val="0"/>
-              </a:spcAft>
-              <a:buNone/>
-              <a:defRPr sz="2000" b="0">
-                <a:solidFill>
-                  <a:srgbClr val="303437"/>
-                </a:solidFill>
-                <a:latin typeface="Noto Sans"/>
-              </a:defRPr>
-            </a:pPr>
-            <a:r>
-              <a:rPr sz="2000" b="0" lang="ja-JP" altLang="en-US">
-                <a:solidFill>
-                  <a:srgbClr val="303437"/>
-                </a:solidFill>
-                <a:latin typeface="Noto Sans"/>
-                <a:ea typeface="Noto Sans CJK JP"/>
-                <a:cs typeface="Noto Sans"/>
-              </a:rPr>
-              <a:t>Input are two strings a and b consisting only of 1s and 0s. Perform binary XOR on these inputs and return result also as a string.</a:t>
+                <a:spcPts val="2142"/>
+              </a:lnSpc>
+              <a:spcBef>
+                <a:spcPts val="0"/>
+              </a:spcBef>
+              <a:spcAft>
+                <a:spcPts val="0"/>
+              </a:spcAft>
+              <a:buNone/>
+              <a:defRPr sz="1800" b="0">
+                <a:solidFill>
+                  <a:srgbClr val="303437"/>
+                </a:solidFill>
+                <a:latin typeface="Noto Sans"/>
+              </a:defRPr>
+            </a:pPr>
+            <a:r>
+              <a:rPr sz="1800" b="0" lang="ja-JP" altLang="en-US">
+                <a:solidFill>
+                  <a:srgbClr val="303437"/>
+                </a:solidFill>
+                <a:latin typeface="Liberation Mono"/>
+                <a:ea typeface="Noto Sans CJK JP"/>
+                <a:cs typeface="Liberation Mono"/>
+              </a:rPr>
+              <a:t>string_xor('010', '110')</a:t>
+            </a:r>
+          </a:p>
+          <a:p>
+            <a:pPr algn="l">
+              <a:lnSpc>
+                <a:spcPts val="2142"/>
+              </a:lnSpc>
+              <a:spcBef>
+                <a:spcPts val="0"/>
+              </a:spcBef>
+              <a:spcAft>
+                <a:spcPts val="0"/>
+              </a:spcAft>
+              <a:buNone/>
+              <a:defRPr sz="1800" b="0">
+                <a:solidFill>
+                  <a:srgbClr val="303437"/>
+                </a:solidFill>
+                <a:latin typeface="Noto Sans"/>
+              </a:defRPr>
+            </a:pPr>
+            <a:r>
+              <a:rPr sz="1800" b="0" lang="ja-JP" altLang="en-US">
+                <a:solidFill>
+                  <a:srgbClr val="303437"/>
+                </a:solidFill>
+                <a:latin typeface="Liberation Mono"/>
+                <a:ea typeface="Noto Sans CJK JP"/>
+                <a:cs typeface="Liberation Mono"/>
+              </a:rPr>
+              <a:t># '100'</a:t>
             </a:r>
           </a:p>
         </p:txBody>
       </p:sp>
       <p:sp>
         <p:nvSpPr>
-          <p:cNvPr id="6" name="sources"/>
+          <p:cNvPr id="6" name="TextBox 5"/>
+          <p:cNvSpPr txBox="1"/>
+          <p:nvPr/>
+        </p:nvSpPr>
+        <p:spPr>
+          <a:xfrm>
+            <a:off x="594360" y="2639060"/>
+            <a:ext cx="7955279" cy="342011"/>
+          </a:xfrm>
+          <a:prstGeom prst="rect">
+            <a:avLst/>
+          </a:prstGeom>
+          <a:noFill/>
+        </p:spPr>
+        <p:txBody>
+          <a:bodyPr wrap="square" lIns="0" rIns="0" tIns="0" bIns="0">
+            <a:noAutofit/>
+          </a:bodyPr>
+          <a:lstStyle/>
+          <a:p>
+            <a:pPr algn="l">
+              <a:lnSpc>
+                <a:spcPct val="119000"/>
+              </a:lnSpc>
+              <a:spcBef>
+                <a:spcPts val="0"/>
+              </a:spcBef>
+              <a:spcAft>
+                <a:spcPts val="0"/>
+              </a:spcAft>
+              <a:buNone/>
+              <a:defRPr sz="1900" b="0">
+                <a:solidFill>
+                  <a:srgbClr val="303437"/>
+                </a:solidFill>
+                <a:latin typeface="Noto Sans"/>
+              </a:defRPr>
+            </a:pPr>
+            <a:r>
+              <a:rPr sz="1900" b="0" lang="ja-JP" altLang="en-US">
+                <a:solidFill>
+                  <a:srgbClr val="303437"/>
+                </a:solidFill>
+                <a:latin typeface="Noto Sans"/>
+                <a:ea typeface="Noto Sans CJK JP"/>
+                <a:cs typeface="Noto Sans"/>
+              </a:rPr>
+              <a:t>同じ文字同士なら0、異なる文字同士なら1を返す。</a:t>
+            </a:r>
+          </a:p>
+        </p:txBody>
+      </p:sp>
+      <p:sp>
+        <p:nvSpPr>
+          <p:cNvPr id="7" name="sources"/>
           <p:cNvSpPr txBox="1"/>
           <p:nvPr/>
         </p:nvSpPr>
@@ -26001,7 +26699,7 @@
                 <a:ea typeface="Noto Sans CJK JP"/>
                 <a:cs typeface="Noto Sans"/>
               </a:rPr>
-              <a:t>[1] OpenAI. HumanEval.jsonl.gz. 改訂b9453e8。 HumanEval/11。入出力例は日本語訳とともに掲載。</a:t>
+              <a:t>[1] OpenAI. HumanEval.jsonl.gz. 改訂b9453e8。 HumanEval/11。#以降は期待する返り値。</a:t>
             </a:r>
           </a:p>
           <a:p>
@@ -26093,7 +26791,7 @@
                 <a:ea typeface="Noto Sans CJK JP"/>
                 <a:cs typeface="Noto Sans"/>
               </a:rPr>
-              <a:t>追加例9：日本語訳と入出力例</a:t>
+              <a:t>追加例10：最長の文字列を選ぶ</a:t>
             </a:r>
           </a:p>
         </p:txBody>
@@ -26148,68 +26846,14 @@
       </p:sp>
       <p:sp>
         <p:nvSpPr>
-          <p:cNvPr id="4" name="TextBox 3"/>
-          <p:cNvSpPr txBox="1"/>
-          <p:nvPr/>
-        </p:nvSpPr>
-        <p:spPr>
-          <a:xfrm>
-            <a:off x="594360" y="1508760"/>
-            <a:ext cx="7955279" cy="659383"/>
-          </a:xfrm>
-          <a:prstGeom prst="rect">
-            <a:avLst/>
-          </a:prstGeom>
-          <a:noFill/>
-        </p:spPr>
-        <p:txBody>
-          <a:bodyPr wrap="square" lIns="0" rIns="0" tIns="0" bIns="0">
-            <a:noAutofit/>
-          </a:bodyPr>
-          <a:lstStyle/>
-          <a:p>
-            <a:pPr algn="l">
-              <a:lnSpc>
-                <a:spcPct val="119000"/>
-              </a:lnSpc>
-              <a:spcBef>
-                <a:spcPts val="0"/>
-              </a:spcBef>
-              <a:spcAft>
-                <a:spcPts val="0"/>
-              </a:spcAft>
-              <a:buNone/>
-              <a:defRPr sz="2000" b="0">
-                <a:solidFill>
-                  <a:srgbClr val="303437"/>
-                </a:solidFill>
-                <a:latin typeface="Noto Sans"/>
-              </a:defRPr>
-            </a:pPr>
-            <a:r>
-              <a:rPr sz="2000" b="0" lang="ja-JP" altLang="en-US">
-                <a:solidFill>
-                  <a:srgbClr val="303437"/>
-                </a:solidFill>
-                <a:latin typeface="Noto Sans"/>
-                <a:ea typeface="Noto Sans CJK JP"/>
-                <a:cs typeface="Noto Sans"/>
-              </a:rPr>
-              <a:t>0と1からなる二つの文字列について、各位置の排他的論理和を文字列で返す。</a:t>
-            </a:r>
-          </a:p>
-        </p:txBody>
-      </p:sp>
-      <p:sp>
-        <p:nvSpPr>
-          <p:cNvPr id="5" name="code-frame"/>
+          <p:cNvPr id="5" name="quote-frame"/>
           <p:cNvSpPr/>
           <p:nvPr/>
         </p:nvSpPr>
         <p:spPr>
           <a:xfrm>
-            <a:off x="548640" y="2314448"/>
-            <a:ext cx="8046720" cy="798068"/>
+            <a:off x="548640" y="1549400"/>
+            <a:ext cx="8046720" cy="1067993"/>
           </a:xfrm>
           <a:prstGeom prst="rect">
             <a:avLst/>
@@ -26237,131 +26881,46 @@
           </a:fontRef>
         </p:style>
         <p:txBody>
-          <a:bodyPr rtlCol="0" anchor="ctr" wrap="none" lIns="152400" rIns="152400" tIns="101600" bIns="127000">
+          <a:bodyPr rtlCol="0" anchor="t" wrap="square" lIns="127000" rIns="127000" tIns="76200" bIns="76200">
             <a:noAutofit/>
           </a:bodyPr>
           <a:lstStyle/>
           <a:p>
             <a:pPr algn="l">
               <a:lnSpc>
-                <a:spcPts val="2142"/>
-              </a:lnSpc>
-              <a:spcBef>
-                <a:spcPts val="0"/>
-              </a:spcBef>
-              <a:spcAft>
-                <a:spcPts val="0"/>
-              </a:spcAft>
-              <a:buNone/>
-              <a:defRPr sz="1800" b="0">
-                <a:solidFill>
-                  <a:srgbClr val="303437"/>
-                </a:solidFill>
-                <a:latin typeface="Noto Sans"/>
-              </a:defRPr>
-            </a:pPr>
-            <a:r>
-              <a:rPr sz="1800" b="0" lang="ja-JP" altLang="en-US">
-                <a:solidFill>
-                  <a:srgbClr val="303437"/>
-                </a:solidFill>
-                <a:latin typeface="Liberation Mono"/>
-                <a:ea typeface="Noto Sans CJK JP"/>
-                <a:cs typeface="Liberation Mono"/>
-              </a:rPr>
-              <a:t>string_xor('010', '110')</a:t>
-            </a:r>
-          </a:p>
-          <a:p>
-            <a:pPr algn="l">
-              <a:lnSpc>
-                <a:spcPts val="2142"/>
-              </a:lnSpc>
-              <a:spcBef>
-                <a:spcPts val="0"/>
-              </a:spcBef>
-              <a:spcAft>
-                <a:spcPts val="0"/>
-              </a:spcAft>
-              <a:buNone/>
-              <a:defRPr sz="1800" b="0">
-                <a:solidFill>
-                  <a:srgbClr val="303437"/>
-                </a:solidFill>
-                <a:latin typeface="Noto Sans"/>
-              </a:defRPr>
-            </a:pPr>
-            <a:r>
-              <a:rPr sz="1800" b="0" lang="ja-JP" altLang="en-US">
-                <a:solidFill>
-                  <a:srgbClr val="303437"/>
-                </a:solidFill>
-                <a:latin typeface="Liberation Mono"/>
-                <a:ea typeface="Noto Sans CJK JP"/>
-                <a:cs typeface="Liberation Mono"/>
-              </a:rPr>
-              <a:t># '100'</a:t>
+                <a:spcPts val="2340"/>
+              </a:lnSpc>
+              <a:spcBef>
+                <a:spcPts val="0"/>
+              </a:spcBef>
+              <a:spcAft>
+                <a:spcPts val="0"/>
+              </a:spcAft>
+              <a:buNone/>
+              <a:defRPr sz="2000" b="0">
+                <a:solidFill>
+                  <a:srgbClr val="303437"/>
+                </a:solidFill>
+                <a:latin typeface="Noto Sans"/>
+              </a:defRPr>
+            </a:pPr>
+            <a:r>
+              <a:rPr sz="2000" b="0" lang="ja-JP" altLang="en-US">
+                <a:solidFill>
+                  <a:srgbClr val="303437"/>
+                </a:solidFill>
+                <a:latin typeface="Noto Sans"/>
+                <a:ea typeface="Noto Sans CJK JP"/>
+                <a:cs typeface="Noto Sans"/>
+              </a:rPr>
+              <a:t>Out of list of strings, return the longest one. Return the first one in case of multiple strings of the same length. Return None in case the input list is empty.</a:t>
             </a:r>
           </a:p>
         </p:txBody>
       </p:sp>
       <p:sp>
         <p:nvSpPr>
-          <p:cNvPr id="6" name="TextBox 5"/>
-          <p:cNvSpPr txBox="1"/>
-          <p:nvPr/>
-        </p:nvSpPr>
-        <p:spPr>
-          <a:xfrm>
-            <a:off x="594360" y="3277108"/>
-            <a:ext cx="7955279" cy="342011"/>
-          </a:xfrm>
-          <a:prstGeom prst="rect">
-            <a:avLst/>
-          </a:prstGeom>
-          <a:noFill/>
-        </p:spPr>
-        <p:txBody>
-          <a:bodyPr wrap="square" lIns="0" rIns="0" tIns="0" bIns="0">
-            <a:noAutofit/>
-          </a:bodyPr>
-          <a:lstStyle/>
-          <a:p>
-            <a:pPr algn="l">
-              <a:lnSpc>
-                <a:spcPct val="119000"/>
-              </a:lnSpc>
-              <a:spcBef>
-                <a:spcPts val="0"/>
-              </a:spcBef>
-              <a:spcAft>
-                <a:spcPts val="0"/>
-              </a:spcAft>
-              <a:buNone/>
-              <a:defRPr sz="1900" b="0">
-                <a:solidFill>
-                  <a:srgbClr val="303437"/>
-                </a:solidFill>
-                <a:latin typeface="Noto Sans"/>
-              </a:defRPr>
-            </a:pPr>
-            <a:r>
-              <a:rPr sz="1900" b="0" lang="ja-JP" altLang="en-US">
-                <a:solidFill>
-                  <a:srgbClr val="303437"/>
-                </a:solidFill>
-                <a:latin typeface="Noto Sans"/>
-                <a:ea typeface="Noto Sans CJK JP"/>
-                <a:cs typeface="Noto Sans"/>
-              </a:rPr>
-              <a:t>同じ文字同士なら0、異なる文字同士なら1を返す。</a:t>
-            </a:r>
-          </a:p>
-        </p:txBody>
-      </p:sp>
-      <p:sp>
-        <p:nvSpPr>
-          <p:cNvPr id="7" name="sources"/>
+          <p:cNvPr id="6" name="sources"/>
           <p:cNvSpPr txBox="1"/>
           <p:nvPr/>
         </p:nvSpPr>
@@ -26408,7 +26967,7 @@
                 <a:ea typeface="Noto Sans CJK JP"/>
                 <a:cs typeface="Noto Sans"/>
               </a:rPr>
-              <a:t>[1] OpenAI. HumanEval.jsonl.gz. 改訂b9453e8。 HumanEval/11。#以降は期待する返り値。</a:t>
+              <a:t>[1] OpenAI. HumanEval.jsonl.gz. 改訂b9453e8。 HumanEval/12。仕様文を抜粋。</a:t>
             </a:r>
           </a:p>
           <a:p>
@@ -26435,6 +26994,168 @@
                 <a:hlinkClick r:id="rId2"/>
               </a:rPr>
               <a:t>https://github.com/openai/human-eval/blob/b9453e8/data/HumanEval.jsonl.gz</a:t>
+            </a:r>
+          </a:p>
+        </p:txBody>
+      </p:sp>
+      <p:sp>
+        <p:nvSpPr>
+          <p:cNvPr id="7" name="TextBox 6"/>
+          <p:cNvSpPr txBox="1"/>
+          <p:nvPr/>
+        </p:nvSpPr>
+        <p:spPr>
+          <a:xfrm>
+            <a:off x="548640" y="1295400"/>
+            <a:ext cx="8046720" cy="203200"/>
+          </a:xfrm>
+          <a:prstGeom prst="rect">
+            <a:avLst/>
+          </a:prstGeom>
+          <a:noFill/>
+        </p:spPr>
+        <p:txBody>
+          <a:bodyPr wrap="square" lIns="0" rIns="0" tIns="0" bIns="0">
+            <a:noAutofit/>
+          </a:bodyPr>
+          <a:lstStyle/>
+          <a:p>
+            <a:pPr algn="l">
+              <a:lnSpc>
+                <a:spcPct val="117000"/>
+              </a:lnSpc>
+              <a:spcBef>
+                <a:spcPts val="0"/>
+              </a:spcBef>
+              <a:spcAft>
+                <a:spcPts val="0"/>
+              </a:spcAft>
+              <a:buNone/>
+              <a:defRPr sz="1200" b="0">
+                <a:solidFill>
+                  <a:srgbClr val="303437"/>
+                </a:solidFill>
+                <a:latin typeface="Noto Sans"/>
+              </a:defRPr>
+            </a:pPr>
+            <a:r>
+              <a:rPr sz="1200" b="0" lang="ja-JP" altLang="en-US">
+                <a:solidFill>
+                  <a:srgbClr val="626669"/>
+                </a:solidFill>
+                <a:latin typeface="Noto Sans"/>
+                <a:ea typeface="Noto Sans CJK JP"/>
+                <a:cs typeface="Noto Sans"/>
+              </a:rPr>
+              <a:t>仕様文の原文（抜粋）</a:t>
+            </a:r>
+          </a:p>
+        </p:txBody>
+      </p:sp>
+      <p:sp>
+        <p:nvSpPr>
+          <p:cNvPr id="8" name="TextBox 7"/>
+          <p:cNvSpPr txBox="1"/>
+          <p:nvPr/>
+        </p:nvSpPr>
+        <p:spPr>
+          <a:xfrm>
+            <a:off x="548640" y="2693594"/>
+            <a:ext cx="8046720" cy="203200"/>
+          </a:xfrm>
+          <a:prstGeom prst="rect">
+            <a:avLst/>
+          </a:prstGeom>
+          <a:noFill/>
+        </p:spPr>
+        <p:txBody>
+          <a:bodyPr wrap="square" lIns="0" rIns="0" tIns="0" bIns="0">
+            <a:noAutofit/>
+          </a:bodyPr>
+          <a:lstStyle/>
+          <a:p>
+            <a:pPr algn="l">
+              <a:lnSpc>
+                <a:spcPct val="117000"/>
+              </a:lnSpc>
+              <a:spcBef>
+                <a:spcPts val="0"/>
+              </a:spcBef>
+              <a:spcAft>
+                <a:spcPts val="0"/>
+              </a:spcAft>
+              <a:buNone/>
+              <a:defRPr sz="1200" b="0">
+                <a:solidFill>
+                  <a:srgbClr val="303437"/>
+                </a:solidFill>
+                <a:latin typeface="Noto Sans"/>
+              </a:defRPr>
+            </a:pPr>
+            <a:r>
+              <a:rPr sz="1200" b="0" lang="ja-JP" altLang="en-US">
+                <a:solidFill>
+                  <a:srgbClr val="626669"/>
+                </a:solidFill>
+                <a:latin typeface="Noto Sans"/>
+                <a:ea typeface="Noto Sans CJK JP"/>
+                <a:cs typeface="Noto Sans"/>
+              </a:rPr>
+              <a:t>日本語訳</a:t>
+            </a:r>
+          </a:p>
+        </p:txBody>
+      </p:sp>
+      <p:sp>
+        <p:nvSpPr>
+          <p:cNvPr id="9" name="TextBox 3"/>
+          <p:cNvSpPr txBox="1"/>
+          <p:nvPr/>
+        </p:nvSpPr>
+        <p:spPr>
+          <a:xfrm>
+            <a:off x="594360" y="2947594"/>
+            <a:ext cx="7955280" cy="632460"/>
+          </a:xfrm>
+          <a:prstGeom prst="rect">
+            <a:avLst/>
+          </a:prstGeom>
+          <a:noFill/>
+        </p:spPr>
+        <p:txBody>
+          <a:bodyPr wrap="square" lIns="0" rIns="0" tIns="0" bIns="0">
+            <a:noAutofit/>
+          </a:bodyPr>
+          <a:lstStyle/>
+          <a:p>
+            <a:pPr algn="l">
+              <a:lnSpc>
+                <a:spcPts val="2340"/>
+              </a:lnSpc>
+              <a:spcBef>
+                <a:spcPts val="0"/>
+              </a:spcBef>
+              <a:spcAft>
+                <a:spcPts val="0"/>
+              </a:spcAft>
+              <a:buNone/>
+              <a:defRPr sz="2000" b="0">
+                <a:solidFill>
+                  <a:srgbClr val="303437"/>
+                </a:solidFill>
+                <a:latin typeface="Noto Sans"/>
+              </a:defRPr>
+            </a:pPr>
+            <a:r>
+              <a:rPr sz="2000" b="0" lang="ja-JP" altLang="en-US">
+                <a:solidFill>
+                  <a:srgbClr val="303437"/>
+                </a:solidFill>
+                <a:latin typeface="Noto Sans"/>
+                <a:ea typeface="Noto Sans CJK JP"/>
+                <a:cs typeface="Noto Sans"/>
+              </a:rPr>
+              <a:t>文字列リストで最も長い要素を返す。同じ長さなら先に現れたものを選び、空リストならNoneを返す。</a:t>
             </a:r>
           </a:p>
         </p:txBody>
@@ -26500,7 +27221,7 @@
                 <a:ea typeface="Noto Sans CJK JP"/>
                 <a:cs typeface="Noto Sans"/>
               </a:rPr>
-              <a:t>追加例10：最長の文字列を選ぶ</a:t>
+              <a:t>追加例10：入出力例と解説</a:t>
             </a:r>
           </a:p>
         </p:txBody>
@@ -26555,68 +27276,14 @@
       </p:sp>
       <p:sp>
         <p:nvSpPr>
-          <p:cNvPr id="4" name="TextBox 3"/>
-          <p:cNvSpPr txBox="1"/>
-          <p:nvPr/>
-        </p:nvSpPr>
-        <p:spPr>
-          <a:xfrm>
-            <a:off x="548640" y="1344168"/>
-            <a:ext cx="8046720" cy="228600"/>
-          </a:xfrm>
-          <a:prstGeom prst="rect">
-            <a:avLst/>
-          </a:prstGeom>
-          <a:noFill/>
-        </p:spPr>
-        <p:txBody>
-          <a:bodyPr wrap="square" lIns="0" rIns="0" tIns="0" bIns="0">
-            <a:noAutofit/>
-          </a:bodyPr>
-          <a:lstStyle/>
-          <a:p>
-            <a:pPr algn="l">
-              <a:lnSpc>
-                <a:spcPct val="117000"/>
-              </a:lnSpc>
-              <a:spcBef>
-                <a:spcPts val="0"/>
-              </a:spcBef>
-              <a:spcAft>
-                <a:spcPts val="0"/>
-              </a:spcAft>
-              <a:buNone/>
-              <a:defRPr sz="1300" b="0">
-                <a:solidFill>
-                  <a:srgbClr val="303437"/>
-                </a:solidFill>
-                <a:latin typeface="Noto Sans"/>
-              </a:defRPr>
-            </a:pPr>
-            <a:r>
-              <a:rPr sz="1300" b="0" lang="ja-JP" altLang="en-US">
-                <a:solidFill>
-                  <a:srgbClr val="626669"/>
-                </a:solidFill>
-                <a:latin typeface="Noto Sans"/>
-                <a:ea typeface="Noto Sans CJK JP"/>
-                <a:cs typeface="Noto Sans"/>
-              </a:rPr>
-              <a:t>仕様文の原文（docstringから抜粋）</a:t>
-            </a:r>
-          </a:p>
-        </p:txBody>
-      </p:sp>
-      <p:sp>
-        <p:nvSpPr>
-          <p:cNvPr id="5" name="quote-frame"/>
+          <p:cNvPr id="5" name="code-frame"/>
           <p:cNvSpPr/>
           <p:nvPr/>
         </p:nvSpPr>
         <p:spPr>
           <a:xfrm>
-            <a:off x="548640" y="1691640"/>
-            <a:ext cx="8046720" cy="1160780"/>
+            <a:off x="548640" y="1676400"/>
+            <a:ext cx="8046720" cy="1342135"/>
           </a:xfrm>
           <a:prstGeom prst="rect">
             <a:avLst/>
@@ -26644,46 +27311,193 @@
           </a:fontRef>
         </p:style>
         <p:txBody>
-          <a:bodyPr rtlCol="0" anchor="ctr" wrap="square" lIns="177800" rIns="177800" tIns="101600" bIns="127000">
+          <a:bodyPr rtlCol="0" anchor="ctr" wrap="none" lIns="152400" rIns="152400" tIns="101600" bIns="127000">
             <a:noAutofit/>
           </a:bodyPr>
           <a:lstStyle/>
           <a:p>
             <a:pPr algn="l">
               <a:lnSpc>
-                <a:spcPts val="2379"/>
-              </a:lnSpc>
-              <a:spcBef>
-                <a:spcPts val="0"/>
-              </a:spcBef>
-              <a:spcAft>
-                <a:spcPts val="0"/>
-              </a:spcAft>
-              <a:buNone/>
-              <a:defRPr sz="2000" b="0">
-                <a:solidFill>
-                  <a:srgbClr val="303437"/>
-                </a:solidFill>
-                <a:latin typeface="Noto Sans"/>
-              </a:defRPr>
-            </a:pPr>
-            <a:r>
-              <a:rPr sz="2000" b="0" lang="ja-JP" altLang="en-US">
-                <a:solidFill>
-                  <a:srgbClr val="303437"/>
-                </a:solidFill>
-                <a:latin typeface="Noto Sans"/>
-                <a:ea typeface="Noto Sans CJK JP"/>
-                <a:cs typeface="Noto Sans"/>
-              </a:rPr>
-              <a:t>Out of list of strings, return the longest one. Return the first one in case of multiple strings of the same length. Return None in case the input list is empty.</a:t>
+                <a:spcPts val="2142"/>
+              </a:lnSpc>
+              <a:spcBef>
+                <a:spcPts val="0"/>
+              </a:spcBef>
+              <a:spcAft>
+                <a:spcPts val="0"/>
+              </a:spcAft>
+              <a:buNone/>
+              <a:defRPr sz="1800" b="0">
+                <a:solidFill>
+                  <a:srgbClr val="303437"/>
+                </a:solidFill>
+                <a:latin typeface="Noto Sans"/>
+              </a:defRPr>
+            </a:pPr>
+            <a:r>
+              <a:rPr sz="1800" b="0" lang="ja-JP" altLang="en-US">
+                <a:solidFill>
+                  <a:srgbClr val="303437"/>
+                </a:solidFill>
+                <a:latin typeface="Liberation Mono"/>
+                <a:ea typeface="Noto Sans CJK JP"/>
+                <a:cs typeface="Liberation Mono"/>
+              </a:rPr>
+              <a:t>longest(['a', 'bb', 'cc'])</a:t>
+            </a:r>
+          </a:p>
+          <a:p>
+            <a:pPr algn="l">
+              <a:lnSpc>
+                <a:spcPts val="2142"/>
+              </a:lnSpc>
+              <a:spcBef>
+                <a:spcPts val="0"/>
+              </a:spcBef>
+              <a:spcAft>
+                <a:spcPts val="0"/>
+              </a:spcAft>
+              <a:buNone/>
+              <a:defRPr sz="1800" b="0">
+                <a:solidFill>
+                  <a:srgbClr val="303437"/>
+                </a:solidFill>
+                <a:latin typeface="Noto Sans"/>
+              </a:defRPr>
+            </a:pPr>
+            <a:r>
+              <a:rPr sz="1800" b="0" lang="ja-JP" altLang="en-US">
+                <a:solidFill>
+                  <a:srgbClr val="303437"/>
+                </a:solidFill>
+                <a:latin typeface="Liberation Mono"/>
+                <a:ea typeface="Noto Sans CJK JP"/>
+                <a:cs typeface="Liberation Mono"/>
+              </a:rPr>
+              <a:t># 'bb'</a:t>
+            </a:r>
+          </a:p>
+          <a:p>
+            <a:pPr algn="l">
+              <a:lnSpc>
+                <a:spcPts val="2142"/>
+              </a:lnSpc>
+              <a:spcBef>
+                <a:spcPts val="0"/>
+              </a:spcBef>
+              <a:spcAft>
+                <a:spcPts val="0"/>
+              </a:spcAft>
+              <a:buNone/>
+              <a:defRPr sz="1800" b="0">
+                <a:solidFill>
+                  <a:srgbClr val="303437"/>
+                </a:solidFill>
+                <a:latin typeface="Noto Sans"/>
+              </a:defRPr>
+            </a:pPr>
+            <a:r>
+              <a:rPr sz="1800" b="0" lang="ja-JP" altLang="en-US">
+                <a:solidFill>
+                  <a:srgbClr val="303437"/>
+                </a:solidFill>
+                <a:latin typeface="Liberation Mono"/>
+                <a:ea typeface="Noto Sans CJK JP"/>
+                <a:cs typeface="Liberation Mono"/>
+              </a:rPr>
+              <a:t>longest([])</a:t>
+            </a:r>
+          </a:p>
+          <a:p>
+            <a:pPr algn="l">
+              <a:lnSpc>
+                <a:spcPts val="2142"/>
+              </a:lnSpc>
+              <a:spcBef>
+                <a:spcPts val="0"/>
+              </a:spcBef>
+              <a:spcAft>
+                <a:spcPts val="0"/>
+              </a:spcAft>
+              <a:buNone/>
+              <a:defRPr sz="1800" b="0">
+                <a:solidFill>
+                  <a:srgbClr val="303437"/>
+                </a:solidFill>
+                <a:latin typeface="Noto Sans"/>
+              </a:defRPr>
+            </a:pPr>
+            <a:r>
+              <a:rPr sz="1800" b="0" lang="ja-JP" altLang="en-US">
+                <a:solidFill>
+                  <a:srgbClr val="303437"/>
+                </a:solidFill>
+                <a:latin typeface="Liberation Mono"/>
+                <a:ea typeface="Noto Sans CJK JP"/>
+                <a:cs typeface="Liberation Mono"/>
+              </a:rPr>
+              <a:t># None</a:t>
             </a:r>
           </a:p>
         </p:txBody>
       </p:sp>
       <p:sp>
         <p:nvSpPr>
-          <p:cNvPr id="6" name="sources"/>
+          <p:cNvPr id="6" name="TextBox 5"/>
+          <p:cNvSpPr txBox="1"/>
+          <p:nvPr/>
+        </p:nvSpPr>
+        <p:spPr>
+          <a:xfrm>
+            <a:off x="594360" y="3183127"/>
+            <a:ext cx="7955279" cy="342011"/>
+          </a:xfrm>
+          <a:prstGeom prst="rect">
+            <a:avLst/>
+          </a:prstGeom>
+          <a:noFill/>
+        </p:spPr>
+        <p:txBody>
+          <a:bodyPr wrap="square" lIns="0" rIns="0" tIns="0" bIns="0">
+            <a:noAutofit/>
+          </a:bodyPr>
+          <a:lstStyle/>
+          <a:p>
+            <a:pPr algn="l">
+              <a:lnSpc>
+                <a:spcPct val="119000"/>
+              </a:lnSpc>
+              <a:spcBef>
+                <a:spcPts val="0"/>
+              </a:spcBef>
+              <a:spcAft>
+                <a:spcPts val="0"/>
+              </a:spcAft>
+              <a:buNone/>
+              <a:defRPr sz="1900" b="0">
+                <a:solidFill>
+                  <a:srgbClr val="303437"/>
+                </a:solidFill>
+                <a:latin typeface="Noto Sans"/>
+              </a:defRPr>
+            </a:pPr>
+            <a:r>
+              <a:rPr sz="1900" b="0" lang="ja-JP" altLang="en-US">
+                <a:solidFill>
+                  <a:srgbClr val="303437"/>
+                </a:solidFill>
+                <a:latin typeface="Noto Sans"/>
+                <a:ea typeface="Noto Sans CJK JP"/>
+                <a:cs typeface="Noto Sans"/>
+              </a:rPr>
+              <a:t>最大長を求め、その長さを持つ最初の文字列を返す。</a:t>
+            </a:r>
+          </a:p>
+        </p:txBody>
+      </p:sp>
+      <p:sp>
+        <p:nvSpPr>
+          <p:cNvPr id="7" name="sources"/>
           <p:cNvSpPr txBox="1"/>
           <p:nvPr/>
         </p:nvSpPr>
@@ -26730,7 +27544,7 @@
                 <a:ea typeface="Noto Sans CJK JP"/>
                 <a:cs typeface="Noto Sans"/>
               </a:rPr>
-              <a:t>[1] OpenAI. HumanEval.jsonl.gz. 改訂b9453e8。 HumanEval/12。入出力例は日本語訳とともに掲載。</a:t>
+              <a:t>[1] OpenAI. HumanEval.jsonl.gz. 改訂b9453e8。 HumanEval/12。#以降は期待する返り値。</a:t>
             </a:r>
           </a:p>
           <a:p>
@@ -26791,38 +27605,38 @@
         </p:nvSpPr>
         <p:spPr>
           <a:xfrm>
-            <a:off x="468172" y="650138"/>
-            <a:ext cx="8206740" cy="616305"/>
+            <a:off x="548640" y="2506875"/>
+            <a:ext cx="8046720" cy="585216"/>
           </a:xfrm>
         </p:spPr>
         <p:txBody>
-          <a:bodyPr wrap="square" lIns="0" rIns="0" tIns="0" bIns="0">
+          <a:bodyPr wrap="square" lIns="0" rIns="0" tIns="0" bIns="0" anchor="ctr">
             <a:noAutofit/>
           </a:bodyPr>
           <a:lstStyle/>
           <a:p>
-            <a:pPr algn="l">
+            <a:pPr algn="ctr">
               <a:lnSpc>
                 <a:spcPct val="110000"/>
               </a:lnSpc>
               <a:buNone/>
-              <a:defRPr sz="2800" b="0">
-                <a:solidFill>
-                  <a:srgbClr val="303437"/>
-                </a:solidFill>
-                <a:latin typeface="Noto Sans"/>
-              </a:defRPr>
-            </a:pPr>
-            <a:r>
-              <a:rPr sz="2800" b="1" lang="ja-JP" altLang="en-US">
-                <a:solidFill>
-                  <a:srgbClr val="303437"/>
-                </a:solidFill>
-                <a:latin typeface="Noto Sans"/>
-                <a:ea typeface="Noto Sans CJK JP"/>
-                <a:cs typeface="Noto Sans"/>
-              </a:rPr>
-              <a:t>追加例10：日本語訳と入出力例</a:t>
+              <a:defRPr sz="3600" b="0">
+                <a:solidFill>
+                  <a:srgbClr val="303437"/>
+                </a:solidFill>
+                <a:latin typeface="Noto Sans"/>
+              </a:defRPr>
+            </a:pPr>
+            <a:r>
+              <a:rPr sz="3600" b="1" lang="ja-JP" altLang="en-US">
+                <a:solidFill>
+                  <a:srgbClr val="303437"/>
+                </a:solidFill>
+                <a:latin typeface="Noto Sans"/>
+                <a:ea typeface="Noto Sans CJK JP"/>
+                <a:cs typeface="Noto Sans"/>
+              </a:rPr>
+              <a:t>2. 入力と参照実装の集計</a:t>
             </a:r>
           </a:p>
         </p:txBody>
@@ -26870,362 +27684,7 @@
                 <a:ea typeface="Noto Sans CJK JP"/>
                 <a:cs typeface="Noto Sans"/>
               </a:rPr>
-              <a:t>Appendix: 1. 仕様の異なる追加10例</a:t>
-            </a:r>
-          </a:p>
-        </p:txBody>
-      </p:sp>
-      <p:sp>
-        <p:nvSpPr>
-          <p:cNvPr id="4" name="TextBox 3"/>
-          <p:cNvSpPr txBox="1"/>
-          <p:nvPr/>
-        </p:nvSpPr>
-        <p:spPr>
-          <a:xfrm>
-            <a:off x="594360" y="1508760"/>
-            <a:ext cx="7955279" cy="659383"/>
-          </a:xfrm>
-          <a:prstGeom prst="rect">
-            <a:avLst/>
-          </a:prstGeom>
-          <a:noFill/>
-        </p:spPr>
-        <p:txBody>
-          <a:bodyPr wrap="square" lIns="0" rIns="0" tIns="0" bIns="0">
-            <a:noAutofit/>
-          </a:bodyPr>
-          <a:lstStyle/>
-          <a:p>
-            <a:pPr algn="l">
-              <a:lnSpc>
-                <a:spcPct val="119000"/>
-              </a:lnSpc>
-              <a:spcBef>
-                <a:spcPts val="0"/>
-              </a:spcBef>
-              <a:spcAft>
-                <a:spcPts val="0"/>
-              </a:spcAft>
-              <a:buNone/>
-              <a:defRPr sz="2000" b="0">
-                <a:solidFill>
-                  <a:srgbClr val="303437"/>
-                </a:solidFill>
-                <a:latin typeface="Noto Sans"/>
-              </a:defRPr>
-            </a:pPr>
-            <a:r>
-              <a:rPr sz="2000" b="0" lang="ja-JP" altLang="en-US">
-                <a:solidFill>
-                  <a:srgbClr val="303437"/>
-                </a:solidFill>
-                <a:latin typeface="Noto Sans"/>
-                <a:ea typeface="Noto Sans CJK JP"/>
-                <a:cs typeface="Noto Sans"/>
-              </a:rPr>
-              <a:t>文字列リストで最も長い要素を返す。同じ長さなら先に現れたものを選び、空リストならNoneを返す。</a:t>
-            </a:r>
-          </a:p>
-        </p:txBody>
-      </p:sp>
-      <p:sp>
-        <p:nvSpPr>
-          <p:cNvPr id="5" name="code-frame"/>
-          <p:cNvSpPr/>
-          <p:nvPr/>
-        </p:nvSpPr>
-        <p:spPr>
-          <a:xfrm>
-            <a:off x="548640" y="2314448"/>
-            <a:ext cx="8046720" cy="1342135"/>
-          </a:xfrm>
-          <a:prstGeom prst="rect">
-            <a:avLst/>
-          </a:prstGeom>
-          <a:solidFill>
-            <a:srgbClr val="EBEDEB"/>
-          </a:solidFill>
-          <a:ln>
-            <a:noFill/>
-          </a:ln>
-          <a:effectLst/>
-        </p:spPr>
-        <p:style>
-          <a:lnRef idx="1">
-            <a:schemeClr val="accent1"/>
-          </a:lnRef>
-          <a:fillRef idx="3">
-            <a:schemeClr val="accent1"/>
-          </a:fillRef>
-          <a:effectRef idx="0">
-            <a:schemeClr val="accent1"/>
-          </a:effectRef>
-          <a:fontRef idx="minor">
-            <a:schemeClr val="lt1"/>
-          </a:fontRef>
-        </p:style>
-        <p:txBody>
-          <a:bodyPr rtlCol="0" anchor="ctr" wrap="none" lIns="152400" rIns="152400" tIns="101600" bIns="127000">
-            <a:noAutofit/>
-          </a:bodyPr>
-          <a:lstStyle/>
-          <a:p>
-            <a:pPr algn="l">
-              <a:lnSpc>
-                <a:spcPts val="2142"/>
-              </a:lnSpc>
-              <a:spcBef>
-                <a:spcPts val="0"/>
-              </a:spcBef>
-              <a:spcAft>
-                <a:spcPts val="0"/>
-              </a:spcAft>
-              <a:buNone/>
-              <a:defRPr sz="1800" b="0">
-                <a:solidFill>
-                  <a:srgbClr val="303437"/>
-                </a:solidFill>
-                <a:latin typeface="Noto Sans"/>
-              </a:defRPr>
-            </a:pPr>
-            <a:r>
-              <a:rPr sz="1800" b="0" lang="ja-JP" altLang="en-US">
-                <a:solidFill>
-                  <a:srgbClr val="303437"/>
-                </a:solidFill>
-                <a:latin typeface="Liberation Mono"/>
-                <a:ea typeface="Noto Sans CJK JP"/>
-                <a:cs typeface="Liberation Mono"/>
-              </a:rPr>
-              <a:t>longest(['a', 'bb', 'cc'])</a:t>
-            </a:r>
-          </a:p>
-          <a:p>
-            <a:pPr algn="l">
-              <a:lnSpc>
-                <a:spcPts val="2142"/>
-              </a:lnSpc>
-              <a:spcBef>
-                <a:spcPts val="0"/>
-              </a:spcBef>
-              <a:spcAft>
-                <a:spcPts val="0"/>
-              </a:spcAft>
-              <a:buNone/>
-              <a:defRPr sz="1800" b="0">
-                <a:solidFill>
-                  <a:srgbClr val="303437"/>
-                </a:solidFill>
-                <a:latin typeface="Noto Sans"/>
-              </a:defRPr>
-            </a:pPr>
-            <a:r>
-              <a:rPr sz="1800" b="0" lang="ja-JP" altLang="en-US">
-                <a:solidFill>
-                  <a:srgbClr val="303437"/>
-                </a:solidFill>
-                <a:latin typeface="Liberation Mono"/>
-                <a:ea typeface="Noto Sans CJK JP"/>
-                <a:cs typeface="Liberation Mono"/>
-              </a:rPr>
-              <a:t># 'bb'</a:t>
-            </a:r>
-          </a:p>
-          <a:p>
-            <a:pPr algn="l">
-              <a:lnSpc>
-                <a:spcPts val="2142"/>
-              </a:lnSpc>
-              <a:spcBef>
-                <a:spcPts val="0"/>
-              </a:spcBef>
-              <a:spcAft>
-                <a:spcPts val="0"/>
-              </a:spcAft>
-              <a:buNone/>
-              <a:defRPr sz="1800" b="0">
-                <a:solidFill>
-                  <a:srgbClr val="303437"/>
-                </a:solidFill>
-                <a:latin typeface="Noto Sans"/>
-              </a:defRPr>
-            </a:pPr>
-            <a:r>
-              <a:rPr sz="1800" b="0" lang="ja-JP" altLang="en-US">
-                <a:solidFill>
-                  <a:srgbClr val="303437"/>
-                </a:solidFill>
-                <a:latin typeface="Liberation Mono"/>
-                <a:ea typeface="Noto Sans CJK JP"/>
-                <a:cs typeface="Liberation Mono"/>
-              </a:rPr>
-              <a:t>longest([])</a:t>
-            </a:r>
-          </a:p>
-          <a:p>
-            <a:pPr algn="l">
-              <a:lnSpc>
-                <a:spcPts val="2142"/>
-              </a:lnSpc>
-              <a:spcBef>
-                <a:spcPts val="0"/>
-              </a:spcBef>
-              <a:spcAft>
-                <a:spcPts val="0"/>
-              </a:spcAft>
-              <a:buNone/>
-              <a:defRPr sz="1800" b="0">
-                <a:solidFill>
-                  <a:srgbClr val="303437"/>
-                </a:solidFill>
-                <a:latin typeface="Noto Sans"/>
-              </a:defRPr>
-            </a:pPr>
-            <a:r>
-              <a:rPr sz="1800" b="0" lang="ja-JP" altLang="en-US">
-                <a:solidFill>
-                  <a:srgbClr val="303437"/>
-                </a:solidFill>
-                <a:latin typeface="Liberation Mono"/>
-                <a:ea typeface="Noto Sans CJK JP"/>
-                <a:cs typeface="Liberation Mono"/>
-              </a:rPr>
-              <a:t># None</a:t>
-            </a:r>
-          </a:p>
-        </p:txBody>
-      </p:sp>
-      <p:sp>
-        <p:nvSpPr>
-          <p:cNvPr id="6" name="TextBox 5"/>
-          <p:cNvSpPr txBox="1"/>
-          <p:nvPr/>
-        </p:nvSpPr>
-        <p:spPr>
-          <a:xfrm>
-            <a:off x="594360" y="3821175"/>
-            <a:ext cx="7955279" cy="342011"/>
-          </a:xfrm>
-          <a:prstGeom prst="rect">
-            <a:avLst/>
-          </a:prstGeom>
-          <a:noFill/>
-        </p:spPr>
-        <p:txBody>
-          <a:bodyPr wrap="square" lIns="0" rIns="0" tIns="0" bIns="0">
-            <a:noAutofit/>
-          </a:bodyPr>
-          <a:lstStyle/>
-          <a:p>
-            <a:pPr algn="l">
-              <a:lnSpc>
-                <a:spcPct val="119000"/>
-              </a:lnSpc>
-              <a:spcBef>
-                <a:spcPts val="0"/>
-              </a:spcBef>
-              <a:spcAft>
-                <a:spcPts val="0"/>
-              </a:spcAft>
-              <a:buNone/>
-              <a:defRPr sz="1900" b="0">
-                <a:solidFill>
-                  <a:srgbClr val="303437"/>
-                </a:solidFill>
-                <a:latin typeface="Noto Sans"/>
-              </a:defRPr>
-            </a:pPr>
-            <a:r>
-              <a:rPr sz="1900" b="0" lang="ja-JP" altLang="en-US">
-                <a:solidFill>
-                  <a:srgbClr val="303437"/>
-                </a:solidFill>
-                <a:latin typeface="Noto Sans"/>
-                <a:ea typeface="Noto Sans CJK JP"/>
-                <a:cs typeface="Noto Sans"/>
-              </a:rPr>
-              <a:t>最大長を求め、その長さを持つ最初の文字列を返す。</a:t>
-            </a:r>
-          </a:p>
-        </p:txBody>
-      </p:sp>
-      <p:sp>
-        <p:nvSpPr>
-          <p:cNvPr id="7" name="sources"/>
-          <p:cNvSpPr txBox="1"/>
-          <p:nvPr/>
-        </p:nvSpPr>
-        <p:spPr>
-          <a:xfrm>
-            <a:off x="502920" y="4700016"/>
-            <a:ext cx="8183879" cy="530352"/>
-          </a:xfrm>
-          <a:prstGeom prst="rect">
-            <a:avLst/>
-          </a:prstGeom>
-          <a:noFill/>
-        </p:spPr>
-        <p:txBody>
-          <a:bodyPr wrap="square" lIns="0" rIns="0" tIns="0" bIns="0">
-            <a:noAutofit/>
-          </a:bodyPr>
-          <a:lstStyle/>
-          <a:p>
-            <a:pPr algn="l">
-              <a:lnSpc>
-                <a:spcPts val="940"/>
-              </a:lnSpc>
-              <a:spcBef>
-                <a:spcPts val="0"/>
-              </a:spcBef>
-              <a:spcAft>
-                <a:spcPts val="140"/>
-              </a:spcAft>
-              <a:buNone/>
-              <a:defRPr sz="810" b="0">
-                <a:solidFill>
-                  <a:srgbClr val="303437"/>
-                </a:solidFill>
-                <a:latin typeface="Noto Sans"/>
-              </a:defRPr>
-            </a:pPr>
-            <a:r>
-              <a:rPr sz="810" b="0" lang="ja-JP" altLang="en-US">
-                <a:solidFill>
-                  <a:srgbClr val="626669"/>
-                </a:solidFill>
-                <a:latin typeface="Noto Sans"/>
-                <a:ea typeface="Noto Sans CJK JP"/>
-                <a:cs typeface="Noto Sans"/>
-              </a:rPr>
-              <a:t>[1] OpenAI. HumanEval.jsonl.gz. 改訂b9453e8。 HumanEval/12。#以降は期待する返り値。</a:t>
-            </a:r>
-          </a:p>
-          <a:p>
-            <a:pPr>
-              <a:lnSpc>
-                <a:spcPts val="940"/>
-              </a:lnSpc>
-              <a:buNone/>
-              <a:defRPr sz="810" b="0">
-                <a:solidFill>
-                  <a:srgbClr val="303437"/>
-                </a:solidFill>
-                <a:latin typeface="Noto Sans"/>
-              </a:defRPr>
-            </a:pPr>
-            <a:r>
-              <a:rPr sz="810" b="0" lang="ja-JP" altLang="en-US">
-                <a:solidFill>
-                  <a:srgbClr val="626669"/>
-                </a:solidFill>
-                <a:latin typeface="Noto Sans"/>
-                <a:ea typeface="Noto Sans CJK JP"/>
-                <a:cs typeface="Noto Sans"/>
-                <a:hlinkClick r:id="rId2"/>
-              </a:rPr>
-              <a:t>https://github.com/openai/human-eval/blob/b9453e8/data/HumanEval.jsonl.gz</a:t>
+              <a:t>Appendix: 2. 入力と参照実装の集計</a:t>
             </a:r>
           </a:p>
         </p:txBody>
@@ -27239,120 +27698,6 @@
 </file>
 
 <file path=ppt/slides/slide56.xml><?xml version="1.0" encoding="utf-8"?>
-<p:sld xmlns:a="http://schemas.openxmlformats.org/drawingml/2006/main" xmlns:p="http://schemas.openxmlformats.org/presentationml/2006/main" xmlns:r="http://schemas.openxmlformats.org/officeDocument/2006/relationships">
-  <p:cSld>
-    <p:spTree>
-      <p:nvGrpSpPr>
-        <p:cNvPr id="1" name=""/>
-        <p:cNvGrpSpPr/>
-        <p:nvPr/>
-      </p:nvGrpSpPr>
-      <p:grpSpPr/>
-      <p:sp>
-        <p:nvSpPr>
-          <p:cNvPr id="2" name="Title 1"/>
-          <p:cNvSpPr>
-            <a:spLocks noGrp="1"/>
-          </p:cNvSpPr>
-          <p:nvPr>
-            <p:ph type="title"/>
-          </p:nvPr>
-        </p:nvSpPr>
-        <p:spPr>
-          <a:xfrm>
-            <a:off x="548640" y="2506875"/>
-            <a:ext cx="8046720" cy="585216"/>
-          </a:xfrm>
-        </p:spPr>
-        <p:txBody>
-          <a:bodyPr wrap="square" lIns="0" rIns="0" tIns="0" bIns="0" anchor="ctr">
-            <a:noAutofit/>
-          </a:bodyPr>
-          <a:lstStyle/>
-          <a:p>
-            <a:pPr algn="ctr">
-              <a:lnSpc>
-                <a:spcPct val="110000"/>
-              </a:lnSpc>
-              <a:buNone/>
-              <a:defRPr sz="3600" b="0">
-                <a:solidFill>
-                  <a:srgbClr val="303437"/>
-                </a:solidFill>
-                <a:latin typeface="Noto Sans"/>
-              </a:defRPr>
-            </a:pPr>
-            <a:r>
-              <a:rPr sz="3600" b="1" lang="ja-JP" altLang="en-US">
-                <a:solidFill>
-                  <a:srgbClr val="303437"/>
-                </a:solidFill>
-                <a:latin typeface="Noto Sans"/>
-                <a:ea typeface="Noto Sans CJK JP"/>
-                <a:cs typeface="Noto Sans"/>
-              </a:rPr>
-              <a:t>2. 入力と参照実装の集計</a:t>
-            </a:r>
-          </a:p>
-        </p:txBody>
-      </p:sp>
-      <p:sp>
-        <p:nvSpPr>
-          <p:cNvPr id="3" name="Title 2"/>
-          <p:cNvSpPr>
-            <a:spLocks noGrp="1"/>
-          </p:cNvSpPr>
-          <p:nvPr>
-            <p:ph type="title" idx="2"/>
-          </p:nvPr>
-        </p:nvSpPr>
-        <p:spPr>
-          <a:xfrm>
-            <a:off x="75895" y="0"/>
-            <a:ext cx="8115300" cy="480060"/>
-          </a:xfrm>
-        </p:spPr>
-        <p:txBody>
-          <a:bodyPr wrap="square" lIns="0" rIns="0" tIns="0" bIns="0" anchor="ctr">
-            <a:noAutofit/>
-          </a:bodyPr>
-          <a:lstStyle/>
-          <a:p>
-            <a:pPr algn="l">
-              <a:lnSpc>
-                <a:spcPct val="110000"/>
-              </a:lnSpc>
-              <a:buNone/>
-              <a:defRPr sz="1400" b="0">
-                <a:solidFill>
-                  <a:srgbClr val="303437"/>
-                </a:solidFill>
-                <a:latin typeface="Noto Sans"/>
-              </a:defRPr>
-            </a:pPr>
-            <a:r>
-              <a:rPr sz="1400" b="1" lang="ja-JP" altLang="en-US">
-                <a:solidFill>
-                  <a:srgbClr val="FFFEF8"/>
-                </a:solidFill>
-                <a:latin typeface="Noto Sans"/>
-                <a:ea typeface="Noto Sans CJK JP"/>
-                <a:cs typeface="Noto Sans"/>
-              </a:rPr>
-              <a:t>Appendix: 2. 入力と参照実装の集計</a:t>
-            </a:r>
-          </a:p>
-        </p:txBody>
-      </p:sp>
-    </p:spTree>
-  </p:cSld>
-  <p:clrMapOvr>
-    <a:masterClrMapping/>
-  </p:clrMapOvr>
-</p:sld>
-</file>
-
-<file path=ppt/slides/slide57.xml><?xml version="1.0" encoding="utf-8"?>
 <p:sld xmlns:a="http://schemas.openxmlformats.org/drawingml/2006/main" xmlns:p="http://schemas.openxmlformats.org/presentationml/2006/main" xmlns:r="http://schemas.openxmlformats.org/officeDocument/2006/relationships">
   <p:cSld>
     <p:spTree>
@@ -28203,7 +28548,7 @@
 </p:sld>
 </file>
 
-<file path=ppt/slides/slide58.xml><?xml version="1.0" encoding="utf-8"?>
+<file path=ppt/slides/slide57.xml><?xml version="1.0" encoding="utf-8"?>
 <p:sld xmlns:a="http://schemas.openxmlformats.org/drawingml/2006/main" xmlns:p="http://schemas.openxmlformats.org/presentationml/2006/main" xmlns:r="http://schemas.openxmlformats.org/officeDocument/2006/relationships">
   <p:cSld>
     <p:spTree>
@@ -28466,7 +28811,7 @@
 </p:sld>
 </file>
 
-<file path=ppt/slides/slide59.xml><?xml version="1.0" encoding="utf-8"?>
+<file path=ppt/slides/slide58.xml><?xml version="1.0" encoding="utf-8"?>
 <p:sld xmlns:a="http://schemas.openxmlformats.org/drawingml/2006/main" xmlns:p="http://schemas.openxmlformats.org/presentationml/2006/main" xmlns:r="http://schemas.openxmlformats.org/officeDocument/2006/relationships">
   <p:cSld>
     <p:spTree>
@@ -29269,6 +29614,120 @@
 </p:sld>
 </file>
 
+<file path=ppt/slides/slide59.xml><?xml version="1.0" encoding="utf-8"?>
+<p:sld xmlns:a="http://schemas.openxmlformats.org/drawingml/2006/main" xmlns:p="http://schemas.openxmlformats.org/presentationml/2006/main" xmlns:r="http://schemas.openxmlformats.org/officeDocument/2006/relationships">
+  <p:cSld>
+    <p:spTree>
+      <p:nvGrpSpPr>
+        <p:cNvPr id="1" name=""/>
+        <p:cNvGrpSpPr/>
+        <p:nvPr/>
+      </p:nvGrpSpPr>
+      <p:grpSpPr/>
+      <p:sp>
+        <p:nvSpPr>
+          <p:cNvPr id="2" name="Title 1"/>
+          <p:cNvSpPr>
+            <a:spLocks noGrp="1"/>
+          </p:cNvSpPr>
+          <p:nvPr>
+            <p:ph type="title"/>
+          </p:nvPr>
+        </p:nvSpPr>
+        <p:spPr>
+          <a:xfrm>
+            <a:off x="548640" y="2506875"/>
+            <a:ext cx="8046720" cy="585216"/>
+          </a:xfrm>
+        </p:spPr>
+        <p:txBody>
+          <a:bodyPr wrap="square" lIns="0" rIns="0" tIns="0" bIns="0" anchor="ctr">
+            <a:noAutofit/>
+          </a:bodyPr>
+          <a:lstStyle/>
+          <a:p>
+            <a:pPr algn="ctr">
+              <a:lnSpc>
+                <a:spcPct val="110000"/>
+              </a:lnSpc>
+              <a:buNone/>
+              <a:defRPr sz="3600" b="0">
+                <a:solidFill>
+                  <a:srgbClr val="303437"/>
+                </a:solidFill>
+                <a:latin typeface="Noto Sans"/>
+              </a:defRPr>
+            </a:pPr>
+            <a:r>
+              <a:rPr sz="3600" b="1" lang="ja-JP" altLang="en-US">
+                <a:solidFill>
+                  <a:srgbClr val="303437"/>
+                </a:solidFill>
+                <a:latin typeface="Noto Sans"/>
+                <a:ea typeface="Noto Sans CJK JP"/>
+                <a:cs typeface="Noto Sans"/>
+              </a:rPr>
+              <a:t>3. 研究と参考文献</a:t>
+            </a:r>
+          </a:p>
+        </p:txBody>
+      </p:sp>
+      <p:sp>
+        <p:nvSpPr>
+          <p:cNvPr id="3" name="Title 2"/>
+          <p:cNvSpPr>
+            <a:spLocks noGrp="1"/>
+          </p:cNvSpPr>
+          <p:nvPr>
+            <p:ph type="title" idx="2"/>
+          </p:nvPr>
+        </p:nvSpPr>
+        <p:spPr>
+          <a:xfrm>
+            <a:off x="75895" y="0"/>
+            <a:ext cx="8115300" cy="480060"/>
+          </a:xfrm>
+        </p:spPr>
+        <p:txBody>
+          <a:bodyPr wrap="square" lIns="0" rIns="0" tIns="0" bIns="0" anchor="ctr">
+            <a:noAutofit/>
+          </a:bodyPr>
+          <a:lstStyle/>
+          <a:p>
+            <a:pPr algn="l">
+              <a:lnSpc>
+                <a:spcPct val="110000"/>
+              </a:lnSpc>
+              <a:buNone/>
+              <a:defRPr sz="1400" b="0">
+                <a:solidFill>
+                  <a:srgbClr val="303437"/>
+                </a:solidFill>
+                <a:latin typeface="Noto Sans"/>
+              </a:defRPr>
+            </a:pPr>
+            <a:r>
+              <a:rPr sz="1400" b="1" lang="ja-JP" altLang="en-US">
+                <a:solidFill>
+                  <a:srgbClr val="FFFEF8"/>
+                </a:solidFill>
+                <a:latin typeface="Noto Sans"/>
+                <a:ea typeface="Noto Sans CJK JP"/>
+                <a:cs typeface="Noto Sans"/>
+              </a:rPr>
+              <a:t>Appendix: 3. 研究と参考文献</a:t>
+            </a:r>
+          </a:p>
+        </p:txBody>
+      </p:sp>
+    </p:spTree>
+  </p:cSld>
+  <p:clrMapOvr>
+    <a:masterClrMapping/>
+  </p:clrMapOvr>
+</p:sld>
+</file>
+
 <file path=ppt/slides/slide6.xml><?xml version="1.0" encoding="utf-8"?>
 <p:sld xmlns:a="http://schemas.openxmlformats.org/drawingml/2006/main" xmlns:p="http://schemas.openxmlformats.org/presentationml/2006/main" xmlns:r="http://schemas.openxmlformats.org/officeDocument/2006/relationships">
   <p:cSld>
@@ -30040,45 +30499,158 @@
         </p:nvSpPr>
         <p:spPr>
           <a:xfrm>
-            <a:off x="548640" y="2506875"/>
-            <a:ext cx="8046720" cy="585216"/>
+            <a:off x="468172" y="650138"/>
+            <a:ext cx="8206740" cy="616305"/>
           </a:xfrm>
         </p:spPr>
         <p:txBody>
-          <a:bodyPr wrap="square" lIns="0" rIns="0" tIns="0" bIns="0" anchor="ctr">
+          <a:bodyPr wrap="square" lIns="0" rIns="0" tIns="0" bIns="0">
             <a:noAutofit/>
           </a:bodyPr>
           <a:lstStyle/>
           <a:p>
-            <a:pPr algn="ctr">
+            <a:pPr algn="l">
               <a:lnSpc>
                 <a:spcPct val="110000"/>
               </a:lnSpc>
               <a:buNone/>
-              <a:defRPr sz="3600" b="0">
-                <a:solidFill>
-                  <a:srgbClr val="303437"/>
-                </a:solidFill>
-                <a:latin typeface="Noto Sans"/>
-              </a:defRPr>
-            </a:pPr>
-            <a:r>
-              <a:rPr sz="3600" b="1" lang="ja-JP" altLang="en-US">
-                <a:solidFill>
-                  <a:srgbClr val="303437"/>
-                </a:solidFill>
-                <a:latin typeface="Noto Sans"/>
-                <a:ea typeface="Noto Sans CJK JP"/>
-                <a:cs typeface="Noto Sans"/>
-              </a:rPr>
-              <a:t>3. 研究と参考文献</a:t>
+              <a:defRPr sz="2800" b="0">
+                <a:solidFill>
+                  <a:srgbClr val="303437"/>
+                </a:solidFill>
+                <a:latin typeface="Noto Sans"/>
+              </a:defRPr>
+            </a:pPr>
+            <a:r>
+              <a:rPr sz="2800" b="1" lang="ja-JP" altLang="en-US">
+                <a:solidFill>
+                  <a:srgbClr val="303437"/>
+                </a:solidFill>
+                <a:latin typeface="Noto Sans"/>
+                <a:ea typeface="Noto Sans CJK JP"/>
+                <a:cs typeface="Noto Sans"/>
+              </a:rPr>
+              <a:t>OpenAIがコード生成モデルと評価方法を提示した</a:t>
             </a:r>
           </a:p>
         </p:txBody>
       </p:sp>
       <p:sp>
         <p:nvSpPr>
-          <p:cNvPr id="3" name="Title 2"/>
+          <p:cNvPr id="3" name="Text Placeholder 2"/>
+          <p:cNvSpPr>
+            <a:spLocks noGrp="1"/>
+          </p:cNvSpPr>
+          <p:nvPr>
+            <p:ph type="body" idx="1"/>
+          </p:nvPr>
+        </p:nvSpPr>
+        <p:spPr>
+          <a:xfrm>
+            <a:off x="594360" y="1463040"/>
+            <a:ext cx="7955279" cy="3044952"/>
+          </a:xfrm>
+        </p:spPr>
+        <p:txBody>
+          <a:bodyPr wrap="square" tIns="91440" bIns="91440">
+            <a:noAutofit/>
+          </a:bodyPr>
+          <a:lstStyle/>
+          <a:p>
+            <a:pPr marL="457200" indent="-355600">
+              <a:lnSpc>
+                <a:spcPts val="2736"/>
+              </a:lnSpc>
+              <a:spcAft>
+                <a:spcPts val="700"/>
+              </a:spcAft>
+              <a:buSzPct val="57826"/>
+              <a:buFont typeface="Noto Sans CJK JP"/>
+              <a:buChar char="●"/>
+              <a:defRPr sz="2300" b="0">
+                <a:solidFill>
+                  <a:srgbClr val="303437"/>
+                </a:solidFill>
+                <a:latin typeface="Noto Sans"/>
+              </a:defRPr>
+            </a:pPr>
+            <a:r>
+              <a:rPr sz="2300" b="0" lang="ja-JP" altLang="en-US">
+                <a:solidFill>
+                  <a:srgbClr val="303437"/>
+                </a:solidFill>
+                <a:latin typeface="Noto Sans"/>
+                <a:ea typeface="Noto Sans CJK JP"/>
+                <a:cs typeface="Noto Sans"/>
+              </a:rPr>
+              <a:t>Mark Chen、Jerry TworekらのOpenAIの研究チームが、Codexと、その評価用のHumanEvalを発表した。</a:t>
+            </a:r>
+          </a:p>
+          <a:p>
+            <a:pPr marL="457200" indent="-355600">
+              <a:lnSpc>
+                <a:spcPts val="2736"/>
+              </a:lnSpc>
+              <a:spcAft>
+                <a:spcPts val="700"/>
+              </a:spcAft>
+              <a:buSzPct val="57826"/>
+              <a:buFont typeface="Noto Sans CJK JP"/>
+              <a:buChar char="●"/>
+              <a:defRPr sz="2300" b="0">
+                <a:solidFill>
+                  <a:srgbClr val="303437"/>
+                </a:solidFill>
+                <a:latin typeface="Noto Sans"/>
+              </a:defRPr>
+            </a:pPr>
+            <a:r>
+              <a:rPr sz="2300" b="0" lang="ja-JP" altLang="en-US">
+                <a:solidFill>
+                  <a:srgbClr val="303437"/>
+                </a:solidFill>
+                <a:latin typeface="Noto Sans"/>
+                <a:ea typeface="Noto Sans CJK JP"/>
+                <a:cs typeface="Noto Sans"/>
+              </a:rPr>
+              <a:t>評価では、手書きの問題、実行による正しさの判定、複数候補から成功率を推定するpass@kを組み合わせた。</a:t>
+            </a:r>
+          </a:p>
+          <a:p>
+            <a:pPr marL="457200" indent="-355600">
+              <a:lnSpc>
+                <a:spcPts val="2736"/>
+              </a:lnSpc>
+              <a:spcAft>
+                <a:spcPts val="0"/>
+              </a:spcAft>
+              <a:buSzPct val="57826"/>
+              <a:buFont typeface="Noto Sans CJK JP"/>
+              <a:buChar char="●"/>
+              <a:defRPr sz="2300" b="0">
+                <a:solidFill>
+                  <a:srgbClr val="303437"/>
+                </a:solidFill>
+                <a:latin typeface="Noto Sans"/>
+              </a:defRPr>
+            </a:pPr>
+            <a:r>
+              <a:rPr sz="2300" b="0" lang="ja-JP" altLang="en-US">
+                <a:solidFill>
+                  <a:srgbClr val="303437"/>
+                </a:solidFill>
+                <a:latin typeface="Noto Sans"/>
+                <a:ea typeface="Noto Sans CJK JP"/>
+                <a:cs typeface="Noto Sans"/>
+              </a:rPr>
+              <a:t>後続のEvalPlusはテストを強化し、同じ仕様に対する、より幅広い入力での正しさを調べる。</a:t>
+            </a:r>
+          </a:p>
+        </p:txBody>
+      </p:sp>
+      <p:sp>
+        <p:nvSpPr>
+          <p:cNvPr id="4" name="Title 3"/>
           <p:cNvSpPr>
             <a:spLocks noGrp="1"/>
           </p:cNvSpPr>
@@ -30120,6 +30692,83 @@
                 <a:cs typeface="Noto Sans"/>
               </a:rPr>
               <a:t>Appendix: 3. 研究と参考文献</a:t>
+            </a:r>
+          </a:p>
+        </p:txBody>
+      </p:sp>
+      <p:sp>
+        <p:nvSpPr>
+          <p:cNvPr id="5" name="sources"/>
+          <p:cNvSpPr txBox="1"/>
+          <p:nvPr/>
+        </p:nvSpPr>
+        <p:spPr>
+          <a:xfrm>
+            <a:off x="502920" y="4700016"/>
+            <a:ext cx="8183879" cy="530352"/>
+          </a:xfrm>
+          <a:prstGeom prst="rect">
+            <a:avLst/>
+          </a:prstGeom>
+          <a:noFill/>
+        </p:spPr>
+        <p:txBody>
+          <a:bodyPr wrap="square" lIns="0" rIns="0" tIns="0" bIns="0">
+            <a:noAutofit/>
+          </a:bodyPr>
+          <a:lstStyle/>
+          <a:p>
+            <a:pPr algn="l">
+              <a:lnSpc>
+                <a:spcPts val="940"/>
+              </a:lnSpc>
+              <a:spcBef>
+                <a:spcPts val="0"/>
+              </a:spcBef>
+              <a:spcAft>
+                <a:spcPts val="140"/>
+              </a:spcAft>
+              <a:buNone/>
+              <a:defRPr sz="810" b="0">
+                <a:solidFill>
+                  <a:srgbClr val="303437"/>
+                </a:solidFill>
+                <a:latin typeface="Noto Sans"/>
+              </a:defRPr>
+            </a:pPr>
+            <a:r>
+              <a:rPr sz="810" b="0" lang="ja-JP" altLang="en-US">
+                <a:solidFill>
+                  <a:srgbClr val="626669"/>
+                </a:solidFill>
+                <a:latin typeface="Noto Sans"/>
+                <a:ea typeface="Noto Sans CJK JP"/>
+                <a:cs typeface="Noto Sans"/>
+              </a:rPr>
+              <a:t>[1] Chen et al. (2021). Evaluating Large Language Models Trained on Code. arXiv:2107.03374.</a:t>
+            </a:r>
+            <a:r>
+              <a:rPr sz="810" b="0" lang="ja-JP" altLang="en-US">
+                <a:solidFill>
+                  <a:srgbClr val="626669"/>
+                </a:solidFill>
+                <a:latin typeface="Noto Sans"/>
+                <a:ea typeface="Noto Sans CJK JP"/>
+                <a:cs typeface="Noto Sans"/>
+              </a:rPr>
+              <a:t>  </a:t>
+            </a:r>
+            <a:r>
+              <a:rPr sz="810" b="0" lang="ja-JP" altLang="en-US">
+                <a:solidFill>
+                  <a:srgbClr val="626669"/>
+                </a:solidFill>
+                <a:latin typeface="Noto Sans"/>
+                <a:ea typeface="Noto Sans CJK JP"/>
+                <a:cs typeface="Noto Sans"/>
+                <a:hlinkClick r:id="rId2"/>
+              </a:rPr>
+              <a:t>https://arxiv.org/abs/2107.03374</a:t>
             </a:r>
           </a:p>
         </p:txBody>
@@ -30185,127 +30834,14 @@
                 <a:ea typeface="Noto Sans CJK JP"/>
                 <a:cs typeface="Noto Sans"/>
               </a:rPr>
-              <a:t>原著はコード生成モデルと評価方法を提示した</a:t>
+              <a:t>参考文献</a:t>
             </a:r>
           </a:p>
         </p:txBody>
       </p:sp>
       <p:sp>
         <p:nvSpPr>
-          <p:cNvPr id="3" name="Text Placeholder 2"/>
-          <p:cNvSpPr>
-            <a:spLocks noGrp="1"/>
-          </p:cNvSpPr>
-          <p:nvPr>
-            <p:ph type="body" idx="1"/>
-          </p:nvPr>
-        </p:nvSpPr>
-        <p:spPr>
-          <a:xfrm>
-            <a:off x="594360" y="1463040"/>
-            <a:ext cx="7955279" cy="3044952"/>
-          </a:xfrm>
-        </p:spPr>
-        <p:txBody>
-          <a:bodyPr wrap="square" tIns="91440" bIns="91440">
-            <a:noAutofit/>
-          </a:bodyPr>
-          <a:lstStyle/>
-          <a:p>
-            <a:pPr marL="457200" indent="-355600">
-              <a:lnSpc>
-                <a:spcPts val="2736"/>
-              </a:lnSpc>
-              <a:spcAft>
-                <a:spcPts val="700"/>
-              </a:spcAft>
-              <a:buSzPct val="57826"/>
-              <a:buFont typeface="Noto Sans CJK JP"/>
-              <a:buChar char="●"/>
-              <a:defRPr sz="2300" b="0">
-                <a:solidFill>
-                  <a:srgbClr val="303437"/>
-                </a:solidFill>
-                <a:latin typeface="Noto Sans"/>
-              </a:defRPr>
-            </a:pPr>
-            <a:r>
-              <a:rPr sz="2300" b="0" lang="ja-JP" altLang="en-US">
-                <a:solidFill>
-                  <a:srgbClr val="303437"/>
-                </a:solidFill>
-                <a:latin typeface="Noto Sans"/>
-                <a:ea typeface="Noto Sans CJK JP"/>
-                <a:cs typeface="Noto Sans"/>
-              </a:rPr>
-              <a:t>Mark Chen、Jerry TworekらのOpenAIの研究チームが、Codexと、その評価用のHumanEvalを発表した。</a:t>
-            </a:r>
-          </a:p>
-          <a:p>
-            <a:pPr marL="457200" indent="-355600">
-              <a:lnSpc>
-                <a:spcPts val="2736"/>
-              </a:lnSpc>
-              <a:spcAft>
-                <a:spcPts val="700"/>
-              </a:spcAft>
-              <a:buSzPct val="57826"/>
-              <a:buFont typeface="Noto Sans CJK JP"/>
-              <a:buChar char="●"/>
-              <a:defRPr sz="2300" b="0">
-                <a:solidFill>
-                  <a:srgbClr val="303437"/>
-                </a:solidFill>
-                <a:latin typeface="Noto Sans"/>
-              </a:defRPr>
-            </a:pPr>
-            <a:r>
-              <a:rPr sz="2300" b="0" lang="ja-JP" altLang="en-US">
-                <a:solidFill>
-                  <a:srgbClr val="303437"/>
-                </a:solidFill>
-                <a:latin typeface="Noto Sans"/>
-                <a:ea typeface="Noto Sans CJK JP"/>
-                <a:cs typeface="Noto Sans"/>
-              </a:rPr>
-              <a:t>原著は、手書きの問題、実行による正しさの判定、複数候補から成功率を推定するpass@kを組み合わせた。</a:t>
-            </a:r>
-          </a:p>
-          <a:p>
-            <a:pPr marL="457200" indent="-355600">
-              <a:lnSpc>
-                <a:spcPts val="2736"/>
-              </a:lnSpc>
-              <a:spcAft>
-                <a:spcPts val="0"/>
-              </a:spcAft>
-              <a:buSzPct val="57826"/>
-              <a:buFont typeface="Noto Sans CJK JP"/>
-              <a:buChar char="●"/>
-              <a:defRPr sz="2300" b="0">
-                <a:solidFill>
-                  <a:srgbClr val="303437"/>
-                </a:solidFill>
-                <a:latin typeface="Noto Sans"/>
-              </a:defRPr>
-            </a:pPr>
-            <a:r>
-              <a:rPr sz="2300" b="0" lang="ja-JP" altLang="en-US">
-                <a:solidFill>
-                  <a:srgbClr val="303437"/>
-                </a:solidFill>
-                <a:latin typeface="Noto Sans"/>
-                <a:ea typeface="Noto Sans CJK JP"/>
-                <a:cs typeface="Noto Sans"/>
-              </a:rPr>
-              <a:t>後続のEvalPlusはテストを強化し、同じ仕様に対する、より幅広い入力での正しさを調べる。</a:t>
-            </a:r>
-          </a:p>
-        </p:txBody>
-      </p:sp>
-      <p:sp>
-        <p:nvSpPr>
-          <p:cNvPr id="4" name="Title 3"/>
+          <p:cNvPr id="3" name="Title 2"/>
           <p:cNvSpPr>
             <a:spLocks noGrp="1"/>
           </p:cNvSpPr>
@@ -30353,14 +30889,14 @@
       </p:sp>
       <p:sp>
         <p:nvSpPr>
-          <p:cNvPr id="5" name="sources"/>
+          <p:cNvPr id="4" name="文献 1: Evaluating Large Language Models Trained on Code"/>
           <p:cNvSpPr txBox="1"/>
           <p:nvPr/>
         </p:nvSpPr>
         <p:spPr>
           <a:xfrm>
-            <a:off x="502920" y="4700016"/>
-            <a:ext cx="8183879" cy="530352"/>
+            <a:off x="548640" y="1463040"/>
+            <a:ext cx="8046720" cy="1157605"/>
           </a:xfrm>
           <a:prstGeom prst="rect">
             <a:avLst/>
@@ -30375,24 +30911,55 @@
           <a:p>
             <a:pPr algn="l">
               <a:lnSpc>
-                <a:spcPts val="940"/>
-              </a:lnSpc>
-              <a:spcBef>
-                <a:spcPts val="0"/>
-              </a:spcBef>
-              <a:spcAft>
-                <a:spcPts val="140"/>
-              </a:spcAft>
-              <a:buNone/>
-              <a:defRPr sz="810" b="0">
-                <a:solidFill>
-                  <a:srgbClr val="303437"/>
-                </a:solidFill>
-                <a:latin typeface="Noto Sans"/>
-              </a:defRPr>
-            </a:pPr>
-            <a:r>
-              <a:rPr sz="810" b="0" lang="ja-JP" altLang="en-US">
+                <a:spcPct val="114000"/>
+              </a:lnSpc>
+              <a:spcBef>
+                <a:spcPts val="0"/>
+              </a:spcBef>
+              <a:spcAft>
+                <a:spcPts val="400"/>
+              </a:spcAft>
+              <a:buNone/>
+              <a:defRPr sz="2000" b="0">
+                <a:solidFill>
+                  <a:srgbClr val="303437"/>
+                </a:solidFill>
+                <a:latin typeface="Noto Sans"/>
+              </a:defRPr>
+            </a:pPr>
+            <a:r>
+              <a:rPr sz="2000" b="1" lang="ja-JP" altLang="en-US">
+                <a:solidFill>
+                  <a:srgbClr val="303437"/>
+                </a:solidFill>
+                <a:latin typeface="Noto Sans"/>
+                <a:ea typeface="Noto Sans CJK JP"/>
+                <a:cs typeface="Noto Sans"/>
+              </a:rPr>
+              <a:t>Evaluating Large Language Models Trained on Code</a:t>
+            </a:r>
+          </a:p>
+          <a:p>
+            <a:pPr algn="l">
+              <a:lnSpc>
+                <a:spcPct val="114000"/>
+              </a:lnSpc>
+              <a:spcBef>
+                <a:spcPts val="0"/>
+              </a:spcBef>
+              <a:spcAft>
+                <a:spcPts val="500"/>
+              </a:spcAft>
+              <a:buNone/>
+              <a:defRPr sz="1350" b="0">
+                <a:solidFill>
+                  <a:srgbClr val="303437"/>
+                </a:solidFill>
+                <a:latin typeface="Noto Sans"/>
+              </a:defRPr>
+            </a:pPr>
+            <a:r>
+              <a:rPr sz="1350" b="0" lang="ja-JP" altLang="en-US">
                 <a:solidFill>
                   <a:srgbClr val="626669"/>
                 </a:solidFill>
@@ -30400,30 +30967,218 @@
                 <a:ea typeface="Noto Sans CJK JP"/>
                 <a:cs typeface="Noto Sans"/>
               </a:rPr>
-              <a:t>[1] Chen et al. (2021). Evaluating Large Language Models Trained on Code. arXiv:2107.03374.</a:t>
-            </a:r>
-            <a:r>
-              <a:rPr sz="810" b="0" lang="ja-JP" altLang="en-US">
+              <a:t>Chen et al. (2021). OpenAI. arXiv:2107.03374.</a:t>
+            </a:r>
+          </a:p>
+          <a:p>
+            <a:pPr algn="l">
+              <a:lnSpc>
+                <a:spcPct val="114000"/>
+              </a:lnSpc>
+              <a:spcBef>
+                <a:spcPts val="0"/>
+              </a:spcBef>
+              <a:spcAft>
+                <a:spcPts val="400"/>
+              </a:spcAft>
+              <a:buNone/>
+              <a:defRPr sz="1850" b="0">
+                <a:solidFill>
+                  <a:srgbClr val="303437"/>
+                </a:solidFill>
+                <a:latin typeface="Noto Sans"/>
+              </a:defRPr>
+            </a:pPr>
+            <a:r>
+              <a:rPr sz="1850" b="0" lang="ja-JP" altLang="en-US">
+                <a:solidFill>
+                  <a:srgbClr val="303437"/>
+                </a:solidFill>
+                <a:latin typeface="Noto Sans"/>
+                <a:ea typeface="Noto Sans CJK JP"/>
+                <a:cs typeface="Noto Sans"/>
+              </a:rPr>
+              <a:t>HumanEval、Codex、実行テスト、pass@kの定義と実験を示した論文。</a:t>
+            </a:r>
+          </a:p>
+          <a:p>
+            <a:pPr algn="l">
+              <a:lnSpc>
+                <a:spcPct val="114000"/>
+              </a:lnSpc>
+              <a:spcBef>
+                <a:spcPts val="0"/>
+              </a:spcBef>
+              <a:spcAft>
+                <a:spcPts val="0"/>
+              </a:spcAft>
+              <a:buNone/>
+              <a:defRPr sz="1150" b="0">
+                <a:solidFill>
+                  <a:srgbClr val="303437"/>
+                </a:solidFill>
+                <a:latin typeface="Noto Sans"/>
+              </a:defRPr>
+            </a:pPr>
+            <a:r>
+              <a:rPr sz="1150" b="0" lang="ja-JP" altLang="en-US">
                 <a:solidFill>
                   <a:srgbClr val="626669"/>
                 </a:solidFill>
                 <a:latin typeface="Noto Sans"/>
                 <a:ea typeface="Noto Sans CJK JP"/>
                 <a:cs typeface="Noto Sans"/>
-              </a:rPr>
-              <a:t>  </a:t>
-            </a:r>
-            <a:r>
-              <a:rPr sz="810" b="0" lang="ja-JP" altLang="en-US">
+                <a:hlinkClick r:id="rId2"/>
+              </a:rPr>
+              <a:t>https://arxiv.org/abs/2107.03374</a:t>
+            </a:r>
+          </a:p>
+        </p:txBody>
+      </p:sp>
+      <p:sp>
+        <p:nvSpPr>
+          <p:cNvPr id="5" name="文献 2: Qwen2.5-Coder Technical Report"/>
+          <p:cNvSpPr txBox="1"/>
+          <p:nvPr/>
+        </p:nvSpPr>
+        <p:spPr>
+          <a:xfrm>
+            <a:off x="548640" y="3131693"/>
+            <a:ext cx="8046720" cy="1425448"/>
+          </a:xfrm>
+          <a:prstGeom prst="rect">
+            <a:avLst/>
+          </a:prstGeom>
+          <a:noFill/>
+        </p:spPr>
+        <p:txBody>
+          <a:bodyPr wrap="square" lIns="0" rIns="0" tIns="0" bIns="0">
+            <a:noAutofit/>
+          </a:bodyPr>
+          <a:lstStyle/>
+          <a:p>
+            <a:pPr algn="l">
+              <a:lnSpc>
+                <a:spcPct val="114000"/>
+              </a:lnSpc>
+              <a:spcBef>
+                <a:spcPts val="0"/>
+              </a:spcBef>
+              <a:spcAft>
+                <a:spcPts val="400"/>
+              </a:spcAft>
+              <a:buNone/>
+              <a:defRPr sz="2000" b="0">
+                <a:solidFill>
+                  <a:srgbClr val="303437"/>
+                </a:solidFill>
+                <a:latin typeface="Noto Sans"/>
+              </a:defRPr>
+            </a:pPr>
+            <a:r>
+              <a:rPr sz="2000" b="1" lang="ja-JP" altLang="en-US">
+                <a:solidFill>
+                  <a:srgbClr val="303437"/>
+                </a:solidFill>
+                <a:latin typeface="Noto Sans"/>
+                <a:ea typeface="Noto Sans CJK JP"/>
+                <a:cs typeface="Noto Sans"/>
+              </a:rPr>
+              <a:t>Qwen2.5-Coder Technical Report</a:t>
+            </a:r>
+          </a:p>
+          <a:p>
+            <a:pPr algn="l">
+              <a:lnSpc>
+                <a:spcPct val="114000"/>
+              </a:lnSpc>
+              <a:spcBef>
+                <a:spcPts val="0"/>
+              </a:spcBef>
+              <a:spcAft>
+                <a:spcPts val="500"/>
+              </a:spcAft>
+              <a:buNone/>
+              <a:defRPr sz="1350" b="0">
+                <a:solidFill>
+                  <a:srgbClr val="303437"/>
+                </a:solidFill>
+                <a:latin typeface="Noto Sans"/>
+              </a:defRPr>
+            </a:pPr>
+            <a:r>
+              <a:rPr sz="1350" b="0" lang="ja-JP" altLang="en-US">
                 <a:solidFill>
                   <a:srgbClr val="626669"/>
                 </a:solidFill>
                 <a:latin typeface="Noto Sans"/>
                 <a:ea typeface="Noto Sans CJK JP"/>
                 <a:cs typeface="Noto Sans"/>
-                <a:hlinkClick r:id="rId2"/>
-              </a:rPr>
-              <a:t>https://arxiv.org/abs/2107.03374</a:t>
+              </a:rPr>
+              <a:t>Hui et al. (2024). arXiv:2409.12186.</a:t>
+            </a:r>
+          </a:p>
+          <a:p>
+            <a:pPr algn="l">
+              <a:lnSpc>
+                <a:spcPct val="114000"/>
+              </a:lnSpc>
+              <a:spcBef>
+                <a:spcPts val="0"/>
+              </a:spcBef>
+              <a:spcAft>
+                <a:spcPts val="400"/>
+              </a:spcAft>
+              <a:buNone/>
+              <a:defRPr sz="1850" b="0">
+                <a:solidFill>
+                  <a:srgbClr val="303437"/>
+                </a:solidFill>
+                <a:latin typeface="Noto Sans"/>
+              </a:defRPr>
+            </a:pPr>
+            <a:r>
+              <a:rPr sz="1850" b="0" lang="ja-JP" altLang="en-US">
+                <a:solidFill>
+                  <a:srgbClr val="303437"/>
+                </a:solidFill>
+                <a:latin typeface="Noto Sans"/>
+                <a:ea typeface="Noto Sans CJK JP"/>
+                <a:cs typeface="Noto Sans"/>
+              </a:rPr>
+              <a:t>2024年のコード生成モデルを、HumanEvalとHumanEval+などで比較する。</a:t>
+            </a:r>
+          </a:p>
+          <a:p>
+            <a:pPr algn="l">
+              <a:lnSpc>
+                <a:spcPct val="114000"/>
+              </a:lnSpc>
+              <a:spcBef>
+                <a:spcPts val="0"/>
+              </a:spcBef>
+              <a:spcAft>
+                <a:spcPts val="0"/>
+              </a:spcAft>
+              <a:buNone/>
+              <a:defRPr sz="1150" b="0">
+                <a:solidFill>
+                  <a:srgbClr val="303437"/>
+                </a:solidFill>
+                <a:latin typeface="Noto Sans"/>
+              </a:defRPr>
+            </a:pPr>
+            <a:r>
+              <a:rPr sz="1150" b="0" lang="ja-JP" altLang="en-US">
+                <a:solidFill>
+                  <a:srgbClr val="626669"/>
+                </a:solidFill>
+                <a:latin typeface="Noto Sans"/>
+                <a:ea typeface="Noto Sans CJK JP"/>
+                <a:cs typeface="Noto Sans"/>
+                <a:hlinkClick r:id="rId3"/>
+              </a:rPr>
+              <a:t>https://arxiv.org/abs/2409.12186</a:t>
             </a:r>
           </a:p>
         </p:txBody>
@@ -30544,14 +31299,14 @@
       </p:sp>
       <p:sp>
         <p:nvSpPr>
-          <p:cNvPr id="4" name="文献 1: Evaluating Large Language Models Trained on Code"/>
+          <p:cNvPr id="4" name="文献 1: Is Your Code Generated by ChatGPT Really Correct? Rigorous Evaluation of Large Language Models for Code Generation"/>
           <p:cNvSpPr txBox="1"/>
           <p:nvPr/>
         </p:nvSpPr>
         <p:spPr>
           <a:xfrm>
             <a:off x="548640" y="1463040"/>
-            <a:ext cx="8046720" cy="1157605"/>
+            <a:ext cx="8046720" cy="1403731"/>
           </a:xfrm>
           <a:prstGeom prst="rect">
             <a:avLst/>
@@ -30575,23 +31330,23 @@
                 <a:spcPts val="400"/>
               </a:spcAft>
               <a:buNone/>
-              <a:defRPr sz="2000" b="0">
-                <a:solidFill>
-                  <a:srgbClr val="303437"/>
-                </a:solidFill>
-                <a:latin typeface="Noto Sans"/>
-              </a:defRPr>
-            </a:pPr>
-            <a:r>
-              <a:rPr sz="2000" b="1" lang="ja-JP" altLang="en-US">
-                <a:solidFill>
-                  <a:srgbClr val="303437"/>
-                </a:solidFill>
-                <a:latin typeface="Noto Sans"/>
-                <a:ea typeface="Noto Sans CJK JP"/>
-                <a:cs typeface="Noto Sans"/>
-              </a:rPr>
-              <a:t>Evaluating Large Language Models Trained on Code</a:t>
+              <a:defRPr sz="1850" b="0">
+                <a:solidFill>
+                  <a:srgbClr val="303437"/>
+                </a:solidFill>
+                <a:latin typeface="Noto Sans"/>
+              </a:defRPr>
+            </a:pPr>
+            <a:r>
+              <a:rPr sz="1850" b="1" lang="ja-JP" altLang="en-US">
+                <a:solidFill>
+                  <a:srgbClr val="303437"/>
+                </a:solidFill>
+                <a:latin typeface="Noto Sans"/>
+                <a:ea typeface="Noto Sans CJK JP"/>
+                <a:cs typeface="Noto Sans"/>
+              </a:rPr>
+              <a:t>Is Your Code Generated by ChatGPT Really Correct? Rigorous Evaluation of Large Language Models for Code Generation</a:t>
             </a:r>
           </a:p>
           <a:p>
@@ -30622,7 +31377,7 @@
                 <a:ea typeface="Noto Sans CJK JP"/>
                 <a:cs typeface="Noto Sans"/>
               </a:rPr>
-              <a:t>Chen et al. (2021). OpenAI. arXiv:2107.03374.</a:t>
+              <a:t>Liu, Xia, Wang &amp; Zhang (2023). NeurIPS.</a:t>
             </a:r>
           </a:p>
           <a:p>
@@ -30653,7 +31408,7 @@
                 <a:ea typeface="Noto Sans CJK JP"/>
                 <a:cs typeface="Noto Sans"/>
               </a:rPr>
-              <a:t>HumanEval、Codex、実行テスト、pass@kの定義と実験を示した原著。</a:t>
+              <a:t>入力の拡充と参照実装の点検により、既存テストが見逃す誤りを調べる。</a:t>
             </a:r>
           </a:p>
           <a:p>
@@ -30685,155 +31440,7 @@
                 <a:cs typeface="Noto Sans"/>
                 <a:hlinkClick r:id="rId2"/>
               </a:rPr>
-              <a:t>https://arxiv.org/abs/2107.03374</a:t>
-            </a:r>
-          </a:p>
-        </p:txBody>
-      </p:sp>
-      <p:sp>
-        <p:nvSpPr>
-          <p:cNvPr id="5" name="文献 2: Qwen2.5-Coder Technical Report"/>
-          <p:cNvSpPr txBox="1"/>
-          <p:nvPr/>
-        </p:nvSpPr>
-        <p:spPr>
-          <a:xfrm>
-            <a:off x="548640" y="3131693"/>
-            <a:ext cx="8046720" cy="1425448"/>
-          </a:xfrm>
-          <a:prstGeom prst="rect">
-            <a:avLst/>
-          </a:prstGeom>
-          <a:noFill/>
-        </p:spPr>
-        <p:txBody>
-          <a:bodyPr wrap="square" lIns="0" rIns="0" tIns="0" bIns="0">
-            <a:noAutofit/>
-          </a:bodyPr>
-          <a:lstStyle/>
-          <a:p>
-            <a:pPr algn="l">
-              <a:lnSpc>
-                <a:spcPct val="114000"/>
-              </a:lnSpc>
-              <a:spcBef>
-                <a:spcPts val="0"/>
-              </a:spcBef>
-              <a:spcAft>
-                <a:spcPts val="400"/>
-              </a:spcAft>
-              <a:buNone/>
-              <a:defRPr sz="2000" b="0">
-                <a:solidFill>
-                  <a:srgbClr val="303437"/>
-                </a:solidFill>
-                <a:latin typeface="Noto Sans"/>
-              </a:defRPr>
-            </a:pPr>
-            <a:r>
-              <a:rPr sz="2000" b="1" lang="ja-JP" altLang="en-US">
-                <a:solidFill>
-                  <a:srgbClr val="303437"/>
-                </a:solidFill>
-                <a:latin typeface="Noto Sans"/>
-                <a:ea typeface="Noto Sans CJK JP"/>
-                <a:cs typeface="Noto Sans"/>
-              </a:rPr>
-              <a:t>Qwen2.5-Coder Technical Report</a:t>
-            </a:r>
-          </a:p>
-          <a:p>
-            <a:pPr algn="l">
-              <a:lnSpc>
-                <a:spcPct val="114000"/>
-              </a:lnSpc>
-              <a:spcBef>
-                <a:spcPts val="0"/>
-              </a:spcBef>
-              <a:spcAft>
-                <a:spcPts val="500"/>
-              </a:spcAft>
-              <a:buNone/>
-              <a:defRPr sz="1350" b="0">
-                <a:solidFill>
-                  <a:srgbClr val="303437"/>
-                </a:solidFill>
-                <a:latin typeface="Noto Sans"/>
-              </a:defRPr>
-            </a:pPr>
-            <a:r>
-              <a:rPr sz="1350" b="0" lang="ja-JP" altLang="en-US">
-                <a:solidFill>
-                  <a:srgbClr val="626669"/>
-                </a:solidFill>
-                <a:latin typeface="Noto Sans"/>
-                <a:ea typeface="Noto Sans CJK JP"/>
-                <a:cs typeface="Noto Sans"/>
-              </a:rPr>
-              <a:t>Hui et al. (2024). arXiv:2409.12186.</a:t>
-            </a:r>
-          </a:p>
-          <a:p>
-            <a:pPr algn="l">
-              <a:lnSpc>
-                <a:spcPct val="114000"/>
-              </a:lnSpc>
-              <a:spcBef>
-                <a:spcPts val="0"/>
-              </a:spcBef>
-              <a:spcAft>
-                <a:spcPts val="400"/>
-              </a:spcAft>
-              <a:buNone/>
-              <a:defRPr sz="1850" b="0">
-                <a:solidFill>
-                  <a:srgbClr val="303437"/>
-                </a:solidFill>
-                <a:latin typeface="Noto Sans"/>
-              </a:defRPr>
-            </a:pPr>
-            <a:r>
-              <a:rPr sz="1850" b="0" lang="ja-JP" altLang="en-US">
-                <a:solidFill>
-                  <a:srgbClr val="303437"/>
-                </a:solidFill>
-                <a:latin typeface="Noto Sans"/>
-                <a:ea typeface="Noto Sans CJK JP"/>
-                <a:cs typeface="Noto Sans"/>
-              </a:rPr>
-              <a:t>2024年のコード生成モデルを、HumanEvalとHumanEval+などで比較する。</a:t>
-            </a:r>
-          </a:p>
-          <a:p>
-            <a:pPr algn="l">
-              <a:lnSpc>
-                <a:spcPct val="114000"/>
-              </a:lnSpc>
-              <a:spcBef>
-                <a:spcPts val="0"/>
-              </a:spcBef>
-              <a:spcAft>
-                <a:spcPts val="0"/>
-              </a:spcAft>
-              <a:buNone/>
-              <a:defRPr sz="1150" b="0">
-                <a:solidFill>
-                  <a:srgbClr val="303437"/>
-                </a:solidFill>
-                <a:latin typeface="Noto Sans"/>
-              </a:defRPr>
-            </a:pPr>
-            <a:r>
-              <a:rPr sz="1150" b="0" lang="ja-JP" altLang="en-US">
-                <a:solidFill>
-                  <a:srgbClr val="626669"/>
-                </a:solidFill>
-                <a:latin typeface="Noto Sans"/>
-                <a:ea typeface="Noto Sans CJK JP"/>
-                <a:cs typeface="Noto Sans"/>
-                <a:hlinkClick r:id="rId3"/>
-              </a:rPr>
-              <a:t>https://arxiv.org/abs/2409.12186</a:t>
+              <a:t>https://arxiv.org/abs/2305.01210</a:t>
             </a:r>
           </a:p>
         </p:txBody>
@@ -30954,268 +31561,6 @@
       </p:sp>
       <p:sp>
         <p:nvSpPr>
-          <p:cNvPr id="4" name="文献 1: Is Your Code Generated by ChatGPT Really Correct? Rigorous Evaluation of Large Language Models for Code Generation"/>
-          <p:cNvSpPr txBox="1"/>
-          <p:nvPr/>
-        </p:nvSpPr>
-        <p:spPr>
-          <a:xfrm>
-            <a:off x="548640" y="1463040"/>
-            <a:ext cx="8046720" cy="1403731"/>
-          </a:xfrm>
-          <a:prstGeom prst="rect">
-            <a:avLst/>
-          </a:prstGeom>
-          <a:noFill/>
-        </p:spPr>
-        <p:txBody>
-          <a:bodyPr wrap="square" lIns="0" rIns="0" tIns="0" bIns="0">
-            <a:noAutofit/>
-          </a:bodyPr>
-          <a:lstStyle/>
-          <a:p>
-            <a:pPr algn="l">
-              <a:lnSpc>
-                <a:spcPct val="114000"/>
-              </a:lnSpc>
-              <a:spcBef>
-                <a:spcPts val="0"/>
-              </a:spcBef>
-              <a:spcAft>
-                <a:spcPts val="400"/>
-              </a:spcAft>
-              <a:buNone/>
-              <a:defRPr sz="1850" b="0">
-                <a:solidFill>
-                  <a:srgbClr val="303437"/>
-                </a:solidFill>
-                <a:latin typeface="Noto Sans"/>
-              </a:defRPr>
-            </a:pPr>
-            <a:r>
-              <a:rPr sz="1850" b="1" lang="ja-JP" altLang="en-US">
-                <a:solidFill>
-                  <a:srgbClr val="303437"/>
-                </a:solidFill>
-                <a:latin typeface="Noto Sans"/>
-                <a:ea typeface="Noto Sans CJK JP"/>
-                <a:cs typeface="Noto Sans"/>
-              </a:rPr>
-              <a:t>Is Your Code Generated by ChatGPT Really Correct? Rigorous Evaluation of Large Language Models for Code Generation</a:t>
-            </a:r>
-          </a:p>
-          <a:p>
-            <a:pPr algn="l">
-              <a:lnSpc>
-                <a:spcPct val="114000"/>
-              </a:lnSpc>
-              <a:spcBef>
-                <a:spcPts val="0"/>
-              </a:spcBef>
-              <a:spcAft>
-                <a:spcPts val="500"/>
-              </a:spcAft>
-              <a:buNone/>
-              <a:defRPr sz="1350" b="0">
-                <a:solidFill>
-                  <a:srgbClr val="303437"/>
-                </a:solidFill>
-                <a:latin typeface="Noto Sans"/>
-              </a:defRPr>
-            </a:pPr>
-            <a:r>
-              <a:rPr sz="1350" b="0" lang="ja-JP" altLang="en-US">
-                <a:solidFill>
-                  <a:srgbClr val="626669"/>
-                </a:solidFill>
-                <a:latin typeface="Noto Sans"/>
-                <a:ea typeface="Noto Sans CJK JP"/>
-                <a:cs typeface="Noto Sans"/>
-              </a:rPr>
-              <a:t>Liu, Xia, Wang &amp; Zhang (2023). NeurIPS.</a:t>
-            </a:r>
-          </a:p>
-          <a:p>
-            <a:pPr algn="l">
-              <a:lnSpc>
-                <a:spcPct val="114000"/>
-              </a:lnSpc>
-              <a:spcBef>
-                <a:spcPts val="0"/>
-              </a:spcBef>
-              <a:spcAft>
-                <a:spcPts val="400"/>
-              </a:spcAft>
-              <a:buNone/>
-              <a:defRPr sz="1850" b="0">
-                <a:solidFill>
-                  <a:srgbClr val="303437"/>
-                </a:solidFill>
-                <a:latin typeface="Noto Sans"/>
-              </a:defRPr>
-            </a:pPr>
-            <a:r>
-              <a:rPr sz="1850" b="0" lang="ja-JP" altLang="en-US">
-                <a:solidFill>
-                  <a:srgbClr val="303437"/>
-                </a:solidFill>
-                <a:latin typeface="Noto Sans"/>
-                <a:ea typeface="Noto Sans CJK JP"/>
-                <a:cs typeface="Noto Sans"/>
-              </a:rPr>
-              <a:t>入力の拡充と参照実装の点検により、既存テストが見逃す誤りを調べる。</a:t>
-            </a:r>
-          </a:p>
-          <a:p>
-            <a:pPr algn="l">
-              <a:lnSpc>
-                <a:spcPct val="114000"/>
-              </a:lnSpc>
-              <a:spcBef>
-                <a:spcPts val="0"/>
-              </a:spcBef>
-              <a:spcAft>
-                <a:spcPts val="0"/>
-              </a:spcAft>
-              <a:buNone/>
-              <a:defRPr sz="1150" b="0">
-                <a:solidFill>
-                  <a:srgbClr val="303437"/>
-                </a:solidFill>
-                <a:latin typeface="Noto Sans"/>
-              </a:defRPr>
-            </a:pPr>
-            <a:r>
-              <a:rPr sz="1150" b="0" lang="ja-JP" altLang="en-US">
-                <a:solidFill>
-                  <a:srgbClr val="626669"/>
-                </a:solidFill>
-                <a:latin typeface="Noto Sans"/>
-                <a:ea typeface="Noto Sans CJK JP"/>
-                <a:cs typeface="Noto Sans"/>
-                <a:hlinkClick r:id="rId2"/>
-              </a:rPr>
-              <a:t>https://arxiv.org/abs/2305.01210</a:t>
-            </a:r>
-          </a:p>
-        </p:txBody>
-      </p:sp>
-    </p:spTree>
-  </p:cSld>
-  <p:clrMapOvr>
-    <a:masterClrMapping/>
-  </p:clrMapOvr>
-</p:sld>
-</file>
-
-<file path=ppt/slides/slide64.xml><?xml version="1.0" encoding="utf-8"?>
-<p:sld xmlns:a="http://schemas.openxmlformats.org/drawingml/2006/main" xmlns:p="http://schemas.openxmlformats.org/presentationml/2006/main" xmlns:r="http://schemas.openxmlformats.org/officeDocument/2006/relationships">
-  <p:cSld>
-    <p:spTree>
-      <p:nvGrpSpPr>
-        <p:cNvPr id="1" name=""/>
-        <p:cNvGrpSpPr/>
-        <p:nvPr/>
-      </p:nvGrpSpPr>
-      <p:grpSpPr/>
-      <p:sp>
-        <p:nvSpPr>
-          <p:cNvPr id="2" name="Title 1"/>
-          <p:cNvSpPr>
-            <a:spLocks noGrp="1"/>
-          </p:cNvSpPr>
-          <p:nvPr>
-            <p:ph type="title"/>
-          </p:nvPr>
-        </p:nvSpPr>
-        <p:spPr>
-          <a:xfrm>
-            <a:off x="468172" y="650138"/>
-            <a:ext cx="8206740" cy="616305"/>
-          </a:xfrm>
-        </p:spPr>
-        <p:txBody>
-          <a:bodyPr wrap="square" lIns="0" rIns="0" tIns="0" bIns="0">
-            <a:noAutofit/>
-          </a:bodyPr>
-          <a:lstStyle/>
-          <a:p>
-            <a:pPr algn="l">
-              <a:lnSpc>
-                <a:spcPct val="110000"/>
-              </a:lnSpc>
-              <a:buNone/>
-              <a:defRPr sz="2800" b="0">
-                <a:solidFill>
-                  <a:srgbClr val="303437"/>
-                </a:solidFill>
-                <a:latin typeface="Noto Sans"/>
-              </a:defRPr>
-            </a:pPr>
-            <a:r>
-              <a:rPr sz="2800" b="1" lang="ja-JP" altLang="en-US">
-                <a:solidFill>
-                  <a:srgbClr val="303437"/>
-                </a:solidFill>
-                <a:latin typeface="Noto Sans"/>
-                <a:ea typeface="Noto Sans CJK JP"/>
-                <a:cs typeface="Noto Sans"/>
-              </a:rPr>
-              <a:t>参考文献</a:t>
-            </a:r>
-          </a:p>
-        </p:txBody>
-      </p:sp>
-      <p:sp>
-        <p:nvSpPr>
-          <p:cNvPr id="3" name="Title 2"/>
-          <p:cNvSpPr>
-            <a:spLocks noGrp="1"/>
-          </p:cNvSpPr>
-          <p:nvPr>
-            <p:ph type="title" idx="2"/>
-          </p:nvPr>
-        </p:nvSpPr>
-        <p:spPr>
-          <a:xfrm>
-            <a:off x="75895" y="0"/>
-            <a:ext cx="8115300" cy="480060"/>
-          </a:xfrm>
-        </p:spPr>
-        <p:txBody>
-          <a:bodyPr wrap="square" lIns="0" rIns="0" tIns="0" bIns="0" anchor="ctr">
-            <a:noAutofit/>
-          </a:bodyPr>
-          <a:lstStyle/>
-          <a:p>
-            <a:pPr algn="l">
-              <a:lnSpc>
-                <a:spcPct val="110000"/>
-              </a:lnSpc>
-              <a:buNone/>
-              <a:defRPr sz="1400" b="0">
-                <a:solidFill>
-                  <a:srgbClr val="303437"/>
-                </a:solidFill>
-                <a:latin typeface="Noto Sans"/>
-              </a:defRPr>
-            </a:pPr>
-            <a:r>
-              <a:rPr sz="1400" b="1" lang="ja-JP" altLang="en-US">
-                <a:solidFill>
-                  <a:srgbClr val="FFFEF8"/>
-                </a:solidFill>
-                <a:latin typeface="Noto Sans"/>
-                <a:ea typeface="Noto Sans CJK JP"/>
-                <a:cs typeface="Noto Sans"/>
-              </a:rPr>
-              <a:t>Appendix: 3. 研究と参考文献</a:t>
-            </a:r>
-          </a:p>
-        </p:txBody>
-      </p:sp>
-      <p:sp>
-        <p:nvSpPr>
           <p:cNvPr id="4" name="文献 1: SWE-bench: Can Language Models Resolve Real-World GitHub Issues?"/>
           <p:cNvSpPr txBox="1"/>
           <p:nvPr/>
@@ -31626,68 +31971,14 @@
       </p:sp>
       <p:sp>
         <p:nvSpPr>
-          <p:cNvPr id="4" name="TextBox 3"/>
-          <p:cNvSpPr txBox="1"/>
-          <p:nvPr/>
-        </p:nvSpPr>
-        <p:spPr>
-          <a:xfrm>
-            <a:off x="548640" y="1344168"/>
-            <a:ext cx="8046720" cy="228600"/>
-          </a:xfrm>
-          <a:prstGeom prst="rect">
-            <a:avLst/>
-          </a:prstGeom>
-          <a:noFill/>
-        </p:spPr>
-        <p:txBody>
-          <a:bodyPr wrap="square" lIns="0" rIns="0" tIns="0" bIns="0">
-            <a:noAutofit/>
-          </a:bodyPr>
-          <a:lstStyle/>
-          <a:p>
-            <a:pPr algn="l">
-              <a:lnSpc>
-                <a:spcPct val="117000"/>
-              </a:lnSpc>
-              <a:spcBef>
-                <a:spcPts val="0"/>
-              </a:spcBef>
-              <a:spcAft>
-                <a:spcPts val="0"/>
-              </a:spcAft>
-              <a:buNone/>
-              <a:defRPr sz="1300" b="0">
-                <a:solidFill>
-                  <a:srgbClr val="303437"/>
-                </a:solidFill>
-                <a:latin typeface="Noto Sans"/>
-              </a:defRPr>
-            </a:pPr>
-            <a:r>
-              <a:rPr sz="1300" b="0" lang="ja-JP" altLang="en-US">
-                <a:solidFill>
-                  <a:srgbClr val="626669"/>
-                </a:solidFill>
-                <a:latin typeface="Noto Sans"/>
-                <a:ea typeface="Noto Sans CJK JP"/>
-                <a:cs typeface="Noto Sans"/>
-              </a:rPr>
-              <a:t>仕様文の原文（docstringから抜粋）</a:t>
-            </a:r>
-          </a:p>
-        </p:txBody>
-      </p:sp>
-      <p:sp>
-        <p:nvSpPr>
           <p:cNvPr id="5" name="quote-frame"/>
           <p:cNvSpPr/>
           <p:nvPr/>
         </p:nvSpPr>
         <p:spPr>
           <a:xfrm>
-            <a:off x="548640" y="1691640"/>
-            <a:ext cx="8046720" cy="858519"/>
+            <a:off x="548640" y="1549400"/>
+            <a:ext cx="8046720" cy="770635"/>
           </a:xfrm>
           <a:prstGeom prst="rect">
             <a:avLst/>
@@ -31715,14 +32006,14 @@
           </a:fontRef>
         </p:style>
         <p:txBody>
-          <a:bodyPr rtlCol="0" anchor="ctr" wrap="square" lIns="177800" rIns="177800" tIns="101600" bIns="127000">
+          <a:bodyPr rtlCol="0" anchor="t" wrap="square" lIns="127000" rIns="127000" tIns="76200" bIns="76200">
             <a:noAutofit/>
           </a:bodyPr>
           <a:lstStyle/>
           <a:p>
             <a:pPr algn="l">
               <a:lnSpc>
-                <a:spcPts val="2379"/>
+                <a:spcPts val="2340"/>
               </a:lnSpc>
               <a:spcBef>
                 <a:spcPts val="0"/>
@@ -31801,7 +32092,7 @@
                 <a:ea typeface="Noto Sans CJK JP"/>
                 <a:cs typeface="Noto Sans"/>
               </a:rPr>
-              <a:t>[1] OpenAI. HumanEval.jsonl.gz. 改訂b9453e8。 HumanEval/0。入出力例は日本語訳とともに掲載。</a:t>
+              <a:t>[1] OpenAI. HumanEval.jsonl.gz. 改訂b9453e8。 HumanEval/0。仕様文を抜粋。</a:t>
             </a:r>
           </a:p>
           <a:p>
@@ -31828,6 +32119,168 @@
                 <a:hlinkClick r:id="rId2"/>
               </a:rPr>
               <a:t>https://github.com/openai/human-eval/blob/b9453e8/data/HumanEval.jsonl.gz</a:t>
+            </a:r>
+          </a:p>
+        </p:txBody>
+      </p:sp>
+      <p:sp>
+        <p:nvSpPr>
+          <p:cNvPr id="7" name="TextBox 6"/>
+          <p:cNvSpPr txBox="1"/>
+          <p:nvPr/>
+        </p:nvSpPr>
+        <p:spPr>
+          <a:xfrm>
+            <a:off x="548640" y="1295400"/>
+            <a:ext cx="8046720" cy="203200"/>
+          </a:xfrm>
+          <a:prstGeom prst="rect">
+            <a:avLst/>
+          </a:prstGeom>
+          <a:noFill/>
+        </p:spPr>
+        <p:txBody>
+          <a:bodyPr wrap="square" lIns="0" rIns="0" tIns="0" bIns="0">
+            <a:noAutofit/>
+          </a:bodyPr>
+          <a:lstStyle/>
+          <a:p>
+            <a:pPr algn="l">
+              <a:lnSpc>
+                <a:spcPct val="117000"/>
+              </a:lnSpc>
+              <a:spcBef>
+                <a:spcPts val="0"/>
+              </a:spcBef>
+              <a:spcAft>
+                <a:spcPts val="0"/>
+              </a:spcAft>
+              <a:buNone/>
+              <a:defRPr sz="1200" b="0">
+                <a:solidFill>
+                  <a:srgbClr val="303437"/>
+                </a:solidFill>
+                <a:latin typeface="Noto Sans"/>
+              </a:defRPr>
+            </a:pPr>
+            <a:r>
+              <a:rPr sz="1200" b="0" lang="ja-JP" altLang="en-US">
+                <a:solidFill>
+                  <a:srgbClr val="626669"/>
+                </a:solidFill>
+                <a:latin typeface="Noto Sans"/>
+                <a:ea typeface="Noto Sans CJK JP"/>
+                <a:cs typeface="Noto Sans"/>
+              </a:rPr>
+              <a:t>仕様文の原文（抜粋）</a:t>
+            </a:r>
+          </a:p>
+        </p:txBody>
+      </p:sp>
+      <p:sp>
+        <p:nvSpPr>
+          <p:cNvPr id="8" name="TextBox 7"/>
+          <p:cNvSpPr txBox="1"/>
+          <p:nvPr/>
+        </p:nvSpPr>
+        <p:spPr>
+          <a:xfrm>
+            <a:off x="548640" y="2396236"/>
+            <a:ext cx="8046720" cy="203200"/>
+          </a:xfrm>
+          <a:prstGeom prst="rect">
+            <a:avLst/>
+          </a:prstGeom>
+          <a:noFill/>
+        </p:spPr>
+        <p:txBody>
+          <a:bodyPr wrap="square" lIns="0" rIns="0" tIns="0" bIns="0">
+            <a:noAutofit/>
+          </a:bodyPr>
+          <a:lstStyle/>
+          <a:p>
+            <a:pPr algn="l">
+              <a:lnSpc>
+                <a:spcPct val="117000"/>
+              </a:lnSpc>
+              <a:spcBef>
+                <a:spcPts val="0"/>
+              </a:spcBef>
+              <a:spcAft>
+                <a:spcPts val="0"/>
+              </a:spcAft>
+              <a:buNone/>
+              <a:defRPr sz="1200" b="0">
+                <a:solidFill>
+                  <a:srgbClr val="303437"/>
+                </a:solidFill>
+                <a:latin typeface="Noto Sans"/>
+              </a:defRPr>
+            </a:pPr>
+            <a:r>
+              <a:rPr sz="1200" b="0" lang="ja-JP" altLang="en-US">
+                <a:solidFill>
+                  <a:srgbClr val="626669"/>
+                </a:solidFill>
+                <a:latin typeface="Noto Sans"/>
+                <a:ea typeface="Noto Sans CJK JP"/>
+                <a:cs typeface="Noto Sans"/>
+              </a:rPr>
+              <a:t>日本語訳</a:t>
+            </a:r>
+          </a:p>
+        </p:txBody>
+      </p:sp>
+      <p:sp>
+        <p:nvSpPr>
+          <p:cNvPr id="9" name="TextBox 3"/>
+          <p:cNvSpPr txBox="1"/>
+          <p:nvPr/>
+        </p:nvSpPr>
+        <p:spPr>
+          <a:xfrm>
+            <a:off x="594360" y="2650236"/>
+            <a:ext cx="7955280" cy="632460"/>
+          </a:xfrm>
+          <a:prstGeom prst="rect">
+            <a:avLst/>
+          </a:prstGeom>
+          <a:noFill/>
+        </p:spPr>
+        <p:txBody>
+          <a:bodyPr wrap="square" lIns="0" rIns="0" tIns="0" bIns="0">
+            <a:noAutofit/>
+          </a:bodyPr>
+          <a:lstStyle/>
+          <a:p>
+            <a:pPr algn="l">
+              <a:lnSpc>
+                <a:spcPts val="2340"/>
+              </a:lnSpc>
+              <a:spcBef>
+                <a:spcPts val="0"/>
+              </a:spcBef>
+              <a:spcAft>
+                <a:spcPts val="0"/>
+              </a:spcAft>
+              <a:buNone/>
+              <a:defRPr sz="2000" b="0">
+                <a:solidFill>
+                  <a:srgbClr val="303437"/>
+                </a:solidFill>
+                <a:latin typeface="Noto Sans"/>
+              </a:defRPr>
+            </a:pPr>
+            <a:r>
+              <a:rPr sz="2000" b="0" lang="ja-JP" altLang="en-US">
+                <a:solidFill>
+                  <a:srgbClr val="303437"/>
+                </a:solidFill>
+                <a:latin typeface="Noto Sans"/>
+                <a:ea typeface="Noto Sans CJK JP"/>
+                <a:cs typeface="Noto Sans"/>
+              </a:rPr>
+              <a:t>数値のリストに、差の絶対値がしきい値より小さい2要素があればTrueを返す。しきい値と等しい差は条件を満たさない。</a:t>
             </a:r>
           </a:p>
         </p:txBody>
@@ -31893,7 +32346,7 @@
                 <a:ea typeface="Noto Sans CJK JP"/>
                 <a:cs typeface="Noto Sans"/>
               </a:rPr>
-              <a:t>実例1：日本語訳と入出力例</a:t>
+              <a:t>実例1：入出力例と解説</a:t>
             </a:r>
           </a:p>
         </p:txBody>
@@ -31948,67 +32401,13 @@
       </p:sp>
       <p:sp>
         <p:nvSpPr>
-          <p:cNvPr id="4" name="TextBox 3"/>
-          <p:cNvSpPr txBox="1"/>
-          <p:nvPr/>
-        </p:nvSpPr>
-        <p:spPr>
-          <a:xfrm>
-            <a:off x="594360" y="1508760"/>
-            <a:ext cx="7955279" cy="659383"/>
-          </a:xfrm>
-          <a:prstGeom prst="rect">
-            <a:avLst/>
-          </a:prstGeom>
-          <a:noFill/>
-        </p:spPr>
-        <p:txBody>
-          <a:bodyPr wrap="square" lIns="0" rIns="0" tIns="0" bIns="0">
-            <a:noAutofit/>
-          </a:bodyPr>
-          <a:lstStyle/>
-          <a:p>
-            <a:pPr algn="l">
-              <a:lnSpc>
-                <a:spcPct val="119000"/>
-              </a:lnSpc>
-              <a:spcBef>
-                <a:spcPts val="0"/>
-              </a:spcBef>
-              <a:spcAft>
-                <a:spcPts val="0"/>
-              </a:spcAft>
-              <a:buNone/>
-              <a:defRPr sz="2000" b="0">
-                <a:solidFill>
-                  <a:srgbClr val="303437"/>
-                </a:solidFill>
-                <a:latin typeface="Noto Sans"/>
-              </a:defRPr>
-            </a:pPr>
-            <a:r>
-              <a:rPr sz="2000" b="0" lang="ja-JP" altLang="en-US">
-                <a:solidFill>
-                  <a:srgbClr val="303437"/>
-                </a:solidFill>
-                <a:latin typeface="Noto Sans"/>
-                <a:ea typeface="Noto Sans CJK JP"/>
-                <a:cs typeface="Noto Sans"/>
-              </a:rPr>
-              <a:t>数値のリストに、差の絶対値がしきい値より小さい2要素があればTrueを返す。しきい値と等しい差は条件を満たさない。</a:t>
-            </a:r>
-          </a:p>
-        </p:txBody>
-      </p:sp>
-      <p:sp>
-        <p:nvSpPr>
           <p:cNvPr id="5" name="code-frame"/>
           <p:cNvSpPr/>
           <p:nvPr/>
         </p:nvSpPr>
         <p:spPr>
           <a:xfrm>
-            <a:off x="548640" y="2314448"/>
+            <a:off x="548640" y="1676400"/>
             <a:ext cx="8046720" cy="1614170"/>
           </a:xfrm>
           <a:prstGeom prst="rect">
@@ -32394,68 +32793,14 @@
       </p:sp>
       <p:sp>
         <p:nvSpPr>
-          <p:cNvPr id="4" name="TextBox 3"/>
-          <p:cNvSpPr txBox="1"/>
-          <p:nvPr/>
-        </p:nvSpPr>
-        <p:spPr>
-          <a:xfrm>
-            <a:off x="548640" y="1344168"/>
-            <a:ext cx="8046720" cy="228600"/>
-          </a:xfrm>
-          <a:prstGeom prst="rect">
-            <a:avLst/>
-          </a:prstGeom>
-          <a:noFill/>
-        </p:spPr>
-        <p:txBody>
-          <a:bodyPr wrap="square" lIns="0" rIns="0" tIns="0" bIns="0">
-            <a:noAutofit/>
-          </a:bodyPr>
-          <a:lstStyle/>
-          <a:p>
-            <a:pPr algn="l">
-              <a:lnSpc>
-                <a:spcPct val="117000"/>
-              </a:lnSpc>
-              <a:spcBef>
-                <a:spcPts val="0"/>
-              </a:spcBef>
-              <a:spcAft>
-                <a:spcPts val="0"/>
-              </a:spcAft>
-              <a:buNone/>
-              <a:defRPr sz="1300" b="0">
-                <a:solidFill>
-                  <a:srgbClr val="303437"/>
-                </a:solidFill>
-                <a:latin typeface="Noto Sans"/>
-              </a:defRPr>
-            </a:pPr>
-            <a:r>
-              <a:rPr sz="1300" b="0" lang="ja-JP" altLang="en-US">
-                <a:solidFill>
-                  <a:srgbClr val="626669"/>
-                </a:solidFill>
-                <a:latin typeface="Noto Sans"/>
-                <a:ea typeface="Noto Sans CJK JP"/>
-                <a:cs typeface="Noto Sans"/>
-              </a:rPr>
-              <a:t>仕様文の原文（docstringから抜粋）</a:t>
-            </a:r>
-          </a:p>
-        </p:txBody>
-      </p:sp>
-      <p:sp>
-        <p:nvSpPr>
           <p:cNvPr id="5" name="quote-frame"/>
           <p:cNvSpPr/>
           <p:nvPr/>
         </p:nvSpPr>
         <p:spPr>
           <a:xfrm>
-            <a:off x="548640" y="1691640"/>
-            <a:ext cx="8046720" cy="1765300"/>
+            <a:off x="548640" y="1549400"/>
+            <a:ext cx="8046720" cy="1663077"/>
           </a:xfrm>
           <a:prstGeom prst="rect">
             <a:avLst/>
@@ -32483,14 +32828,14 @@
           </a:fontRef>
         </p:style>
         <p:txBody>
-          <a:bodyPr rtlCol="0" anchor="ctr" wrap="square" lIns="177800" rIns="177800" tIns="101600" bIns="127000">
+          <a:bodyPr rtlCol="0" anchor="t" wrap="square" lIns="127000" rIns="127000" tIns="76200" bIns="76200">
             <a:noAutofit/>
           </a:bodyPr>
           <a:lstStyle/>
           <a:p>
             <a:pPr algn="l">
               <a:lnSpc>
-                <a:spcPts val="2379"/>
+                <a:spcPts val="2340"/>
               </a:lnSpc>
               <a:spcBef>
                 <a:spcPts val="0"/>
@@ -32569,7 +32914,7 @@
                 <a:ea typeface="Noto Sans CJK JP"/>
                 <a:cs typeface="Noto Sans"/>
               </a:rPr>
-              <a:t>[1] OpenAI. HumanEval.jsonl.gz. 改訂b9453e8。 HumanEval/1。入出力例は日本語訳とともに掲載。</a:t>
+              <a:t>[1] OpenAI. HumanEval.jsonl.gz. 改訂b9453e8。 HumanEval/1。仕様文を抜粋。</a:t>
             </a:r>
           </a:p>
           <a:p>
@@ -32596,6 +32941,168 @@
                 <a:hlinkClick r:id="rId2"/>
               </a:rPr>
               <a:t>https://github.com/openai/human-eval/blob/b9453e8/data/HumanEval.jsonl.gz</a:t>
+            </a:r>
+          </a:p>
+        </p:txBody>
+      </p:sp>
+      <p:sp>
+        <p:nvSpPr>
+          <p:cNvPr id="7" name="TextBox 6"/>
+          <p:cNvSpPr txBox="1"/>
+          <p:nvPr/>
+        </p:nvSpPr>
+        <p:spPr>
+          <a:xfrm>
+            <a:off x="548640" y="1295400"/>
+            <a:ext cx="8046720" cy="203200"/>
+          </a:xfrm>
+          <a:prstGeom prst="rect">
+            <a:avLst/>
+          </a:prstGeom>
+          <a:noFill/>
+        </p:spPr>
+        <p:txBody>
+          <a:bodyPr wrap="square" lIns="0" rIns="0" tIns="0" bIns="0">
+            <a:noAutofit/>
+          </a:bodyPr>
+          <a:lstStyle/>
+          <a:p>
+            <a:pPr algn="l">
+              <a:lnSpc>
+                <a:spcPct val="117000"/>
+              </a:lnSpc>
+              <a:spcBef>
+                <a:spcPts val="0"/>
+              </a:spcBef>
+              <a:spcAft>
+                <a:spcPts val="0"/>
+              </a:spcAft>
+              <a:buNone/>
+              <a:defRPr sz="1200" b="0">
+                <a:solidFill>
+                  <a:srgbClr val="303437"/>
+                </a:solidFill>
+                <a:latin typeface="Noto Sans"/>
+              </a:defRPr>
+            </a:pPr>
+            <a:r>
+              <a:rPr sz="1200" b="0" lang="ja-JP" altLang="en-US">
+                <a:solidFill>
+                  <a:srgbClr val="626669"/>
+                </a:solidFill>
+                <a:latin typeface="Noto Sans"/>
+                <a:ea typeface="Noto Sans CJK JP"/>
+                <a:cs typeface="Noto Sans"/>
+              </a:rPr>
+              <a:t>仕様文の原文（抜粋）</a:t>
+            </a:r>
+          </a:p>
+        </p:txBody>
+      </p:sp>
+      <p:sp>
+        <p:nvSpPr>
+          <p:cNvPr id="8" name="TextBox 7"/>
+          <p:cNvSpPr txBox="1"/>
+          <p:nvPr/>
+        </p:nvSpPr>
+        <p:spPr>
+          <a:xfrm>
+            <a:off x="548640" y="3288678"/>
+            <a:ext cx="8046720" cy="203200"/>
+          </a:xfrm>
+          <a:prstGeom prst="rect">
+            <a:avLst/>
+          </a:prstGeom>
+          <a:noFill/>
+        </p:spPr>
+        <p:txBody>
+          <a:bodyPr wrap="square" lIns="0" rIns="0" tIns="0" bIns="0">
+            <a:noAutofit/>
+          </a:bodyPr>
+          <a:lstStyle/>
+          <a:p>
+            <a:pPr algn="l">
+              <a:lnSpc>
+                <a:spcPct val="117000"/>
+              </a:lnSpc>
+              <a:spcBef>
+                <a:spcPts val="0"/>
+              </a:spcBef>
+              <a:spcAft>
+                <a:spcPts val="0"/>
+              </a:spcAft>
+              <a:buNone/>
+              <a:defRPr sz="1200" b="0">
+                <a:solidFill>
+                  <a:srgbClr val="303437"/>
+                </a:solidFill>
+                <a:latin typeface="Noto Sans"/>
+              </a:defRPr>
+            </a:pPr>
+            <a:r>
+              <a:rPr sz="1200" b="0" lang="ja-JP" altLang="en-US">
+                <a:solidFill>
+                  <a:srgbClr val="626669"/>
+                </a:solidFill>
+                <a:latin typeface="Noto Sans"/>
+                <a:ea typeface="Noto Sans CJK JP"/>
+                <a:cs typeface="Noto Sans"/>
+              </a:rPr>
+              <a:t>日本語訳</a:t>
+            </a:r>
+          </a:p>
+        </p:txBody>
+      </p:sp>
+      <p:sp>
+        <p:nvSpPr>
+          <p:cNvPr id="9" name="TextBox 3"/>
+          <p:cNvSpPr txBox="1"/>
+          <p:nvPr/>
+        </p:nvSpPr>
+        <p:spPr>
+          <a:xfrm>
+            <a:off x="594360" y="3542678"/>
+            <a:ext cx="7955280" cy="929639"/>
+          </a:xfrm>
+          <a:prstGeom prst="rect">
+            <a:avLst/>
+          </a:prstGeom>
+          <a:noFill/>
+        </p:spPr>
+        <p:txBody>
+          <a:bodyPr wrap="square" lIns="0" rIns="0" tIns="0" bIns="0">
+            <a:noAutofit/>
+          </a:bodyPr>
+          <a:lstStyle/>
+          <a:p>
+            <a:pPr algn="l">
+              <a:lnSpc>
+                <a:spcPts val="2340"/>
+              </a:lnSpc>
+              <a:spcBef>
+                <a:spcPts val="0"/>
+              </a:spcBef>
+              <a:spcAft>
+                <a:spcPts val="0"/>
+              </a:spcAft>
+              <a:buNone/>
+              <a:defRPr sz="2000" b="0">
+                <a:solidFill>
+                  <a:srgbClr val="303437"/>
+                </a:solidFill>
+                <a:latin typeface="Noto Sans"/>
+              </a:defRPr>
+            </a:pPr>
+            <a:r>
+              <a:rPr sz="2000" b="0" lang="ja-JP" altLang="en-US">
+                <a:solidFill>
+                  <a:srgbClr val="303437"/>
+                </a:solidFill>
+                <a:latin typeface="Noto Sans"/>
+                <a:ea typeface="Noto Sans CJK JP"/>
+                <a:cs typeface="Noto Sans"/>
+              </a:rPr>
+              <a:t>空白を無視して括弧列を読み、各グループを文字列に分け、そのリストを返す。各グループの括弧は対応して閉じており、グループ同士は入れ子にならない。</a:t>
             </a:r>
           </a:p>
         </p:txBody>

--- a/slides/datasets-in-10-minutes-humaneval.pptx
+++ b/slides/datasets-in-10-minutes-humaneval.pptx
@@ -12763,7 +12763,7 @@
                 <a:ea typeface="Noto Sans CJK JP"/>
                 <a:cs typeface="Noto Sans"/>
               </a:rPr>
-              <a:t>Chenら（2021）のTable 1。各指標には論文が選んだ生成温度を使う。12Bは約120億パラメータ。</a:t>
+              <a:t>各指標には論文が選んだ生成温度を使う。12Bは約120億パラメータ。</a:t>
             </a:r>
           </a:p>
         </p:txBody>
@@ -13892,7 +13892,7 @@
                 <a:ea typeface="Noto Sans CJK JP"/>
                 <a:cs typeface="Noto Sans"/>
               </a:rPr>
-              <a:t>Qwen2.5-Coder報告Table 16のpass@1。HumanEval+はテストを拡充した同じ164問。</a:t>
+              <a:t>pass@1。HumanEval+はテストを拡充した同じ164問。</a:t>
             </a:r>
           </a:p>
         </p:txBody>
